--- a/presentations/presentation.pptx
+++ b/presentations/presentation.pptx
@@ -25,22 +25,6 @@
     <p:embeddedFont>
       <p:font typeface="標楷體" panose="03000509000000000000" pitchFamily="65" charset="-120"/>
       <p:regular r:id="rId15"/>
-    </p:embeddedFont>
-    <p:embeddedFont>
-      <p:font typeface="Calibri" panose="020F0502020204030204" pitchFamily="34" charset="0"/>
-      <p:regular r:id="rId16"/>
-      <p:bold r:id="rId17"/>
-      <p:italic r:id="rId18"/>
-      <p:boldItalic r:id="rId19"/>
-    </p:embeddedFont>
-    <p:embeddedFont>
-      <p:font typeface="Calibri Light" panose="020F0302020204030204" pitchFamily="34" charset="0"/>
-      <p:regular r:id="rId20"/>
-      <p:italic r:id="rId21"/>
-    </p:embeddedFont>
-    <p:embeddedFont>
-      <p:font typeface="Wingdings 2" panose="05020102010507070707" pitchFamily="18" charset="2"/>
-      <p:regular r:id="rId22"/>
     </p:embeddedFont>
   </p:embeddedFontLst>
   <p:defaultTextStyle>
@@ -363,7 +347,7 @@
                 <a:cs typeface="標楷體"/>
               </a:rPr>
               <a:pPr/>
-              <a:t>10/9/2026</a:t>
+              <a:t>10/10/2026</a:t>
             </a:fld>
             <a:endParaRPr lang="en-US">
               <a:latin typeface="標楷體"/>
@@ -587,7 +571,7 @@
                 <a:cs typeface="標楷體"/>
               </a:rPr>
               <a:pPr/>
-              <a:t>10/9/2026</a:t>
+              <a:t>10/10/2026</a:t>
             </a:fld>
             <a:endParaRPr lang="en-US">
               <a:latin typeface="標楷體"/>
@@ -821,7 +805,7 @@
                 <a:cs typeface="標楷體"/>
               </a:rPr>
               <a:pPr/>
-              <a:t>10/9/2026</a:t>
+              <a:t>10/10/2026</a:t>
             </a:fld>
             <a:endParaRPr lang="en-US">
               <a:latin typeface="標楷體"/>
@@ -1099,7 +1083,7 @@
                 <a:cs typeface="標楷體"/>
               </a:rPr>
               <a:pPr/>
-              <a:t>10/9/2026</a:t>
+              <a:t>10/10/2026</a:t>
             </a:fld>
             <a:endParaRPr lang="en-US">
               <a:latin typeface="標楷體"/>
@@ -1343,7 +1327,7 @@
                 <a:cs typeface="標楷體"/>
               </a:rPr>
               <a:pPr/>
-              <a:t>10/9/2026</a:t>
+              <a:t>10/10/2026</a:t>
             </a:fld>
             <a:endParaRPr lang="en-US">
               <a:latin typeface="標楷體"/>
@@ -1679,7 +1663,7 @@
                 <a:cs typeface="標楷體"/>
               </a:rPr>
               <a:pPr/>
-              <a:t>10/9/2026</a:t>
+              <a:t>10/10/2026</a:t>
             </a:fld>
             <a:endParaRPr lang="en-US">
               <a:latin typeface="標楷體"/>
@@ -2010,7 +1994,7 @@
                 <a:cs typeface="標楷體"/>
               </a:rPr>
               <a:pPr/>
-              <a:t>10/9/2026</a:t>
+              <a:t>10/10/2026</a:t>
             </a:fld>
             <a:endParaRPr lang="en-US">
               <a:latin typeface="標楷體"/>
@@ -2568,7 +2552,7 @@
                 <a:cs typeface="標楷體"/>
               </a:rPr>
               <a:pPr/>
-              <a:t>10/9/2026</a:t>
+              <a:t>10/10/2026</a:t>
             </a:fld>
             <a:endParaRPr lang="en-US">
               <a:latin typeface="標楷體"/>
@@ -2735,7 +2719,7 @@
                 <a:cs typeface="標楷體"/>
               </a:rPr>
               <a:pPr/>
-              <a:t>10/9/2026</a:t>
+              <a:t>10/10/2026</a:t>
             </a:fld>
             <a:endParaRPr lang="en-US">
               <a:latin typeface="標楷體"/>
@@ -2870,7 +2854,7 @@
                 <a:cs typeface="標楷體"/>
               </a:rPr>
               <a:pPr/>
-              <a:t>10/9/2026</a:t>
+              <a:t>10/10/2026</a:t>
             </a:fld>
             <a:endParaRPr lang="en-US">
               <a:latin typeface="標楷體"/>
@@ -3307,7 +3291,7 @@
                 <a:cs typeface="標楷體"/>
               </a:rPr>
               <a:pPr/>
-              <a:t>10/9/2026</a:t>
+              <a:t>10/10/2026</a:t>
             </a:fld>
             <a:endParaRPr lang="en-US">
               <a:latin typeface="標楷體"/>
@@ -3543,7 +3527,7 @@
                 <a:cs typeface="標楷體"/>
               </a:rPr>
               <a:pPr/>
-              <a:t>10/9/2026</a:t>
+              <a:t>10/10/2026</a:t>
             </a:fld>
             <a:endParaRPr lang="en-US">
               <a:latin typeface="標楷體"/>
@@ -3929,7 +3913,7 @@
                 <a:cs typeface="標楷體"/>
               </a:rPr>
               <a:pPr/>
-              <a:t>10/9/2026</a:t>
+              <a:t>10/10/2026</a:t>
             </a:fld>
             <a:endParaRPr lang="en-US">
               <a:latin typeface="標楷體"/>
@@ -4173,7 +4157,7 @@
                 <a:cs typeface="標楷體"/>
               </a:rPr>
               <a:pPr/>
-              <a:t>10/9/2026</a:t>
+              <a:t>10/10/2026</a:t>
             </a:fld>
             <a:endParaRPr lang="en-US">
               <a:latin typeface="標楷體"/>
@@ -4427,7 +4411,7 @@
                 <a:cs typeface="標楷體"/>
               </a:rPr>
               <a:pPr/>
-              <a:t>10/9/2026</a:t>
+              <a:t>10/10/2026</a:t>
             </a:fld>
             <a:endParaRPr lang="en-US">
               <a:latin typeface="標楷體"/>
@@ -4755,7 +4739,7 @@
                 <a:cs typeface="標楷體"/>
               </a:rPr>
               <a:pPr/>
-              <a:t>10/9/2026</a:t>
+              <a:t>10/10/2026</a:t>
             </a:fld>
             <a:endParaRPr lang="en-US">
               <a:latin typeface="標楷體"/>
@@ -5065,7 +5049,7 @@
                 <a:cs typeface="標楷體"/>
               </a:rPr>
               <a:pPr/>
-              <a:t>10/9/2026</a:t>
+              <a:t>10/10/2026</a:t>
             </a:fld>
             <a:endParaRPr lang="en-US">
               <a:latin typeface="標楷體"/>
@@ -5562,7 +5546,7 @@
                 <a:cs typeface="標楷體"/>
               </a:rPr>
               <a:pPr/>
-              <a:t>10/9/2026</a:t>
+              <a:t>10/10/2026</a:t>
             </a:fld>
             <a:endParaRPr lang="en-US">
               <a:latin typeface="標楷體"/>
@@ -5710,7 +5694,7 @@
                 <a:cs typeface="標楷體"/>
               </a:rPr>
               <a:pPr/>
-              <a:t>10/9/2026</a:t>
+              <a:t>10/10/2026</a:t>
             </a:fld>
             <a:endParaRPr lang="en-US">
               <a:latin typeface="標楷體"/>
@@ -5858,7 +5842,7 @@
                 <a:cs typeface="標楷體"/>
               </a:rPr>
               <a:pPr/>
-              <a:t>10/9/2026</a:t>
+              <a:t>10/10/2026</a:t>
             </a:fld>
             <a:endParaRPr lang="en-US">
               <a:latin typeface="標楷體"/>
@@ -6276,7 +6260,7 @@
                 <a:cs typeface="標楷體"/>
               </a:rPr>
               <a:pPr/>
-              <a:t>10/9/2026</a:t>
+              <a:t>10/10/2026</a:t>
             </a:fld>
             <a:endParaRPr lang="en-US">
               <a:latin typeface="標楷體"/>
@@ -6658,7 +6642,7 @@
                 <a:cs typeface="標楷體"/>
               </a:rPr>
               <a:pPr/>
-              <a:t>10/9/2026</a:t>
+              <a:t>10/10/2026</a:t>
             </a:fld>
             <a:endParaRPr lang="en-US">
               <a:latin typeface="標楷體"/>
@@ -6929,7 +6913,7 @@
                 <a:cs typeface="標楷體"/>
               </a:rPr>
               <a:pPr/>
-              <a:t>10/9/2026</a:t>
+              <a:t>10/10/2026</a:t>
             </a:fld>
             <a:endParaRPr lang="en-US">
               <a:latin typeface="標楷體"/>
@@ -7533,7 +7517,7 @@
                 <a:cs typeface="標楷體"/>
               </a:rPr>
               <a:pPr/>
-              <a:t>10/9/2026</a:t>
+              <a:t>10/10/2026</a:t>
             </a:fld>
             <a:endParaRPr lang="en-US">
               <a:latin typeface="標楷體"/>
@@ -8066,43 +8050,40 @@
         </p:nvSpPr>
         <p:spPr>
           <a:xfrm>
-            <a:off x="388620" y="3096387"/>
-            <a:ext cx="16322040" cy="692497"/>
+            <a:off x="822960" y="2834640"/>
+            <a:ext cx="10149840" cy="1737360"/>
           </a:xfrm>
           <a:prstGeom prst="rect">
             <a:avLst/>
           </a:prstGeom>
         </p:spPr>
         <p:txBody>
-          <a:bodyPr lIns="0" tIns="0" rIns="0" bIns="0" rtlCol="0" anchor="t">
-            <a:spAutoFit/>
+          <a:bodyPr lIns="27432" tIns="18288" rIns="27432" bIns="18288" rtlCol="0" anchor="ctr" wrap="square">
+            <a:noAutofit/>
           </a:bodyPr>
           <a:lstStyle/>
           <a:p>
             <a:pPr algn="l">
               <a:lnSpc>
-                <a:spcPts val="5400"/>
+                <a:spcPct val="112000"/>
               </a:lnSpc>
-              <a:defRPr>
+              <a:spcBef>
+                <a:spcPts val="0"/>
+              </a:spcBef>
+              <a:spcAft>
+                <a:spcPts val="0"/>
+              </a:spcAft>
+              <a:defRPr sz="4400">
+                <a:solidFill>
+                  <a:srgbClr val="163048"/>
+                </a:solidFill>
                 <a:latin typeface="標楷體"/>
                 <a:ea typeface="標楷體"/>
                 <a:cs typeface="標楷體"/>
               </a:defRPr>
             </a:pPr>
             <a:r>
-              <a:rPr lang="en-US" sz="4500" b="1" spc="6" dirty="0">
-                <a:solidFill>
-                  <a:srgbClr val="163048"/>
-                </a:solidFill>
-                <a:latin typeface="標楷體" panose="03000509000000000000" pitchFamily="65" charset="-120"/>
-                <a:ea typeface="標楷體" panose="03000509000000000000" pitchFamily="65" charset="-120"/>
-                <a:cs typeface="標楷體"/>
-                <a:sym typeface="Noto Sans CJK TC"/>
-              </a:rPr>
-              <a:t/>
-            </a:r>
-            <a:r>
-              <a:rPr lang="en-US" sz="4500" b="1" spc="6" dirty="0" err="1">
+              <a:rPr lang="en-US" sz="4400" b="1" spc="6" dirty="0" err="1">
                 <a:solidFill>
                   <a:srgbClr val="163048"/>
                 </a:solidFill>
@@ -8206,31 +8187,40 @@
         </p:nvSpPr>
         <p:spPr>
           <a:xfrm>
-            <a:off x="16710660" y="9646158"/>
-            <a:ext cx="480060" cy="320802"/>
+            <a:off x="16779240" y="9646920"/>
+            <a:ext cx="502920" cy="320040"/>
           </a:xfrm>
           <a:prstGeom prst="rect">
             <a:avLst/>
           </a:prstGeom>
         </p:spPr>
         <p:txBody>
-          <a:bodyPr lIns="0" tIns="0" rIns="0" bIns="0" rtlCol="0" anchor="t">
-            <a:spAutoFit/>
+          <a:bodyPr lIns="27432" tIns="18288" rIns="27432" bIns="18288" rtlCol="0" anchor="ctr" wrap="square">
+            <a:noAutofit/>
           </a:bodyPr>
           <a:lstStyle/>
           <a:p>
-            <a:pPr algn="l">
+            <a:pPr algn="r">
               <a:lnSpc>
-                <a:spcPts val="1980"/>
+                <a:spcPct val="112000"/>
               </a:lnSpc>
-              <a:defRPr>
+              <a:spcBef>
+                <a:spcPts val="0"/>
+              </a:spcBef>
+              <a:spcAft>
+                <a:spcPts val="0"/>
+              </a:spcAft>
+              <a:defRPr sz="1600">
+                <a:solidFill>
+                  <a:srgbClr val="506780"/>
+                </a:solidFill>
                 <a:latin typeface="標楷體"/>
                 <a:ea typeface="標楷體"/>
                 <a:cs typeface="標楷體"/>
               </a:defRPr>
             </a:pPr>
             <a:r>
-              <a:rPr lang="en-US" sz="1650" spc="2">
+              <a:rPr lang="en-US" sz="1600" spc="2">
                 <a:solidFill>
                   <a:srgbClr val="506780"/>
                 </a:solidFill>
@@ -8331,31 +8321,40 @@
         </p:nvSpPr>
         <p:spPr>
           <a:xfrm>
-            <a:off x="1211580" y="7386066"/>
-            <a:ext cx="9464040" cy="820738"/>
+            <a:off x="914400" y="7132320"/>
+            <a:ext cx="10058400" cy="1143000"/>
           </a:xfrm>
           <a:prstGeom prst="rect">
             <a:avLst/>
           </a:prstGeom>
         </p:spPr>
         <p:txBody>
-          <a:bodyPr lIns="0" tIns="0" rIns="0" bIns="0" rtlCol="0" anchor="t">
-            <a:spAutoFit/>
+          <a:bodyPr lIns="27432" tIns="18288" rIns="27432" bIns="18288" rtlCol="0" anchor="ctr" wrap="square">
+            <a:noAutofit/>
           </a:bodyPr>
           <a:lstStyle/>
           <a:p>
             <a:pPr algn="l">
               <a:lnSpc>
-                <a:spcPts val="3240"/>
+                <a:spcPct val="112000"/>
               </a:lnSpc>
-              <a:defRPr>
+              <a:spcBef>
+                <a:spcPts val="0"/>
+              </a:spcBef>
+              <a:spcAft>
+                <a:spcPts val="0"/>
+              </a:spcAft>
+              <a:defRPr sz="2600">
+                <a:solidFill>
+                  <a:srgbClr val="163048"/>
+                </a:solidFill>
                 <a:latin typeface="標楷體"/>
                 <a:ea typeface="標楷體"/>
                 <a:cs typeface="標楷體"/>
               </a:defRPr>
             </a:pPr>
             <a:r>
-              <a:rPr lang="en-US" sz="2700" dirty="0" err="1">
+              <a:rPr lang="en-US" sz="2600" dirty="0" err="1">
                 <a:solidFill>
                   <a:srgbClr val="163048"/>
                 </a:solidFill>
@@ -8379,16 +8378,25 @@
           <a:p>
             <a:pPr algn="l">
               <a:lnSpc>
-                <a:spcPts val="3240"/>
+                <a:spcPct val="112000"/>
               </a:lnSpc>
-              <a:defRPr>
+              <a:spcBef>
+                <a:spcPts val="0"/>
+              </a:spcBef>
+              <a:spcAft>
+                <a:spcPts val="0"/>
+              </a:spcAft>
+              <a:defRPr sz="2600">
+                <a:solidFill>
+                  <a:srgbClr val="163048"/>
+                </a:solidFill>
                 <a:latin typeface="標楷體"/>
                 <a:ea typeface="標楷體"/>
                 <a:cs typeface="標楷體"/>
               </a:defRPr>
             </a:pPr>
             <a:r>
-              <a:rPr lang="zh-TW" altLang="en-US" sz="2700" dirty="0">
+              <a:rPr lang="zh-TW" altLang="en-US" sz="2600" dirty="0">
                 <a:solidFill>
                   <a:srgbClr val="163048"/>
                 </a:solidFill>
@@ -8400,7 +8408,7 @@
               <a:t>提報人</a:t>
             </a:r>
             <a:r>
-              <a:rPr lang="en-US" altLang="zh-TW" sz="2700" dirty="0">
+              <a:rPr lang="en-US" altLang="zh-TW" sz="2600" dirty="0">
                 <a:solidFill>
                   <a:srgbClr val="163048"/>
                 </a:solidFill>
@@ -8412,7 +8420,7 @@
               <a:t>:</a:t>
             </a:r>
             <a:r>
-              <a:rPr lang="en-US" sz="2700" dirty="0" err="1">
+              <a:rPr lang="en-US" sz="2600" dirty="0" err="1">
                 <a:solidFill>
                   <a:srgbClr val="163048"/>
                 </a:solidFill>
@@ -8424,7 +8432,7 @@
               <a:t>徐專洧</a:t>
             </a:r>
             <a:r>
-              <a:rPr lang="zh-TW" altLang="en-US" sz="2700" dirty="0">
+              <a:rPr lang="zh-TW" altLang="en-US" sz="2600" dirty="0">
                 <a:solidFill>
                   <a:srgbClr val="163048"/>
                 </a:solidFill>
@@ -8436,7 +8444,7 @@
               <a:t>、</a:t>
             </a:r>
             <a:r>
-              <a:rPr lang="en-US" sz="2700" dirty="0">
+              <a:rPr lang="en-US" sz="2600" dirty="0">
                 <a:solidFill>
                   <a:srgbClr val="163048"/>
                 </a:solidFill>
@@ -8448,7 +8456,7 @@
               <a:t>陳宥翔</a:t>
             </a:r>
             <a:r>
-              <a:rPr lang="zh-TW" altLang="en-US" sz="2700" dirty="0">
+              <a:rPr lang="zh-TW" altLang="en-US" sz="2600" dirty="0">
                 <a:solidFill>
                   <a:srgbClr val="163048"/>
                 </a:solidFill>
@@ -8460,7 +8468,7 @@
               <a:t>、</a:t>
             </a:r>
             <a:r>
-              <a:rPr lang="en-US" sz="2700" dirty="0" err="1">
+              <a:rPr lang="en-US" sz="2600" dirty="0" err="1">
                 <a:solidFill>
                   <a:srgbClr val="163048"/>
                 </a:solidFill>
@@ -8472,7 +8480,7 @@
               <a:t>張瑞洋</a:t>
             </a:r>
             <a:r>
-              <a:rPr lang="zh-TW" altLang="en-US" sz="2700" dirty="0">
+              <a:rPr lang="zh-TW" altLang="en-US" sz="2600" dirty="0">
                 <a:solidFill>
                   <a:srgbClr val="163048"/>
                 </a:solidFill>
@@ -8484,7 +8492,7 @@
               <a:t>、</a:t>
             </a:r>
             <a:r>
-              <a:rPr lang="en-US" sz="2700" dirty="0" err="1">
+              <a:rPr lang="en-US" sz="2600" dirty="0" err="1">
                 <a:solidFill>
                   <a:srgbClr val="163048"/>
                 </a:solidFill>
@@ -8621,31 +8629,40 @@
         </p:nvSpPr>
         <p:spPr>
           <a:xfrm>
-            <a:off x="937260" y="1066038"/>
-            <a:ext cx="16322040" cy="692497"/>
+            <a:off x="777240" y="640080"/>
+            <a:ext cx="16733520" cy="822960"/>
           </a:xfrm>
           <a:prstGeom prst="rect">
             <a:avLst/>
           </a:prstGeom>
         </p:spPr>
         <p:txBody>
-          <a:bodyPr lIns="0" tIns="0" rIns="0" bIns="0" rtlCol="0" anchor="t">
-            <a:spAutoFit/>
+          <a:bodyPr lIns="27432" tIns="18288" rIns="27432" bIns="18288" rtlCol="0" anchor="ctr" wrap="square">
+            <a:noAutofit/>
           </a:bodyPr>
           <a:lstStyle/>
           <a:p>
             <a:pPr algn="l">
               <a:lnSpc>
-                <a:spcPts val="5400"/>
+                <a:spcPct val="112000"/>
               </a:lnSpc>
-              <a:defRPr>
+              <a:spcBef>
+                <a:spcPts val="0"/>
+              </a:spcBef>
+              <a:spcAft>
+                <a:spcPts val="0"/>
+              </a:spcAft>
+              <a:defRPr sz="4400">
+                <a:solidFill>
+                  <a:srgbClr val="163048"/>
+                </a:solidFill>
                 <a:latin typeface="標楷體"/>
                 <a:ea typeface="標楷體"/>
                 <a:cs typeface="標楷體"/>
               </a:defRPr>
             </a:pPr>
             <a:r>
-              <a:rPr lang="en-US" sz="4500" b="1" dirty="0" err="1">
+              <a:rPr lang="en-US" sz="4400" b="1" dirty="0" err="1">
                 <a:solidFill>
                   <a:srgbClr val="163048"/>
                 </a:solidFill>
@@ -8749,31 +8766,40 @@
         </p:nvSpPr>
         <p:spPr>
           <a:xfrm>
-            <a:off x="16710660" y="9646158"/>
-            <a:ext cx="480060" cy="320802"/>
+            <a:off x="16779240" y="9646920"/>
+            <a:ext cx="502920" cy="320040"/>
           </a:xfrm>
           <a:prstGeom prst="rect">
             <a:avLst/>
           </a:prstGeom>
         </p:spPr>
         <p:txBody>
-          <a:bodyPr lIns="0" tIns="0" rIns="0" bIns="0" rtlCol="0" anchor="t">
-            <a:spAutoFit/>
+          <a:bodyPr lIns="27432" tIns="18288" rIns="27432" bIns="18288" rtlCol="0" anchor="ctr" wrap="square">
+            <a:noAutofit/>
           </a:bodyPr>
           <a:lstStyle/>
           <a:p>
-            <a:pPr algn="l">
+            <a:pPr algn="r">
               <a:lnSpc>
-                <a:spcPts val="1980"/>
+                <a:spcPct val="112000"/>
               </a:lnSpc>
-              <a:defRPr>
+              <a:spcBef>
+                <a:spcPts val="0"/>
+              </a:spcBef>
+              <a:spcAft>
+                <a:spcPts val="0"/>
+              </a:spcAft>
+              <a:defRPr sz="1600">
+                <a:solidFill>
+                  <a:srgbClr val="506780"/>
+                </a:solidFill>
                 <a:latin typeface="標楷體"/>
                 <a:ea typeface="標楷體"/>
                 <a:cs typeface="標楷體"/>
               </a:defRPr>
             </a:pPr>
             <a:r>
-              <a:rPr lang="en-US" sz="1650" spc="2">
+              <a:rPr lang="en-US" sz="1600" spc="2">
                 <a:solidFill>
                   <a:srgbClr val="506780"/>
                 </a:solidFill>
@@ -8888,31 +8914,40 @@
         </p:nvSpPr>
         <p:spPr>
           <a:xfrm>
-            <a:off x="1472184" y="3014853"/>
-            <a:ext cx="7063740" cy="485902"/>
+            <a:off x="1417320" y="2999232"/>
+            <a:ext cx="7132320" cy="594360"/>
           </a:xfrm>
           <a:prstGeom prst="rect">
             <a:avLst/>
           </a:prstGeom>
         </p:spPr>
         <p:txBody>
-          <a:bodyPr lIns="0" tIns="0" rIns="0" bIns="0" rtlCol="0" anchor="t">
-            <a:spAutoFit/>
+          <a:bodyPr lIns="27432" tIns="18288" rIns="27432" bIns="18288" rtlCol="0" anchor="ctr" wrap="square">
+            <a:noAutofit/>
           </a:bodyPr>
           <a:lstStyle/>
           <a:p>
             <a:pPr algn="l">
               <a:lnSpc>
-                <a:spcPts val="3960"/>
+                <a:spcPct val="112000"/>
               </a:lnSpc>
-              <a:defRPr>
+              <a:spcBef>
+                <a:spcPts val="0"/>
+              </a:spcBef>
+              <a:spcAft>
+                <a:spcPts val="0"/>
+              </a:spcAft>
+              <a:defRPr sz="3000">
+                <a:solidFill>
+                  <a:srgbClr val="2563EB"/>
+                </a:solidFill>
                 <a:latin typeface="標楷體"/>
                 <a:ea typeface="標楷體"/>
                 <a:cs typeface="標楷體"/>
               </a:defRPr>
             </a:pPr>
             <a:r>
-              <a:rPr lang="en-US" sz="3300" b="1" dirty="0" err="1">
+              <a:rPr lang="en-US" sz="3000" b="1" dirty="0" err="1">
                 <a:solidFill>
                   <a:srgbClr val="2563EB"/>
                 </a:solidFill>
@@ -8943,37 +8978,49 @@
         </p:nvSpPr>
         <p:spPr>
           <a:xfrm>
-            <a:off x="1472184" y="3709035"/>
-            <a:ext cx="7138416" cy="773866"/>
+            <a:off x="1417320" y="3794760"/>
+            <a:ext cx="7132320" cy="1033271"/>
           </a:xfrm>
           <a:prstGeom prst="rect">
             <a:avLst/>
           </a:prstGeom>
         </p:spPr>
         <p:txBody>
-          <a:bodyPr wrap="square" lIns="0" tIns="0" rIns="0" bIns="0" rtlCol="0" anchor="t">
-            <a:spAutoFit/>
+          <a:bodyPr wrap="square" lIns="27432" tIns="18288" rIns="27432" bIns="18288" rtlCol="0" anchor="ctr">
+            <a:noAutofit/>
           </a:bodyPr>
           <a:lstStyle/>
           <a:p>
             <a:pPr algn="l">
               <a:lnSpc>
-                <a:spcPts val="3060"/>
+                <a:spcPct val="112000"/>
               </a:lnSpc>
-              <a:defRPr>
+              <a:spcBef>
+                <a:spcPts val="0"/>
+              </a:spcBef>
+              <a:spcAft>
+                <a:spcPts val="0"/>
+              </a:spcAft>
+              <a:defRPr sz="2600">
+                <a:solidFill>
+                  <a:srgbClr val="000000"/>
+                </a:solidFill>
                 <a:latin typeface="標楷體"/>
                 <a:ea typeface="標楷體"/>
                 <a:cs typeface="標楷體"/>
               </a:defRPr>
             </a:pPr>
             <a:r>
-              <a:rPr lang="en-US" sz="2400" b="1" dirty="0">
+              <a:rPr lang="en-US" sz="2600" b="1" dirty="0">
+                <a:solidFill>
+                  <a:srgbClr val="000000"/>
+                </a:solidFill>
                 <a:latin typeface="標楷體" panose="03000509000000000000" pitchFamily="65" charset="-120"/>
                 <a:ea typeface="標楷體" panose="03000509000000000000" pitchFamily="65" charset="-120"/>
                 <a:cs typeface="標楷體"/>
                 <a:sym typeface="Noto Sans CJK TC"/>
               </a:rPr>
-              <a:t>透過無人機多張照篇與影像，讓3DGS能有效建構坑洞3D模型</a:t>
+              <a:t>透過無人機多張照片與影像，讓3DGS能有效建構坑洞3D模型</a:t>
             </a:r>
           </a:p>
         </p:txBody>
@@ -9079,31 +9126,40 @@
         </p:nvSpPr>
         <p:spPr>
           <a:xfrm>
-            <a:off x="9907524" y="3014853"/>
-            <a:ext cx="7063740" cy="485902"/>
+            <a:off x="9875520" y="2999232"/>
+            <a:ext cx="7132320" cy="594360"/>
           </a:xfrm>
           <a:prstGeom prst="rect">
             <a:avLst/>
           </a:prstGeom>
         </p:spPr>
         <p:txBody>
-          <a:bodyPr lIns="0" tIns="0" rIns="0" bIns="0" rtlCol="0" anchor="t">
-            <a:spAutoFit/>
+          <a:bodyPr lIns="27432" tIns="18288" rIns="27432" bIns="18288" rtlCol="0" anchor="ctr" wrap="square">
+            <a:noAutofit/>
           </a:bodyPr>
           <a:lstStyle/>
           <a:p>
             <a:pPr algn="l">
               <a:lnSpc>
-                <a:spcPts val="3960"/>
+                <a:spcPct val="112000"/>
               </a:lnSpc>
-              <a:defRPr>
+              <a:spcBef>
+                <a:spcPts val="0"/>
+              </a:spcBef>
+              <a:spcAft>
+                <a:spcPts val="0"/>
+              </a:spcAft>
+              <a:defRPr sz="3000">
+                <a:solidFill>
+                  <a:srgbClr val="2563EB"/>
+                </a:solidFill>
                 <a:latin typeface="標楷體"/>
                 <a:ea typeface="標楷體"/>
                 <a:cs typeface="標楷體"/>
               </a:defRPr>
             </a:pPr>
             <a:r>
-              <a:rPr lang="en-US" sz="3300" b="1" dirty="0" err="1">
+              <a:rPr lang="en-US" sz="3000" b="1" dirty="0" err="1">
                 <a:solidFill>
                   <a:srgbClr val="2563EB"/>
                 </a:solidFill>
@@ -9134,31 +9190,43 @@
         </p:nvSpPr>
         <p:spPr>
           <a:xfrm>
-            <a:off x="9907524" y="3825331"/>
-            <a:ext cx="6995160" cy="773866"/>
+            <a:off x="9875520" y="3794760"/>
+            <a:ext cx="7132320" cy="1033271"/>
           </a:xfrm>
           <a:prstGeom prst="rect">
             <a:avLst/>
           </a:prstGeom>
         </p:spPr>
         <p:txBody>
-          <a:bodyPr lIns="0" tIns="0" rIns="0" bIns="0" rtlCol="0" anchor="t">
-            <a:spAutoFit/>
+          <a:bodyPr lIns="27432" tIns="18288" rIns="27432" bIns="18288" rtlCol="0" anchor="ctr" wrap="square">
+            <a:noAutofit/>
           </a:bodyPr>
           <a:lstStyle/>
           <a:p>
             <a:pPr algn="l">
               <a:lnSpc>
-                <a:spcPts val="3060"/>
+                <a:spcPct val="112000"/>
               </a:lnSpc>
-              <a:defRPr>
+              <a:spcBef>
+                <a:spcPts val="0"/>
+              </a:spcBef>
+              <a:spcAft>
+                <a:spcPts val="0"/>
+              </a:spcAft>
+              <a:defRPr sz="2600">
+                <a:solidFill>
+                  <a:srgbClr val="000000"/>
+                </a:solidFill>
                 <a:latin typeface="標楷體"/>
                 <a:ea typeface="標楷體"/>
                 <a:cs typeface="標楷體"/>
               </a:defRPr>
             </a:pPr>
             <a:r>
-              <a:rPr lang="en-US" sz="2400" b="1" dirty="0">
+              <a:rPr lang="en-US" sz="2600" b="1" dirty="0">
+                <a:solidFill>
+                  <a:srgbClr val="000000"/>
+                </a:solidFill>
                 <a:latin typeface="標楷體" panose="03000509000000000000" pitchFamily="65" charset="-120"/>
                 <a:ea typeface="標楷體" panose="03000509000000000000" pitchFamily="65" charset="-120"/>
                 <a:cs typeface="標楷體"/>
@@ -9270,31 +9338,40 @@
         </p:nvSpPr>
         <p:spPr>
           <a:xfrm>
-            <a:off x="1472184" y="5689473"/>
-            <a:ext cx="7063740" cy="485902"/>
+            <a:off x="1417320" y="5696712"/>
+            <a:ext cx="7132320" cy="594360"/>
           </a:xfrm>
           <a:prstGeom prst="rect">
             <a:avLst/>
           </a:prstGeom>
         </p:spPr>
         <p:txBody>
-          <a:bodyPr lIns="0" tIns="0" rIns="0" bIns="0" rtlCol="0" anchor="t">
-            <a:spAutoFit/>
+          <a:bodyPr lIns="27432" tIns="18288" rIns="27432" bIns="18288" rtlCol="0" anchor="ctr" wrap="square">
+            <a:noAutofit/>
           </a:bodyPr>
           <a:lstStyle/>
           <a:p>
             <a:pPr algn="l">
               <a:lnSpc>
-                <a:spcPts val="3960"/>
+                <a:spcPct val="112000"/>
               </a:lnSpc>
-              <a:defRPr>
+              <a:spcBef>
+                <a:spcPts val="0"/>
+              </a:spcBef>
+              <a:spcAft>
+                <a:spcPts val="0"/>
+              </a:spcAft>
+              <a:defRPr sz="3000">
+                <a:solidFill>
+                  <a:srgbClr val="2563EB"/>
+                </a:solidFill>
                 <a:latin typeface="標楷體"/>
                 <a:ea typeface="標楷體"/>
                 <a:cs typeface="標楷體"/>
               </a:defRPr>
             </a:pPr>
             <a:r>
-              <a:rPr lang="en-US" sz="3300" b="1" dirty="0" err="1">
+              <a:rPr lang="en-US" sz="3000" b="1" dirty="0" err="1">
                 <a:solidFill>
                   <a:srgbClr val="2563EB"/>
                 </a:solidFill>
@@ -9325,31 +9402,43 @@
         </p:nvSpPr>
         <p:spPr>
           <a:xfrm>
-            <a:off x="1472184" y="6696075"/>
-            <a:ext cx="6995160" cy="376321"/>
+            <a:off x="1417320" y="6464808"/>
+            <a:ext cx="7132320" cy="1033271"/>
           </a:xfrm>
           <a:prstGeom prst="rect">
             <a:avLst/>
           </a:prstGeom>
         </p:spPr>
         <p:txBody>
-          <a:bodyPr lIns="0" tIns="0" rIns="0" bIns="0" rtlCol="0" anchor="t">
-            <a:spAutoFit/>
+          <a:bodyPr lIns="27432" tIns="18288" rIns="27432" bIns="18288" rtlCol="0" anchor="ctr" wrap="square">
+            <a:noAutofit/>
           </a:bodyPr>
           <a:lstStyle/>
           <a:p>
             <a:pPr algn="l">
               <a:lnSpc>
-                <a:spcPts val="3060"/>
+                <a:spcPct val="112000"/>
               </a:lnSpc>
-              <a:defRPr>
+              <a:spcBef>
+                <a:spcPts val="0"/>
+              </a:spcBef>
+              <a:spcAft>
+                <a:spcPts val="0"/>
+              </a:spcAft>
+              <a:defRPr sz="2600">
+                <a:solidFill>
+                  <a:srgbClr val="000000"/>
+                </a:solidFill>
                 <a:latin typeface="標楷體"/>
                 <a:ea typeface="標楷體"/>
                 <a:cs typeface="標楷體"/>
               </a:defRPr>
             </a:pPr>
             <a:r>
-              <a:rPr lang="en-US" sz="2400" b="1" dirty="0" err="1">
+              <a:rPr lang="en-US" sz="2600" b="1" dirty="0" err="1">
+                <a:solidFill>
+                  <a:srgbClr val="000000"/>
+                </a:solidFill>
                 <a:latin typeface="標楷體" panose="03000509000000000000" pitchFamily="65" charset="-120"/>
                 <a:ea typeface="標楷體" panose="03000509000000000000" pitchFamily="65" charset="-120"/>
                 <a:cs typeface="標楷體"/>
@@ -9467,31 +9556,40 @@
         </p:nvSpPr>
         <p:spPr>
           <a:xfrm>
-            <a:off x="9907524" y="5689473"/>
-            <a:ext cx="7063740" cy="485902"/>
+            <a:off x="9875520" y="5696712"/>
+            <a:ext cx="7132320" cy="594360"/>
           </a:xfrm>
           <a:prstGeom prst="rect">
             <a:avLst/>
           </a:prstGeom>
         </p:spPr>
         <p:txBody>
-          <a:bodyPr lIns="0" tIns="0" rIns="0" bIns="0" rtlCol="0" anchor="t">
-            <a:spAutoFit/>
+          <a:bodyPr lIns="27432" tIns="18288" rIns="27432" bIns="18288" rtlCol="0" anchor="ctr" wrap="square">
+            <a:noAutofit/>
           </a:bodyPr>
           <a:lstStyle/>
           <a:p>
             <a:pPr algn="l">
               <a:lnSpc>
-                <a:spcPts val="3960"/>
+                <a:spcPct val="112000"/>
               </a:lnSpc>
-              <a:defRPr>
+              <a:spcBef>
+                <a:spcPts val="0"/>
+              </a:spcBef>
+              <a:spcAft>
+                <a:spcPts val="0"/>
+              </a:spcAft>
+              <a:defRPr sz="3000">
+                <a:solidFill>
+                  <a:srgbClr val="2563EB"/>
+                </a:solidFill>
                 <a:latin typeface="標楷體"/>
                 <a:ea typeface="標楷體"/>
                 <a:cs typeface="標楷體"/>
               </a:defRPr>
             </a:pPr>
             <a:r>
-              <a:rPr lang="en-US" sz="3300" b="1" dirty="0" err="1">
+              <a:rPr lang="en-US" sz="3000" b="1" dirty="0" err="1">
                 <a:solidFill>
                   <a:srgbClr val="2563EB"/>
                 </a:solidFill>
@@ -9522,31 +9620,43 @@
         </p:nvSpPr>
         <p:spPr>
           <a:xfrm>
-            <a:off x="9907524" y="6696075"/>
-            <a:ext cx="6995160" cy="376321"/>
+            <a:off x="9875520" y="6464808"/>
+            <a:ext cx="7132320" cy="1033271"/>
           </a:xfrm>
           <a:prstGeom prst="rect">
             <a:avLst/>
           </a:prstGeom>
         </p:spPr>
         <p:txBody>
-          <a:bodyPr lIns="0" tIns="0" rIns="0" bIns="0" rtlCol="0" anchor="t">
-            <a:spAutoFit/>
+          <a:bodyPr lIns="27432" tIns="18288" rIns="27432" bIns="18288" rtlCol="0" anchor="ctr" wrap="square">
+            <a:noAutofit/>
           </a:bodyPr>
           <a:lstStyle/>
           <a:p>
             <a:pPr algn="l">
               <a:lnSpc>
-                <a:spcPts val="3060"/>
+                <a:spcPct val="112000"/>
               </a:lnSpc>
-              <a:defRPr>
+              <a:spcBef>
+                <a:spcPts val="0"/>
+              </a:spcBef>
+              <a:spcAft>
+                <a:spcPts val="0"/>
+              </a:spcAft>
+              <a:defRPr sz="2600">
+                <a:solidFill>
+                  <a:srgbClr val="000000"/>
+                </a:solidFill>
                 <a:latin typeface="標楷體"/>
                 <a:ea typeface="標楷體"/>
                 <a:cs typeface="標楷體"/>
               </a:defRPr>
             </a:pPr>
             <a:r>
-              <a:rPr lang="en-US" sz="2400" b="1" dirty="0" err="1">
+              <a:rPr lang="en-US" sz="2600" b="1" dirty="0" err="1">
+                <a:solidFill>
+                  <a:srgbClr val="000000"/>
+                </a:solidFill>
                 <a:latin typeface="標楷體" panose="03000509000000000000" pitchFamily="65" charset="-120"/>
                 <a:ea typeface="標楷體" panose="03000509000000000000" pitchFamily="65" charset="-120"/>
                 <a:cs typeface="標楷體"/>
@@ -9598,70 +9708,6 @@
       </p:grpSpPr>
       <p:sp>
         <p:nvSpPr>
-          <p:cNvPr id="6" name="Freeform 6"/>
-          <p:cNvSpPr/>
-          <p:nvPr/>
-        </p:nvSpPr>
-        <p:spPr>
-          <a:xfrm>
-            <a:off x="10332720" y="2423160"/>
-            <a:ext cx="7132320" cy="4754880"/>
-          </a:xfrm>
-          <a:custGeom>
-            <a:avLst/>
-            <a:gdLst/>
-            <a:ahLst/>
-            <a:cxnLst/>
-            <a:rect l="l" t="t" r="r" b="b"/>
-            <a:pathLst>
-              <a:path w="8099129" h="5399419">
-                <a:moveTo>
-                  <a:pt x="0" y="0"/>
-                </a:moveTo>
-                <a:lnTo>
-                  <a:pt x="8099128" y="0"/>
-                </a:lnTo>
-                <a:lnTo>
-                  <a:pt x="8099128" y="5399419"/>
-                </a:lnTo>
-                <a:lnTo>
-                  <a:pt x="0" y="5399419"/>
-                </a:lnTo>
-                <a:lnTo>
-                  <a:pt x="0" y="0"/>
-                </a:lnTo>
-                <a:close/>
-              </a:path>
-            </a:pathLst>
-          </a:custGeom>
-          <a:blipFill>
-            <a:blip r:embed="rId2"/>
-            <a:stretch>
-              <a:fillRect/>
-            </a:stretch>
-          </a:blipFill>
-        </p:spPr>
-        <p:txBody>
-          <a:bodyPr/>
-          <a:lstStyle/>
-          <a:p>
-            <a:pPr>
-              <a:defRPr>
-                <a:latin typeface="標楷體"/>
-                <a:ea typeface="標楷體"/>
-                <a:cs typeface="標楷體"/>
-              </a:defRPr>
-            </a:pPr>
-            <a:endParaRPr>
-              <a:latin typeface="標楷體"/>
-              <a:ea typeface="標楷體"/>
-              <a:cs typeface="標楷體"/>
-            </a:endParaRPr>
-          </a:p>
-        </p:txBody>
-      </p:sp>
-      <p:sp>
-        <p:nvSpPr>
           <p:cNvPr id="7" name="Rectangle 6"/>
           <p:cNvSpPr/>
           <p:nvPr/>
@@ -9722,8 +9768,8 @@
         </p:nvSpPr>
         <p:spPr>
           <a:xfrm>
-            <a:off x="731520" y="640080"/>
-            <a:ext cx="16459200" cy="707886"/>
+            <a:off x="777240" y="640080"/>
+            <a:ext cx="16733520" cy="822960"/>
           </a:xfrm>
           <a:prstGeom prst="rect">
             <a:avLst/>
@@ -9731,16 +9777,22 @@
           <a:noFill/>
         </p:spPr>
         <p:txBody>
-          <a:bodyPr wrap="square" lIns="54864" rIns="54864">
-            <a:spAutoFit/>
+          <a:bodyPr wrap="square" lIns="27432" rIns="27432" tIns="18288" bIns="18288" anchor="ctr">
+            <a:noAutofit/>
           </a:bodyPr>
           <a:lstStyle/>
           <a:p>
-            <a:pPr>
+            <a:pPr algn="l">
+              <a:lnSpc>
+                <a:spcPct val="112000"/>
+              </a:lnSpc>
+              <a:spcBef>
+                <a:spcPts val="0"/>
+              </a:spcBef>
               <a:spcAft>
-                <a:spcPts val="800"/>
+                <a:spcPts val="0"/>
               </a:spcAft>
-              <a:defRPr sz="4000" b="1">
+              <a:defRPr sz="4400" b="1">
                 <a:solidFill>
                   <a:srgbClr val="163048"/>
                 </a:solidFill>
@@ -9750,7 +9802,10 @@
               </a:defRPr>
             </a:pPr>
             <a:r>
-              <a:rPr dirty="0" err="1">
+              <a:rPr dirty="0" err="1" sz="4400">
+                <a:solidFill>
+                  <a:srgbClr val="163048"/>
+                </a:solidFill>
                 <a:latin typeface="標楷體" panose="03000509000000000000" pitchFamily="65" charset="-120"/>
                 <a:ea typeface="標楷體" panose="03000509000000000000" pitchFamily="65" charset="-120"/>
                 <a:cs typeface="標楷體"/>
@@ -9758,7 +9813,10 @@
               <a:t>肆、驗證方式｜Blender</a:t>
             </a:r>
             <a:r>
-              <a:rPr dirty="0">
+              <a:rPr dirty="0" sz="4400">
+                <a:solidFill>
+                  <a:srgbClr val="163048"/>
+                </a:solidFill>
                 <a:latin typeface="標楷體" panose="03000509000000000000" pitchFamily="65" charset="-120"/>
                 <a:ea typeface="標楷體" panose="03000509000000000000" pitchFamily="65" charset="-120"/>
                 <a:cs typeface="標楷體"/>
@@ -9766,7 +9824,10 @@
               <a:t> </a:t>
             </a:r>
             <a:r>
-              <a:rPr dirty="0" err="1">
+              <a:rPr dirty="0" err="1" sz="4400">
+                <a:solidFill>
+                  <a:srgbClr val="163048"/>
+                </a:solidFill>
                 <a:latin typeface="標楷體" panose="03000509000000000000" pitchFamily="65" charset="-120"/>
                 <a:ea typeface="標楷體" panose="03000509000000000000" pitchFamily="65" charset="-120"/>
                 <a:cs typeface="標楷體"/>
@@ -9789,8 +9850,8 @@
         </p:nvSpPr>
         <p:spPr>
           <a:xfrm>
-            <a:off x="16733520" y="9509760"/>
-            <a:ext cx="914400" cy="457200"/>
+            <a:off x="16779240" y="9646920"/>
+            <a:ext cx="502920" cy="320040"/>
           </a:xfrm>
           <a:prstGeom prst="rect">
             <a:avLst/>
@@ -9798,18 +9859,24 @@
           <a:noFill/>
         </p:spPr>
         <p:txBody>
-          <a:bodyPr wrap="square" lIns="54864" rIns="54864">
-            <a:spAutoFit/>
+          <a:bodyPr wrap="square" lIns="27432" rIns="27432" tIns="18288" bIns="18288" anchor="ctr">
+            <a:noAutofit/>
           </a:bodyPr>
           <a:lstStyle/>
           <a:p>
-            <a:pPr>
+            <a:pPr algn="r">
+              <a:lnSpc>
+                <a:spcPct val="112000"/>
+              </a:lnSpc>
+              <a:spcBef>
+                <a:spcPts val="0"/>
+              </a:spcBef>
               <a:spcAft>
-                <a:spcPts val="800"/>
+                <a:spcPts val="0"/>
               </a:spcAft>
-              <a:defRPr sz="1800" b="0">
-                <a:solidFill>
-                  <a:srgbClr val="2563EB"/>
+              <a:defRPr sz="1600" b="0">
+                <a:solidFill>
+                  <a:srgbClr val="506780"/>
                 </a:solidFill>
                 <a:latin typeface="標楷體"/>
                 <a:ea typeface="標楷體"/>
@@ -9817,7 +9884,10 @@
               </a:defRPr>
             </a:pPr>
             <a:r>
-              <a:rPr>
+              <a:rPr sz="1600">
+                <a:solidFill>
+                  <a:srgbClr val="506780"/>
+                </a:solidFill>
                 <a:latin typeface="標楷體"/>
                 <a:ea typeface="標楷體"/>
                 <a:cs typeface="標楷體"/>
@@ -9835,8 +9905,8 @@
         </p:nvSpPr>
         <p:spPr>
           <a:xfrm>
-            <a:off x="822960" y="1874519"/>
-            <a:ext cx="16459200" cy="523220"/>
+            <a:off x="822960" y="1828800"/>
+            <a:ext cx="16459200" cy="640080"/>
           </a:xfrm>
           <a:prstGeom prst="rect">
             <a:avLst/>
@@ -9844,18 +9914,24 @@
           <a:noFill/>
         </p:spPr>
         <p:txBody>
-          <a:bodyPr wrap="square" lIns="54864" rIns="54864">
-            <a:spAutoFit/>
+          <a:bodyPr wrap="square" lIns="27432" rIns="27432" tIns="18288" bIns="18288" anchor="ctr">
+            <a:noAutofit/>
           </a:bodyPr>
           <a:lstStyle/>
           <a:p>
-            <a:pPr>
+            <a:pPr algn="l">
+              <a:lnSpc>
+                <a:spcPct val="112000"/>
+              </a:lnSpc>
+              <a:spcBef>
+                <a:spcPts val="0"/>
+              </a:spcBef>
               <a:spcAft>
-                <a:spcPts val="800"/>
+                <a:spcPts val="0"/>
               </a:spcAft>
               <a:defRPr sz="2800" b="1">
                 <a:solidFill>
-                  <a:srgbClr val="2563EB"/>
+                  <a:srgbClr val="000000"/>
                 </a:solidFill>
                 <a:latin typeface="標楷體"/>
                 <a:ea typeface="標楷體"/>
@@ -9863,7 +9939,10 @@
               </a:defRPr>
             </a:pPr>
             <a:r>
-              <a:rPr dirty="0" err="1">
+              <a:rPr dirty="0" err="1" sz="2800">
+                <a:solidFill>
+                  <a:srgbClr val="000000"/>
+                </a:solidFill>
                 <a:latin typeface="標楷體" panose="03000509000000000000" pitchFamily="65" charset="-120"/>
                 <a:ea typeface="標楷體" panose="03000509000000000000" pitchFamily="65" charset="-120"/>
                 <a:cs typeface="標楷體"/>
@@ -9941,7 +10020,7 @@
         <p:spPr>
           <a:xfrm>
             <a:off x="1051560" y="2852928"/>
-            <a:ext cx="8138160" cy="507831"/>
+            <a:ext cx="8138160" cy="502920"/>
           </a:xfrm>
           <a:prstGeom prst="rect">
             <a:avLst/>
@@ -9949,18 +10028,24 @@
           <a:noFill/>
         </p:spPr>
         <p:txBody>
-          <a:bodyPr wrap="square" lIns="54864" rIns="54864">
-            <a:spAutoFit/>
+          <a:bodyPr wrap="square" lIns="27432" rIns="27432" tIns="18288" bIns="18288" anchor="ctr">
+            <a:noAutofit/>
           </a:bodyPr>
           <a:lstStyle/>
           <a:p>
-            <a:pPr>
+            <a:pPr algn="l">
+              <a:lnSpc>
+                <a:spcPct val="112000"/>
+              </a:lnSpc>
+              <a:spcBef>
+                <a:spcPts val="0"/>
+              </a:spcBef>
               <a:spcAft>
-                <a:spcPts val="800"/>
+                <a:spcPts val="0"/>
               </a:spcAft>
-              <a:defRPr sz="2700" b="1">
-                <a:solidFill>
-                  <a:srgbClr val="2563EB"/>
+              <a:defRPr sz="3000" b="1">
+                <a:solidFill>
+                  <a:srgbClr val="000000"/>
                 </a:solidFill>
                 <a:latin typeface="標楷體"/>
                 <a:ea typeface="標楷體"/>
@@ -9968,7 +10053,10 @@
               </a:defRPr>
             </a:pPr>
             <a:r>
-              <a:rPr dirty="0">
+              <a:rPr dirty="0" sz="3000">
+                <a:solidFill>
+                  <a:srgbClr val="000000"/>
+                </a:solidFill>
                 <a:latin typeface="標楷體" panose="03000509000000000000" pitchFamily="65" charset="-120"/>
                 <a:ea typeface="標楷體" panose="03000509000000000000" pitchFamily="65" charset="-120"/>
                 <a:cs typeface="標楷體"/>
@@ -9976,7 +10064,10 @@
               <a:t>01 </a:t>
             </a:r>
             <a:r>
-              <a:rPr dirty="0" err="1">
+              <a:rPr dirty="0" err="1" sz="3000">
+                <a:solidFill>
+                  <a:srgbClr val="000000"/>
+                </a:solidFill>
                 <a:latin typeface="標楷體" panose="03000509000000000000" pitchFamily="65" charset="-120"/>
                 <a:ea typeface="標楷體" panose="03000509000000000000" pitchFamily="65" charset="-120"/>
                 <a:cs typeface="標楷體"/>
@@ -9999,8 +10090,8 @@
         </p:nvSpPr>
         <p:spPr>
           <a:xfrm>
-            <a:off x="1051560" y="3401568"/>
-            <a:ext cx="8138160" cy="477054"/>
+            <a:off x="1051560" y="3410712"/>
+            <a:ext cx="8138160" cy="502920"/>
           </a:xfrm>
           <a:prstGeom prst="rect">
             <a:avLst/>
@@ -10008,18 +10099,24 @@
           <a:noFill/>
         </p:spPr>
         <p:txBody>
-          <a:bodyPr wrap="square" lIns="54864" rIns="54864">
-            <a:spAutoFit/>
+          <a:bodyPr wrap="square" lIns="27432" rIns="27432" tIns="18288" bIns="18288" anchor="ctr">
+            <a:noAutofit/>
           </a:bodyPr>
           <a:lstStyle/>
           <a:p>
-            <a:pPr>
+            <a:pPr algn="l">
+              <a:lnSpc>
+                <a:spcPct val="112000"/>
+              </a:lnSpc>
+              <a:spcBef>
+                <a:spcPts val="0"/>
+              </a:spcBef>
               <a:spcAft>
-                <a:spcPts val="800"/>
+                <a:spcPts val="0"/>
               </a:spcAft>
-              <a:defRPr sz="2500" b="0">
-                <a:solidFill>
-                  <a:srgbClr val="163048"/>
+              <a:defRPr sz="2600" b="0">
+                <a:solidFill>
+                  <a:srgbClr val="000000"/>
                 </a:solidFill>
                 <a:latin typeface="標楷體"/>
                 <a:ea typeface="標楷體"/>
@@ -10027,7 +10124,10 @@
               </a:defRPr>
             </a:pPr>
             <a:r>
-              <a:rPr dirty="0">
+              <a:rPr dirty="0" sz="2600">
+                <a:solidFill>
+                  <a:srgbClr val="000000"/>
+                </a:solidFill>
                 <a:latin typeface="標楷體" panose="03000509000000000000" pitchFamily="65" charset="-120"/>
                 <a:ea typeface="標楷體" panose="03000509000000000000" pitchFamily="65" charset="-120"/>
                 <a:cs typeface="標楷體"/>
@@ -10035,7 +10135,10 @@
               <a:t>Blender </a:t>
             </a:r>
             <a:r>
-              <a:rPr dirty="0" err="1">
+              <a:rPr dirty="0" err="1" sz="2600">
+                <a:solidFill>
+                  <a:srgbClr val="000000"/>
+                </a:solidFill>
                 <a:latin typeface="標楷體" panose="03000509000000000000" pitchFamily="65" charset="-120"/>
                 <a:ea typeface="標楷體" panose="03000509000000000000" pitchFamily="65" charset="-120"/>
                 <a:cs typeface="標楷體"/>
@@ -10059,7 +10162,7 @@
         <p:spPr>
           <a:xfrm>
             <a:off x="4663440" y="4041648"/>
-            <a:ext cx="914400" cy="411480"/>
+            <a:ext cx="914400" cy="393192"/>
           </a:xfrm>
           <a:prstGeom prst="rect">
             <a:avLst/>
@@ -10067,18 +10170,24 @@
           <a:noFill/>
         </p:spPr>
         <p:txBody>
-          <a:bodyPr wrap="square" lIns="54864" rIns="54864">
-            <a:spAutoFit/>
+          <a:bodyPr wrap="square" lIns="27432" rIns="27432" tIns="18288" bIns="18288" anchor="ctr">
+            <a:noAutofit/>
           </a:bodyPr>
           <a:lstStyle/>
           <a:p>
-            <a:pPr>
+            <a:pPr algn="ctr">
+              <a:lnSpc>
+                <a:spcPct val="112000"/>
+              </a:lnSpc>
+              <a:spcBef>
+                <a:spcPts val="0"/>
+              </a:spcBef>
               <a:spcAft>
-                <a:spcPts val="800"/>
+                <a:spcPts val="0"/>
               </a:spcAft>
-              <a:defRPr sz="2200" b="1">
-                <a:solidFill>
-                  <a:srgbClr val="2563EB"/>
+              <a:defRPr sz="2500" b="1">
+                <a:solidFill>
+                  <a:srgbClr val="000000"/>
                 </a:solidFill>
                 <a:latin typeface="標楷體"/>
                 <a:ea typeface="標楷體"/>
@@ -10086,7 +10195,10 @@
               </a:defRPr>
             </a:pPr>
             <a:r>
-              <a:rPr>
+              <a:rPr sz="2500">
+                <a:solidFill>
+                  <a:srgbClr val="000000"/>
+                </a:solidFill>
                 <a:latin typeface="標楷體"/>
                 <a:ea typeface="標楷體"/>
                 <a:cs typeface="標楷體"/>
@@ -10159,7 +10271,7 @@
         <p:spPr>
           <a:xfrm>
             <a:off x="1051560" y="4544568"/>
-            <a:ext cx="8138160" cy="507831"/>
+            <a:ext cx="8138160" cy="502920"/>
           </a:xfrm>
           <a:prstGeom prst="rect">
             <a:avLst/>
@@ -10167,18 +10279,24 @@
           <a:noFill/>
         </p:spPr>
         <p:txBody>
-          <a:bodyPr wrap="square" lIns="54864" rIns="54864">
-            <a:spAutoFit/>
+          <a:bodyPr wrap="square" lIns="27432" rIns="27432" tIns="18288" bIns="18288" anchor="ctr">
+            <a:noAutofit/>
           </a:bodyPr>
           <a:lstStyle/>
           <a:p>
-            <a:pPr>
+            <a:pPr algn="l">
+              <a:lnSpc>
+                <a:spcPct val="112000"/>
+              </a:lnSpc>
+              <a:spcBef>
+                <a:spcPts val="0"/>
+              </a:spcBef>
               <a:spcAft>
-                <a:spcPts val="800"/>
+                <a:spcPts val="0"/>
               </a:spcAft>
-              <a:defRPr sz="2700" b="1">
-                <a:solidFill>
-                  <a:srgbClr val="2563EB"/>
+              <a:defRPr sz="3000" b="1">
+                <a:solidFill>
+                  <a:srgbClr val="000000"/>
                 </a:solidFill>
                 <a:latin typeface="標楷體"/>
                 <a:ea typeface="標楷體"/>
@@ -10186,7 +10304,10 @@
               </a:defRPr>
             </a:pPr>
             <a:r>
-              <a:rPr dirty="0">
+              <a:rPr dirty="0" sz="3000">
+                <a:solidFill>
+                  <a:srgbClr val="000000"/>
+                </a:solidFill>
                 <a:latin typeface="標楷體" panose="03000509000000000000" pitchFamily="65" charset="-120"/>
                 <a:ea typeface="標楷體" panose="03000509000000000000" pitchFamily="65" charset="-120"/>
                 <a:cs typeface="標楷體"/>
@@ -10194,7 +10315,10 @@
               <a:t>02 </a:t>
             </a:r>
             <a:r>
-              <a:rPr dirty="0" err="1">
+              <a:rPr dirty="0" err="1" sz="3000">
+                <a:solidFill>
+                  <a:srgbClr val="000000"/>
+                </a:solidFill>
                 <a:latin typeface="標楷體" panose="03000509000000000000" pitchFamily="65" charset="-120"/>
                 <a:ea typeface="標楷體" panose="03000509000000000000" pitchFamily="65" charset="-120"/>
                 <a:cs typeface="標楷體"/>
@@ -10217,8 +10341,8 @@
         </p:nvSpPr>
         <p:spPr>
           <a:xfrm>
-            <a:off x="1051560" y="5093207"/>
-            <a:ext cx="8138160" cy="477054"/>
+            <a:off x="1051560" y="5102352"/>
+            <a:ext cx="8138160" cy="502920"/>
           </a:xfrm>
           <a:prstGeom prst="rect">
             <a:avLst/>
@@ -10226,18 +10350,24 @@
           <a:noFill/>
         </p:spPr>
         <p:txBody>
-          <a:bodyPr wrap="square" lIns="54864" rIns="54864">
-            <a:spAutoFit/>
+          <a:bodyPr wrap="square" lIns="27432" rIns="27432" tIns="18288" bIns="18288" anchor="ctr">
+            <a:noAutofit/>
           </a:bodyPr>
           <a:lstStyle/>
           <a:p>
-            <a:pPr>
+            <a:pPr algn="l">
+              <a:lnSpc>
+                <a:spcPct val="112000"/>
+              </a:lnSpc>
+              <a:spcBef>
+                <a:spcPts val="0"/>
+              </a:spcBef>
               <a:spcAft>
-                <a:spcPts val="800"/>
+                <a:spcPts val="0"/>
               </a:spcAft>
-              <a:defRPr sz="2500" b="0">
-                <a:solidFill>
-                  <a:srgbClr val="163048"/>
+              <a:defRPr sz="2600" b="0">
+                <a:solidFill>
+                  <a:srgbClr val="000000"/>
                 </a:solidFill>
                 <a:latin typeface="標楷體"/>
                 <a:ea typeface="標楷體"/>
@@ -10245,7 +10375,10 @@
               </a:defRPr>
             </a:pPr>
             <a:r>
-              <a:rPr dirty="0" err="1">
+              <a:rPr dirty="0" err="1" sz="2600">
+                <a:solidFill>
+                  <a:srgbClr val="000000"/>
+                </a:solidFill>
                 <a:latin typeface="標楷體" panose="03000509000000000000" pitchFamily="65" charset="-120"/>
                 <a:ea typeface="標楷體" panose="03000509000000000000" pitchFamily="65" charset="-120"/>
                 <a:cs typeface="標楷體"/>
@@ -10269,7 +10402,7 @@
         <p:spPr>
           <a:xfrm>
             <a:off x="4663440" y="5733288"/>
-            <a:ext cx="914400" cy="411480"/>
+            <a:ext cx="914400" cy="393192"/>
           </a:xfrm>
           <a:prstGeom prst="rect">
             <a:avLst/>
@@ -10277,18 +10410,24 @@
           <a:noFill/>
         </p:spPr>
         <p:txBody>
-          <a:bodyPr wrap="square" lIns="54864" rIns="54864">
-            <a:spAutoFit/>
+          <a:bodyPr wrap="square" lIns="27432" rIns="27432" tIns="18288" bIns="18288" anchor="ctr">
+            <a:noAutofit/>
           </a:bodyPr>
           <a:lstStyle/>
           <a:p>
-            <a:pPr>
+            <a:pPr algn="ctr">
+              <a:lnSpc>
+                <a:spcPct val="112000"/>
+              </a:lnSpc>
+              <a:spcBef>
+                <a:spcPts val="0"/>
+              </a:spcBef>
               <a:spcAft>
-                <a:spcPts val="800"/>
+                <a:spcPts val="0"/>
               </a:spcAft>
-              <a:defRPr sz="2200" b="1">
-                <a:solidFill>
-                  <a:srgbClr val="2563EB"/>
+              <a:defRPr sz="2500" b="1">
+                <a:solidFill>
+                  <a:srgbClr val="000000"/>
                 </a:solidFill>
                 <a:latin typeface="標楷體"/>
                 <a:ea typeface="標楷體"/>
@@ -10296,7 +10435,10 @@
               </a:defRPr>
             </a:pPr>
             <a:r>
-              <a:rPr>
+              <a:rPr sz="2500">
+                <a:solidFill>
+                  <a:srgbClr val="000000"/>
+                </a:solidFill>
                 <a:latin typeface="標楷體"/>
                 <a:ea typeface="標楷體"/>
                 <a:cs typeface="標楷體"/>
@@ -10369,7 +10511,7 @@
         <p:spPr>
           <a:xfrm>
             <a:off x="1051560" y="6236208"/>
-            <a:ext cx="8138160" cy="507831"/>
+            <a:ext cx="8138160" cy="502920"/>
           </a:xfrm>
           <a:prstGeom prst="rect">
             <a:avLst/>
@@ -10377,18 +10519,24 @@
           <a:noFill/>
         </p:spPr>
         <p:txBody>
-          <a:bodyPr wrap="square" lIns="54864" rIns="54864">
-            <a:spAutoFit/>
+          <a:bodyPr wrap="square" lIns="27432" rIns="27432" tIns="18288" bIns="18288" anchor="ctr">
+            <a:noAutofit/>
           </a:bodyPr>
           <a:lstStyle/>
           <a:p>
-            <a:pPr>
+            <a:pPr algn="l">
+              <a:lnSpc>
+                <a:spcPct val="112000"/>
+              </a:lnSpc>
+              <a:spcBef>
+                <a:spcPts val="0"/>
+              </a:spcBef>
               <a:spcAft>
-                <a:spcPts val="800"/>
+                <a:spcPts val="0"/>
               </a:spcAft>
-              <a:defRPr sz="2700" b="1">
-                <a:solidFill>
-                  <a:srgbClr val="2563EB"/>
+              <a:defRPr sz="3000" b="1">
+                <a:solidFill>
+                  <a:srgbClr val="000000"/>
                 </a:solidFill>
                 <a:latin typeface="標楷體"/>
                 <a:ea typeface="標楷體"/>
@@ -10396,7 +10544,10 @@
               </a:defRPr>
             </a:pPr>
             <a:r>
-              <a:rPr dirty="0">
+              <a:rPr dirty="0" sz="3000">
+                <a:solidFill>
+                  <a:srgbClr val="000000"/>
+                </a:solidFill>
                 <a:latin typeface="標楷體" panose="03000509000000000000" pitchFamily="65" charset="-120"/>
                 <a:ea typeface="標楷體" panose="03000509000000000000" pitchFamily="65" charset="-120"/>
                 <a:cs typeface="標楷體"/>
@@ -10404,7 +10555,10 @@
               <a:t>03 </a:t>
             </a:r>
             <a:r>
-              <a:rPr dirty="0" err="1">
+              <a:rPr dirty="0" err="1" sz="3000">
+                <a:solidFill>
+                  <a:srgbClr val="000000"/>
+                </a:solidFill>
                 <a:latin typeface="標楷體" panose="03000509000000000000" pitchFamily="65" charset="-120"/>
                 <a:ea typeface="標楷體" panose="03000509000000000000" pitchFamily="65" charset="-120"/>
                 <a:cs typeface="標楷體"/>
@@ -10427,8 +10581,8 @@
         </p:nvSpPr>
         <p:spPr>
           <a:xfrm>
-            <a:off x="1051560" y="6784848"/>
-            <a:ext cx="8138160" cy="477054"/>
+            <a:off x="1051560" y="6793992"/>
+            <a:ext cx="8138160" cy="502920"/>
           </a:xfrm>
           <a:prstGeom prst="rect">
             <a:avLst/>
@@ -10436,18 +10590,24 @@
           <a:noFill/>
         </p:spPr>
         <p:txBody>
-          <a:bodyPr wrap="square" lIns="54864" rIns="54864">
-            <a:spAutoFit/>
+          <a:bodyPr wrap="square" lIns="27432" rIns="27432" tIns="18288" bIns="18288" anchor="ctr">
+            <a:noAutofit/>
           </a:bodyPr>
           <a:lstStyle/>
           <a:p>
-            <a:pPr>
+            <a:pPr algn="l">
+              <a:lnSpc>
+                <a:spcPct val="112000"/>
+              </a:lnSpc>
+              <a:spcBef>
+                <a:spcPts val="0"/>
+              </a:spcBef>
               <a:spcAft>
-                <a:spcPts val="800"/>
+                <a:spcPts val="0"/>
               </a:spcAft>
-              <a:defRPr sz="2500" b="0">
-                <a:solidFill>
-                  <a:srgbClr val="163048"/>
+              <a:defRPr sz="2600" b="0">
+                <a:solidFill>
+                  <a:srgbClr val="000000"/>
                 </a:solidFill>
                 <a:latin typeface="標楷體"/>
                 <a:ea typeface="標楷體"/>
@@ -10455,7 +10615,10 @@
               </a:defRPr>
             </a:pPr>
             <a:r>
-              <a:rPr dirty="0">
+              <a:rPr dirty="0" sz="2600">
+                <a:solidFill>
+                  <a:srgbClr val="000000"/>
+                </a:solidFill>
                 <a:latin typeface="標楷體" panose="03000509000000000000" pitchFamily="65" charset="-120"/>
                 <a:ea typeface="標楷體" panose="03000509000000000000" pitchFamily="65" charset="-120"/>
                 <a:cs typeface="標楷體"/>
@@ -10463,7 +10626,10 @@
               <a:t>AI </a:t>
             </a:r>
             <a:r>
-              <a:rPr dirty="0" err="1">
+              <a:rPr dirty="0" err="1" sz="2600">
+                <a:solidFill>
+                  <a:srgbClr val="000000"/>
+                </a:solidFill>
                 <a:latin typeface="標楷體" panose="03000509000000000000" pitchFamily="65" charset="-120"/>
                 <a:ea typeface="標楷體" panose="03000509000000000000" pitchFamily="65" charset="-120"/>
                 <a:cs typeface="標楷體"/>
@@ -10478,6 +10644,42 @@
           </a:p>
         </p:txBody>
       </p:sp>
+      <p:pic>
+        <p:nvPicPr>
+          <p:cNvPr id="3" name="圖片 2">
+            <a:extLst>
+              <a:ext uri="{FF2B5EF4-FFF2-40B4-BE49-F238E27FC236}">
+                <a16:creationId xmlns:a16="http://schemas.microsoft.com/office/drawing/2014/main" id="{24199E0F-4D49-4E7A-BEF3-C688F9F1E792}"/>
+              </a:ext>
+            </a:extLst>
+          </p:cNvPr>
+          <p:cNvPicPr>
+            <a:picLocks noChangeAspect="1"/>
+          </p:cNvPicPr>
+          <p:nvPr/>
+        </p:nvPicPr>
+        <p:blipFill>
+          <a:blip r:embed="rId2">
+            <a:extLst>
+              <a:ext uri="{28A0092B-C50C-407E-A947-70E740481C1C}">
+                <a14:useLocalDpi xmlns:a14="http://schemas.microsoft.com/office/drawing/2010/main" val="0"/>
+              </a:ext>
+            </a:extLst>
+          </a:blip>
+          <a:stretch>
+            <a:fillRect/>
+          </a:stretch>
+        </p:blipFill>
+        <p:spPr>
+          <a:xfrm>
+            <a:off x="9725770" y="2366265"/>
+            <a:ext cx="8205746" cy="5470497"/>
+          </a:xfrm>
+          <a:prstGeom prst="rect">
+            <a:avLst/>
+          </a:prstGeom>
+        </p:spPr>
+      </p:pic>
     </p:spTree>
   </p:cSld>
   <p:clrMapOvr>
@@ -10665,31 +10867,40 @@
         </p:nvSpPr>
         <p:spPr>
           <a:xfrm>
-            <a:off x="16710660" y="9646158"/>
-            <a:ext cx="480060" cy="320802"/>
+            <a:off x="16779240" y="9646920"/>
+            <a:ext cx="502920" cy="320040"/>
           </a:xfrm>
           <a:prstGeom prst="rect">
             <a:avLst/>
           </a:prstGeom>
         </p:spPr>
         <p:txBody>
-          <a:bodyPr lIns="0" tIns="0" rIns="0" bIns="0" rtlCol="0" anchor="t">
-            <a:spAutoFit/>
+          <a:bodyPr lIns="27432" tIns="18288" rIns="27432" bIns="18288" rtlCol="0" anchor="ctr" wrap="square">
+            <a:noAutofit/>
           </a:bodyPr>
           <a:lstStyle/>
           <a:p>
-            <a:pPr algn="l">
+            <a:pPr algn="r">
               <a:lnSpc>
-                <a:spcPts val="1980"/>
+                <a:spcPct val="112000"/>
               </a:lnSpc>
-              <a:defRPr>
+              <a:spcBef>
+                <a:spcPts val="0"/>
+              </a:spcBef>
+              <a:spcAft>
+                <a:spcPts val="0"/>
+              </a:spcAft>
+              <a:defRPr sz="1600">
+                <a:solidFill>
+                  <a:srgbClr val="506780"/>
+                </a:solidFill>
                 <a:latin typeface="標楷體"/>
                 <a:ea typeface="標楷體"/>
                 <a:cs typeface="標楷體"/>
               </a:defRPr>
             </a:pPr>
             <a:r>
-              <a:rPr lang="en-US" sz="1650" spc="2">
+              <a:rPr lang="en-US" sz="1600" spc="2">
                 <a:solidFill>
                   <a:srgbClr val="506780"/>
                 </a:solidFill>
@@ -10711,31 +10922,40 @@
         </p:nvSpPr>
         <p:spPr>
           <a:xfrm>
-            <a:off x="6609411" y="3355154"/>
-            <a:ext cx="3901693" cy="2173544"/>
+            <a:off x="5029200" y="3383280"/>
+            <a:ext cx="8229600" cy="2423160"/>
           </a:xfrm>
           <a:prstGeom prst="rect">
             <a:avLst/>
           </a:prstGeom>
         </p:spPr>
         <p:txBody>
-          <a:bodyPr lIns="0" tIns="0" rIns="0" bIns="0" rtlCol="0" anchor="t">
-            <a:spAutoFit/>
+          <a:bodyPr lIns="27432" tIns="18288" rIns="27432" bIns="18288" rtlCol="0" anchor="ctr" wrap="square">
+            <a:noAutofit/>
           </a:bodyPr>
           <a:lstStyle/>
           <a:p>
-            <a:pPr algn="l">
+            <a:pPr algn="ctr">
               <a:lnSpc>
-                <a:spcPts val="8653"/>
+                <a:spcPct val="112000"/>
               </a:lnSpc>
-              <a:defRPr>
+              <a:spcBef>
+                <a:spcPts val="0"/>
+              </a:spcBef>
+              <a:spcAft>
+                <a:spcPts val="0"/>
+              </a:spcAft>
+              <a:defRPr sz="6600">
+                <a:solidFill>
+                  <a:srgbClr val="163048"/>
+                </a:solidFill>
                 <a:latin typeface="標楷體"/>
                 <a:ea typeface="標楷體"/>
                 <a:cs typeface="標楷體"/>
               </a:defRPr>
             </a:pPr>
             <a:r>
-              <a:rPr lang="en-US" sz="7210" b="1" dirty="0" err="1">
+              <a:rPr lang="en-US" sz="6600" b="1" dirty="0" err="1">
                 <a:solidFill>
                   <a:srgbClr val="163048"/>
                 </a:solidFill>
@@ -10757,18 +10977,27 @@
             </a:endParaRPr>
           </a:p>
           <a:p>
-            <a:pPr algn="l">
+            <a:pPr algn="ctr">
               <a:lnSpc>
-                <a:spcPts val="8653"/>
+                <a:spcPct val="112000"/>
               </a:lnSpc>
-              <a:defRPr>
+              <a:spcBef>
+                <a:spcPts val="0"/>
+              </a:spcBef>
+              <a:spcAft>
+                <a:spcPts val="0"/>
+              </a:spcAft>
+              <a:defRPr sz="6600">
+                <a:solidFill>
+                  <a:srgbClr val="163048"/>
+                </a:solidFill>
                 <a:latin typeface="標楷體"/>
                 <a:ea typeface="標楷體"/>
                 <a:cs typeface="標楷體"/>
               </a:defRPr>
             </a:pPr>
             <a:r>
-              <a:rPr lang="en-US" sz="7210" b="1" dirty="0" err="1">
+              <a:rPr lang="en-US" sz="6600" b="1" dirty="0" err="1">
                 <a:solidFill>
                   <a:srgbClr val="163048"/>
                 </a:solidFill>
@@ -11042,31 +11271,40 @@
         </p:nvSpPr>
         <p:spPr>
           <a:xfrm>
-            <a:off x="937260" y="1066038"/>
-            <a:ext cx="16322040" cy="1453134"/>
+            <a:off x="777240" y="640080"/>
+            <a:ext cx="16733520" cy="822960"/>
           </a:xfrm>
           <a:prstGeom prst="rect">
             <a:avLst/>
           </a:prstGeom>
         </p:spPr>
         <p:txBody>
-          <a:bodyPr lIns="0" tIns="0" rIns="0" bIns="0" rtlCol="0" anchor="t">
-            <a:spAutoFit/>
+          <a:bodyPr lIns="27432" tIns="18288" rIns="27432" bIns="18288" rtlCol="0" anchor="ctr" wrap="square">
+            <a:noAutofit/>
           </a:bodyPr>
           <a:lstStyle/>
           <a:p>
             <a:pPr algn="l">
               <a:lnSpc>
-                <a:spcPts val="5400"/>
+                <a:spcPct val="112000"/>
               </a:lnSpc>
-              <a:defRPr>
+              <a:spcBef>
+                <a:spcPts val="0"/>
+              </a:spcBef>
+              <a:spcAft>
+                <a:spcPts val="0"/>
+              </a:spcAft>
+              <a:defRPr sz="4400">
+                <a:solidFill>
+                  <a:srgbClr val="163048"/>
+                </a:solidFill>
                 <a:latin typeface="標楷體"/>
                 <a:ea typeface="標楷體"/>
                 <a:cs typeface="標楷體"/>
               </a:defRPr>
             </a:pPr>
             <a:r>
-              <a:rPr lang="en-US" sz="4500" b="1" dirty="0" err="1">
+              <a:rPr lang="en-US" sz="4400" b="1" dirty="0" err="1">
                 <a:solidFill>
                   <a:srgbClr val="163048"/>
                 </a:solidFill>
@@ -11097,31 +11335,40 @@
         </p:nvSpPr>
         <p:spPr>
           <a:xfrm>
-            <a:off x="16710660" y="9646158"/>
-            <a:ext cx="480060" cy="320802"/>
+            <a:off x="16779240" y="9646920"/>
+            <a:ext cx="502920" cy="320040"/>
           </a:xfrm>
           <a:prstGeom prst="rect">
             <a:avLst/>
           </a:prstGeom>
         </p:spPr>
         <p:txBody>
-          <a:bodyPr lIns="0" tIns="0" rIns="0" bIns="0" rtlCol="0" anchor="t">
-            <a:spAutoFit/>
+          <a:bodyPr lIns="27432" tIns="18288" rIns="27432" bIns="18288" rtlCol="0" anchor="ctr" wrap="square">
+            <a:noAutofit/>
           </a:bodyPr>
           <a:lstStyle/>
           <a:p>
-            <a:pPr algn="l">
+            <a:pPr algn="r">
               <a:lnSpc>
-                <a:spcPts val="1980"/>
+                <a:spcPct val="112000"/>
               </a:lnSpc>
-              <a:defRPr>
+              <a:spcBef>
+                <a:spcPts val="0"/>
+              </a:spcBef>
+              <a:spcAft>
+                <a:spcPts val="0"/>
+              </a:spcAft>
+              <a:defRPr sz="1600">
+                <a:solidFill>
+                  <a:srgbClr val="506780"/>
+                </a:solidFill>
                 <a:latin typeface="標楷體"/>
                 <a:ea typeface="標楷體"/>
                 <a:cs typeface="標楷體"/>
               </a:defRPr>
             </a:pPr>
             <a:r>
-              <a:rPr lang="en-US" sz="1650" spc="2">
+              <a:rPr lang="en-US" sz="1600" spc="2">
                 <a:solidFill>
                   <a:srgbClr val="506780"/>
                 </a:solidFill>
@@ -11143,31 +11390,40 @@
         </p:nvSpPr>
         <p:spPr>
           <a:xfrm>
-            <a:off x="1028700" y="2681097"/>
-            <a:ext cx="7132320" cy="462050"/>
+            <a:off x="1005840" y="2651760"/>
+            <a:ext cx="7680960" cy="777240"/>
           </a:xfrm>
           <a:prstGeom prst="rect">
             <a:avLst/>
           </a:prstGeom>
         </p:spPr>
         <p:txBody>
-          <a:bodyPr lIns="0" tIns="0" rIns="0" bIns="0" rtlCol="0" anchor="t">
-            <a:spAutoFit/>
+          <a:bodyPr lIns="27432" tIns="18288" rIns="27432" bIns="18288" rtlCol="0" anchor="ctr" wrap="square">
+            <a:noAutofit/>
           </a:bodyPr>
           <a:lstStyle/>
           <a:p>
             <a:pPr algn="l">
               <a:lnSpc>
-                <a:spcPts val="3779"/>
+                <a:spcPct val="112000"/>
               </a:lnSpc>
-              <a:defRPr>
+              <a:spcBef>
+                <a:spcPts val="0"/>
+              </a:spcBef>
+              <a:spcAft>
+                <a:spcPts val="0"/>
+              </a:spcAft>
+              <a:defRPr sz="3000">
+                <a:solidFill>
+                  <a:srgbClr val="163048"/>
+                </a:solidFill>
                 <a:latin typeface="標楷體"/>
                 <a:ea typeface="標楷體"/>
                 <a:cs typeface="標楷體"/>
               </a:defRPr>
             </a:pPr>
             <a:r>
-              <a:rPr lang="en-US" sz="3150" b="1" dirty="0" err="1">
+              <a:rPr lang="en-US" sz="3000" b="1" dirty="0" err="1">
                 <a:solidFill>
                   <a:srgbClr val="163048"/>
                 </a:solidFill>
@@ -11198,31 +11454,40 @@
         </p:nvSpPr>
         <p:spPr>
           <a:xfrm>
-            <a:off x="1028700" y="3810381"/>
-            <a:ext cx="7132320" cy="462050"/>
+            <a:off x="1005840" y="3840480"/>
+            <a:ext cx="7680960" cy="777240"/>
           </a:xfrm>
           <a:prstGeom prst="rect">
             <a:avLst/>
           </a:prstGeom>
         </p:spPr>
         <p:txBody>
-          <a:bodyPr lIns="0" tIns="0" rIns="0" bIns="0" rtlCol="0" anchor="t">
-            <a:spAutoFit/>
+          <a:bodyPr lIns="27432" tIns="18288" rIns="27432" bIns="18288" rtlCol="0" anchor="ctr" wrap="square">
+            <a:noAutofit/>
           </a:bodyPr>
           <a:lstStyle/>
           <a:p>
             <a:pPr algn="l">
               <a:lnSpc>
-                <a:spcPts val="3779"/>
+                <a:spcPct val="112000"/>
               </a:lnSpc>
-              <a:defRPr>
+              <a:spcBef>
+                <a:spcPts val="0"/>
+              </a:spcBef>
+              <a:spcAft>
+                <a:spcPts val="0"/>
+              </a:spcAft>
+              <a:defRPr sz="3000">
+                <a:solidFill>
+                  <a:srgbClr val="163048"/>
+                </a:solidFill>
                 <a:latin typeface="標楷體"/>
                 <a:ea typeface="標楷體"/>
                 <a:cs typeface="標楷體"/>
               </a:defRPr>
             </a:pPr>
             <a:r>
-              <a:rPr lang="en-US" sz="3150" b="1" dirty="0" err="1">
+              <a:rPr lang="en-US" sz="3000" b="1" dirty="0" err="1">
                 <a:solidFill>
                   <a:srgbClr val="163048"/>
                 </a:solidFill>
@@ -11234,7 +11499,7 @@
               <a:t>貳、設計構想暨</a:t>
             </a:r>
             <a:r>
-              <a:rPr lang="en-US" sz="3150" b="1" dirty="0">
+              <a:rPr lang="en-US" sz="3000" b="1" dirty="0">
                 <a:solidFill>
                   <a:srgbClr val="163048"/>
                 </a:solidFill>
@@ -11246,7 +11511,7 @@
               <a:t> AI </a:t>
             </a:r>
             <a:r>
-              <a:rPr lang="en-US" sz="3150" b="1" dirty="0" err="1">
+              <a:rPr lang="en-US" sz="3000" b="1" dirty="0" err="1">
                 <a:solidFill>
                   <a:srgbClr val="163048"/>
                 </a:solidFill>
@@ -11277,31 +11542,40 @@
         </p:nvSpPr>
         <p:spPr>
           <a:xfrm>
-            <a:off x="1028700" y="5076825"/>
-            <a:ext cx="7132320" cy="462050"/>
+            <a:off x="1005840" y="5029200"/>
+            <a:ext cx="7680960" cy="777240"/>
           </a:xfrm>
           <a:prstGeom prst="rect">
             <a:avLst/>
           </a:prstGeom>
         </p:spPr>
         <p:txBody>
-          <a:bodyPr lIns="0" tIns="0" rIns="0" bIns="0" rtlCol="0" anchor="t">
-            <a:spAutoFit/>
+          <a:bodyPr lIns="27432" tIns="18288" rIns="27432" bIns="18288" rtlCol="0" anchor="ctr" wrap="square">
+            <a:noAutofit/>
           </a:bodyPr>
           <a:lstStyle/>
           <a:p>
             <a:pPr algn="l">
               <a:lnSpc>
-                <a:spcPts val="3779"/>
+                <a:spcPct val="112000"/>
               </a:lnSpc>
-              <a:defRPr>
+              <a:spcBef>
+                <a:spcPts val="0"/>
+              </a:spcBef>
+              <a:spcAft>
+                <a:spcPts val="0"/>
+              </a:spcAft>
+              <a:defRPr sz="3000">
+                <a:solidFill>
+                  <a:srgbClr val="163048"/>
+                </a:solidFill>
                 <a:latin typeface="標楷體"/>
                 <a:ea typeface="標楷體"/>
                 <a:cs typeface="標楷體"/>
               </a:defRPr>
             </a:pPr>
             <a:r>
-              <a:rPr lang="en-US" sz="3150" b="1" dirty="0" err="1">
+              <a:rPr lang="en-US" sz="3000" b="1" dirty="0" err="1">
                 <a:solidFill>
                   <a:srgbClr val="163048"/>
                 </a:solidFill>
@@ -11332,31 +11606,40 @@
         </p:nvSpPr>
         <p:spPr>
           <a:xfrm>
-            <a:off x="1028700" y="6208014"/>
-            <a:ext cx="7132320" cy="462050"/>
+            <a:off x="1005840" y="6217920"/>
+            <a:ext cx="7680960" cy="777240"/>
           </a:xfrm>
           <a:prstGeom prst="rect">
             <a:avLst/>
           </a:prstGeom>
         </p:spPr>
         <p:txBody>
-          <a:bodyPr lIns="0" tIns="0" rIns="0" bIns="0" rtlCol="0" anchor="t">
-            <a:spAutoFit/>
+          <a:bodyPr lIns="27432" tIns="18288" rIns="27432" bIns="18288" rtlCol="0" anchor="ctr" wrap="square">
+            <a:noAutofit/>
           </a:bodyPr>
           <a:lstStyle/>
           <a:p>
             <a:pPr algn="l">
               <a:lnSpc>
-                <a:spcPts val="3779"/>
+                <a:spcPct val="112000"/>
               </a:lnSpc>
-              <a:defRPr>
+              <a:spcBef>
+                <a:spcPts val="0"/>
+              </a:spcBef>
+              <a:spcAft>
+                <a:spcPts val="0"/>
+              </a:spcAft>
+              <a:defRPr sz="3000">
+                <a:solidFill>
+                  <a:srgbClr val="163048"/>
+                </a:solidFill>
                 <a:latin typeface="標楷體"/>
                 <a:ea typeface="標楷體"/>
                 <a:cs typeface="標楷體"/>
               </a:defRPr>
             </a:pPr>
             <a:r>
-              <a:rPr lang="en-US" sz="3150" b="1" dirty="0" err="1">
+              <a:rPr lang="en-US" sz="3000" b="1" dirty="0" err="1">
                 <a:solidFill>
                   <a:srgbClr val="163048"/>
                 </a:solidFill>
@@ -11493,31 +11776,40 @@
         </p:nvSpPr>
         <p:spPr>
           <a:xfrm>
-            <a:off x="1063019" y="864823"/>
-            <a:ext cx="16322040" cy="692497"/>
+            <a:off x="777240" y="640080"/>
+            <a:ext cx="16733520" cy="822960"/>
           </a:xfrm>
           <a:prstGeom prst="rect">
             <a:avLst/>
           </a:prstGeom>
         </p:spPr>
         <p:txBody>
-          <a:bodyPr lIns="0" tIns="0" rIns="0" bIns="0" rtlCol="0" anchor="t">
-            <a:spAutoFit/>
+          <a:bodyPr lIns="27432" tIns="18288" rIns="27432" bIns="18288" rtlCol="0" anchor="ctr" wrap="square">
+            <a:noAutofit/>
           </a:bodyPr>
           <a:lstStyle/>
           <a:p>
             <a:pPr algn="l">
               <a:lnSpc>
-                <a:spcPts val="5400"/>
+                <a:spcPct val="112000"/>
               </a:lnSpc>
-              <a:defRPr>
+              <a:spcBef>
+                <a:spcPts val="0"/>
+              </a:spcBef>
+              <a:spcAft>
+                <a:spcPts val="0"/>
+              </a:spcAft>
+              <a:defRPr sz="4400">
+                <a:solidFill>
+                  <a:srgbClr val="163048"/>
+                </a:solidFill>
                 <a:latin typeface="標楷體"/>
                 <a:ea typeface="標楷體"/>
                 <a:cs typeface="標楷體"/>
               </a:defRPr>
             </a:pPr>
             <a:r>
-              <a:rPr lang="en-US" sz="4500" b="1" dirty="0" err="1">
+              <a:rPr lang="en-US" sz="4400" b="1" dirty="0" err="1">
                 <a:solidFill>
                   <a:srgbClr val="163048"/>
                 </a:solidFill>
@@ -11621,31 +11913,40 @@
         </p:nvSpPr>
         <p:spPr>
           <a:xfrm>
-            <a:off x="16710660" y="9646158"/>
-            <a:ext cx="480060" cy="320802"/>
+            <a:off x="16779240" y="9646920"/>
+            <a:ext cx="502920" cy="320040"/>
           </a:xfrm>
           <a:prstGeom prst="rect">
             <a:avLst/>
           </a:prstGeom>
         </p:spPr>
         <p:txBody>
-          <a:bodyPr lIns="0" tIns="0" rIns="0" bIns="0" rtlCol="0" anchor="t">
-            <a:spAutoFit/>
+          <a:bodyPr lIns="27432" tIns="18288" rIns="27432" bIns="18288" rtlCol="0" anchor="ctr" wrap="square">
+            <a:noAutofit/>
           </a:bodyPr>
           <a:lstStyle/>
           <a:p>
-            <a:pPr algn="l">
+            <a:pPr algn="r">
               <a:lnSpc>
-                <a:spcPts val="1980"/>
+                <a:spcPct val="112000"/>
               </a:lnSpc>
-              <a:defRPr>
+              <a:spcBef>
+                <a:spcPts val="0"/>
+              </a:spcBef>
+              <a:spcAft>
+                <a:spcPts val="0"/>
+              </a:spcAft>
+              <a:defRPr sz="1600">
+                <a:solidFill>
+                  <a:srgbClr val="506780"/>
+                </a:solidFill>
                 <a:latin typeface="標楷體"/>
                 <a:ea typeface="標楷體"/>
                 <a:cs typeface="標楷體"/>
               </a:defRPr>
             </a:pPr>
             <a:r>
-              <a:rPr lang="en-US" sz="1650" spc="2">
+              <a:rPr lang="en-US" sz="1600" spc="2">
                 <a:solidFill>
                   <a:srgbClr val="506780"/>
                 </a:solidFill>
@@ -11667,8 +11968,8 @@
         </p:nvGrpSpPr>
         <p:grpSpPr>
           <a:xfrm>
-            <a:off x="10498081" y="3452012"/>
-            <a:ext cx="5389619" cy="799948"/>
+            <a:off x="10469880" y="3246120"/>
+            <a:ext cx="6126480" cy="868680"/>
             <a:chOff x="0" y="0"/>
             <a:chExt cx="7186158" cy="1066598"/>
           </a:xfrm>
@@ -11760,31 +12061,40 @@
         </p:nvSpPr>
         <p:spPr>
           <a:xfrm>
-            <a:off x="10741239" y="3635944"/>
-            <a:ext cx="4562028" cy="461665"/>
+            <a:off x="10652760" y="3383279"/>
+            <a:ext cx="5760720" cy="548640"/>
           </a:xfrm>
           <a:prstGeom prst="rect">
             <a:avLst/>
           </a:prstGeom>
         </p:spPr>
         <p:txBody>
-          <a:bodyPr lIns="0" tIns="0" rIns="0" bIns="0" rtlCol="0" anchor="t">
-            <a:spAutoFit/>
+          <a:bodyPr lIns="27432" tIns="18288" rIns="27432" bIns="18288" rtlCol="0" anchor="ctr" wrap="square">
+            <a:noAutofit/>
           </a:bodyPr>
           <a:lstStyle/>
           <a:p>
             <a:pPr algn="l">
               <a:lnSpc>
-                <a:spcPts val="3600"/>
+                <a:spcPct val="112000"/>
               </a:lnSpc>
-              <a:defRPr>
+              <a:spcBef>
+                <a:spcPts val="0"/>
+              </a:spcBef>
+              <a:spcAft>
+                <a:spcPts val="0"/>
+              </a:spcAft>
+              <a:defRPr sz="2800">
+                <a:solidFill>
+                  <a:srgbClr val="000000"/>
+                </a:solidFill>
                 <a:latin typeface="標楷體"/>
                 <a:ea typeface="標楷體"/>
                 <a:cs typeface="標楷體"/>
               </a:defRPr>
             </a:pPr>
             <a:r>
-              <a:rPr lang="en-US" sz="3000" dirty="0">
+              <a:rPr lang="en-US" sz="2800" dirty="0">
                 <a:solidFill>
                   <a:srgbClr val="000000"/>
                 </a:solidFill>
@@ -11806,36 +12116,42 @@
         </p:nvSpPr>
         <p:spPr>
           <a:xfrm>
-            <a:off x="891540" y="2477649"/>
-            <a:ext cx="1927860" cy="469167"/>
+            <a:off x="1051560" y="2331720"/>
+            <a:ext cx="6400800" cy="548640"/>
           </a:xfrm>
           <a:prstGeom prst="rect">
             <a:avLst/>
           </a:prstGeom>
         </p:spPr>
         <p:txBody>
-          <a:bodyPr wrap="square" lIns="0" tIns="0" rIns="0" bIns="0" rtlCol="0" anchor="t">
-            <a:spAutoFit/>
+          <a:bodyPr wrap="square" lIns="27432" tIns="18288" rIns="27432" bIns="18288" rtlCol="0" anchor="ctr">
+            <a:noAutofit/>
           </a:bodyPr>
           <a:lstStyle/>
           <a:p>
-            <a:pPr algn="ctr">
+            <a:pPr algn="l">
               <a:lnSpc>
-                <a:spcPts val="3779"/>
+                <a:spcPct val="112000"/>
               </a:lnSpc>
               <a:spcBef>
-                <a:spcPct val="0"/>
+                <a:spcPts val="0"/>
               </a:spcBef>
-              <a:defRPr>
+              <a:spcAft>
+                <a:spcPts val="0"/>
+              </a:spcAft>
+              <a:defRPr sz="3000">
+                <a:solidFill>
+                  <a:srgbClr val="2563EB"/>
+                </a:solidFill>
                 <a:latin typeface="標楷體"/>
                 <a:ea typeface="標楷體"/>
                 <a:cs typeface="標楷體"/>
               </a:defRPr>
             </a:pPr>
             <a:r>
-              <a:rPr lang="en-US" sz="3150" b="1" dirty="0" err="1">
-                <a:solidFill>
-                  <a:schemeClr val="accent1"/>
+              <a:rPr lang="en-US" sz="3000" b="1" dirty="0" err="1">
+                <a:solidFill>
+                  <a:srgbClr val="2563EB"/>
                 </a:solidFill>
                 <a:latin typeface="標楷體"/>
                 <a:ea typeface="標楷體"/>
@@ -11845,9 +12161,9 @@
               <a:t>現況分析</a:t>
             </a:r>
             <a:r>
-              <a:rPr lang="en-US" sz="3150" b="1" dirty="0">
-                <a:solidFill>
-                  <a:schemeClr val="accent1"/>
+              <a:rPr lang="en-US" sz="3000" b="1" dirty="0">
+                <a:solidFill>
+                  <a:srgbClr val="2563EB"/>
                 </a:solidFill>
                 <a:latin typeface="標楷體"/>
                 <a:ea typeface="標楷體"/>
@@ -11867,36 +12183,42 @@
         </p:nvSpPr>
         <p:spPr>
           <a:xfrm>
-            <a:off x="10257786" y="2477649"/>
-            <a:ext cx="2315213" cy="469167"/>
+            <a:off x="10469880" y="2331720"/>
+            <a:ext cx="6400800" cy="548640"/>
           </a:xfrm>
           <a:prstGeom prst="rect">
             <a:avLst/>
           </a:prstGeom>
         </p:spPr>
         <p:txBody>
-          <a:bodyPr wrap="square" lIns="0" tIns="0" rIns="0" bIns="0" rtlCol="0" anchor="t">
-            <a:spAutoFit/>
+          <a:bodyPr wrap="square" lIns="27432" tIns="18288" rIns="27432" bIns="18288" rtlCol="0" anchor="ctr">
+            <a:noAutofit/>
           </a:bodyPr>
           <a:lstStyle/>
           <a:p>
-            <a:pPr algn="ctr">
+            <a:pPr algn="l">
               <a:lnSpc>
-                <a:spcPts val="3779"/>
+                <a:spcPct val="112000"/>
               </a:lnSpc>
               <a:spcBef>
-                <a:spcPct val="0"/>
+                <a:spcPts val="0"/>
               </a:spcBef>
-              <a:defRPr>
+              <a:spcAft>
+                <a:spcPts val="0"/>
+              </a:spcAft>
+              <a:defRPr sz="3000">
+                <a:solidFill>
+                  <a:srgbClr val="2563EB"/>
+                </a:solidFill>
                 <a:latin typeface="標楷體"/>
                 <a:ea typeface="標楷體"/>
                 <a:cs typeface="標楷體"/>
               </a:defRPr>
             </a:pPr>
             <a:r>
-              <a:rPr lang="en-US" sz="3150" b="1" dirty="0" err="1">
-                <a:solidFill>
-                  <a:schemeClr val="accent1"/>
+              <a:rPr lang="en-US" sz="3000" b="1" dirty="0" err="1">
+                <a:solidFill>
+                  <a:srgbClr val="2563EB"/>
                 </a:solidFill>
                 <a:latin typeface="標楷體" panose="03000509000000000000" pitchFamily="65" charset="-120"/>
                 <a:ea typeface="標楷體" panose="03000509000000000000" pitchFamily="65" charset="-120"/>
@@ -11906,9 +12228,9 @@
               <a:t>AI輔助改善</a:t>
             </a:r>
             <a:r>
-              <a:rPr lang="en-US" sz="3150" b="1" dirty="0">
-                <a:solidFill>
-                  <a:schemeClr val="accent1"/>
+              <a:rPr lang="en-US" sz="3000" b="1" dirty="0">
+                <a:solidFill>
+                  <a:srgbClr val="2563EB"/>
                 </a:solidFill>
                 <a:latin typeface="標楷體" panose="03000509000000000000" pitchFamily="65" charset="-120"/>
                 <a:ea typeface="標楷體" panose="03000509000000000000" pitchFamily="65" charset="-120"/>
@@ -11928,8 +12250,8 @@
         </p:nvGrpSpPr>
         <p:grpSpPr>
           <a:xfrm>
-            <a:off x="10461638" y="5248276"/>
-            <a:ext cx="5389619" cy="799948"/>
+            <a:off x="10469880" y="4754880"/>
+            <a:ext cx="6126480" cy="868680"/>
             <a:chOff x="0" y="0"/>
             <a:chExt cx="7186158" cy="1066598"/>
           </a:xfrm>
@@ -12021,34 +12343,40 @@
         </p:nvSpPr>
         <p:spPr>
           <a:xfrm>
-            <a:off x="10565668" y="5444714"/>
-            <a:ext cx="4329796" cy="469167"/>
+            <a:off x="10652760" y="4892040"/>
+            <a:ext cx="5760720" cy="548640"/>
           </a:xfrm>
           <a:prstGeom prst="rect">
             <a:avLst/>
           </a:prstGeom>
         </p:spPr>
         <p:txBody>
-          <a:bodyPr wrap="square" lIns="0" tIns="0" rIns="0" bIns="0" rtlCol="0" anchor="t">
-            <a:spAutoFit/>
+          <a:bodyPr wrap="square" lIns="27432" tIns="18288" rIns="27432" bIns="18288" rtlCol="0" anchor="ctr">
+            <a:noAutofit/>
           </a:bodyPr>
           <a:lstStyle/>
           <a:p>
-            <a:pPr algn="ctr">
+            <a:pPr algn="l">
               <a:lnSpc>
-                <a:spcPts val="3779"/>
+                <a:spcPct val="112000"/>
               </a:lnSpc>
               <a:spcBef>
-                <a:spcPct val="0"/>
+                <a:spcPts val="0"/>
               </a:spcBef>
-              <a:defRPr>
+              <a:spcAft>
+                <a:spcPts val="0"/>
+              </a:spcAft>
+              <a:defRPr sz="2800">
+                <a:solidFill>
+                  <a:srgbClr val="000000"/>
+                </a:solidFill>
                 <a:latin typeface="標楷體"/>
                 <a:ea typeface="標楷體"/>
                 <a:cs typeface="標楷體"/>
               </a:defRPr>
             </a:pPr>
             <a:r>
-              <a:rPr lang="en-US" sz="3150" dirty="0">
+              <a:rPr lang="en-US" sz="2800" dirty="0">
                 <a:solidFill>
                   <a:srgbClr val="000000"/>
                 </a:solidFill>
@@ -12057,8 +12385,41 @@
                 <a:cs typeface="標楷體"/>
                 <a:sym typeface="Noto Sans CJK TC"/>
               </a:rPr>
-              <a:t>2.三圍模型的輔助測量</a:t>
-            </a:r>
+              <a:t>2.三</a:t>
+            </a:r>
+            <a:r>
+              <a:rPr lang="zh-TW" altLang="en-US" sz="2800" dirty="0">
+                <a:solidFill>
+                  <a:srgbClr val="000000"/>
+                </a:solidFill>
+                <a:latin typeface="標楷體" panose="03000509000000000000" pitchFamily="65" charset="-120"/>
+                <a:ea typeface="標楷體" panose="03000509000000000000" pitchFamily="65" charset="-120"/>
+                <a:cs typeface="標楷體"/>
+                <a:sym typeface="Noto Sans CJK TC"/>
+              </a:rPr>
+              <a:t>維</a:t>
+            </a:r>
+            <a:r>
+              <a:rPr lang="en-US" sz="2800" dirty="0" err="1">
+                <a:solidFill>
+                  <a:srgbClr val="000000"/>
+                </a:solidFill>
+                <a:latin typeface="標楷體" panose="03000509000000000000" pitchFamily="65" charset="-120"/>
+                <a:ea typeface="標楷體" panose="03000509000000000000" pitchFamily="65" charset="-120"/>
+                <a:cs typeface="標楷體"/>
+                <a:sym typeface="Noto Sans CJK TC"/>
+              </a:rPr>
+              <a:t>模型的輔助測量</a:t>
+            </a:r>
+            <a:endParaRPr lang="en-US" sz="3150" dirty="0">
+              <a:solidFill>
+                <a:srgbClr val="000000"/>
+              </a:solidFill>
+              <a:latin typeface="標楷體" panose="03000509000000000000" pitchFamily="65" charset="-120"/>
+              <a:ea typeface="標楷體" panose="03000509000000000000" pitchFamily="65" charset="-120"/>
+              <a:cs typeface="標楷體"/>
+              <a:sym typeface="Noto Sans CJK TC"/>
+            </a:endParaRPr>
           </a:p>
         </p:txBody>
       </p:sp>
@@ -12070,8 +12431,8 @@
         </p:nvGrpSpPr>
         <p:grpSpPr>
           <a:xfrm>
-            <a:off x="10498081" y="7000723"/>
-            <a:ext cx="5389619" cy="799948"/>
+            <a:off x="10469880" y="6263640"/>
+            <a:ext cx="6126480" cy="868680"/>
             <a:chOff x="0" y="0"/>
             <a:chExt cx="7186158" cy="1066598"/>
           </a:xfrm>
@@ -12163,34 +12524,40 @@
         </p:nvSpPr>
         <p:spPr>
           <a:xfrm>
-            <a:off x="10741239" y="7117239"/>
-            <a:ext cx="4863196" cy="469167"/>
+            <a:off x="10652760" y="6400800"/>
+            <a:ext cx="5760720" cy="548640"/>
           </a:xfrm>
           <a:prstGeom prst="rect">
             <a:avLst/>
           </a:prstGeom>
         </p:spPr>
         <p:txBody>
-          <a:bodyPr wrap="square" lIns="0" tIns="0" rIns="0" bIns="0" rtlCol="0" anchor="t">
-            <a:spAutoFit/>
+          <a:bodyPr wrap="square" lIns="27432" tIns="18288" rIns="27432" bIns="18288" rtlCol="0" anchor="ctr">
+            <a:noAutofit/>
           </a:bodyPr>
           <a:lstStyle/>
           <a:p>
-            <a:pPr algn="ctr">
+            <a:pPr algn="l">
               <a:lnSpc>
-                <a:spcPts val="3779"/>
+                <a:spcPct val="112000"/>
               </a:lnSpc>
               <a:spcBef>
-                <a:spcPct val="0"/>
+                <a:spcPts val="0"/>
               </a:spcBef>
-              <a:defRPr>
+              <a:spcAft>
+                <a:spcPts val="0"/>
+              </a:spcAft>
+              <a:defRPr sz="2800">
+                <a:solidFill>
+                  <a:srgbClr val="000000"/>
+                </a:solidFill>
                 <a:latin typeface="標楷體"/>
                 <a:ea typeface="標楷體"/>
                 <a:cs typeface="標楷體"/>
               </a:defRPr>
             </a:pPr>
             <a:r>
-              <a:rPr lang="en-US" sz="3150" dirty="0">
+              <a:rPr lang="en-US" sz="2800" dirty="0">
                 <a:solidFill>
                   <a:srgbClr val="000000"/>
                 </a:solidFill>
@@ -12212,8 +12579,8 @@
         </p:nvGrpSpPr>
         <p:grpSpPr>
           <a:xfrm>
-            <a:off x="1028700" y="3452012"/>
-            <a:ext cx="6448415" cy="799948"/>
+            <a:off x="1051560" y="3246120"/>
+            <a:ext cx="6126480" cy="868680"/>
             <a:chOff x="0" y="0"/>
             <a:chExt cx="7067969" cy="876806"/>
           </a:xfrm>
@@ -12305,8 +12672,8 @@
         </p:nvGrpSpPr>
         <p:grpSpPr>
           <a:xfrm>
-            <a:off x="1028699" y="5077942"/>
-            <a:ext cx="6448415" cy="957099"/>
+            <a:off x="1051560" y="4754880"/>
+            <a:ext cx="6126480" cy="868680"/>
             <a:chOff x="0" y="0"/>
             <a:chExt cx="7186158" cy="1066598"/>
           </a:xfrm>
@@ -12398,8 +12765,8 @@
         </p:nvGrpSpPr>
         <p:grpSpPr>
           <a:xfrm>
-            <a:off x="1063019" y="6809259"/>
-            <a:ext cx="6414095" cy="1020563"/>
+            <a:off x="1051560" y="6263640"/>
+            <a:ext cx="6126480" cy="868680"/>
             <a:chOff x="0" y="0"/>
             <a:chExt cx="7186158" cy="1066598"/>
           </a:xfrm>
@@ -12491,31 +12858,40 @@
         </p:nvSpPr>
         <p:spPr>
           <a:xfrm>
-            <a:off x="1132729" y="3617613"/>
-            <a:ext cx="6448415" cy="461665"/>
+            <a:off x="1234440" y="3383279"/>
+            <a:ext cx="5760720" cy="548640"/>
           </a:xfrm>
           <a:prstGeom prst="rect">
             <a:avLst/>
           </a:prstGeom>
         </p:spPr>
         <p:txBody>
-          <a:bodyPr lIns="0" tIns="0" rIns="0" bIns="0" rtlCol="0" anchor="t">
-            <a:spAutoFit/>
+          <a:bodyPr lIns="27432" tIns="18288" rIns="27432" bIns="18288" rtlCol="0" anchor="ctr" wrap="square">
+            <a:noAutofit/>
           </a:bodyPr>
           <a:lstStyle/>
           <a:p>
             <a:pPr algn="l">
               <a:lnSpc>
-                <a:spcPts val="3600"/>
+                <a:spcPct val="112000"/>
               </a:lnSpc>
-              <a:defRPr>
+              <a:spcBef>
+                <a:spcPts val="0"/>
+              </a:spcBef>
+              <a:spcAft>
+                <a:spcPts val="0"/>
+              </a:spcAft>
+              <a:defRPr sz="2800">
+                <a:solidFill>
+                  <a:srgbClr val="000000"/>
+                </a:solidFill>
                 <a:latin typeface="標楷體"/>
                 <a:ea typeface="標楷體"/>
                 <a:cs typeface="標楷體"/>
               </a:defRPr>
             </a:pPr>
             <a:r>
-              <a:rPr lang="en-US" sz="3000" dirty="0">
+              <a:rPr lang="en-US" sz="2800" dirty="0">
                 <a:solidFill>
                   <a:srgbClr val="000000"/>
                 </a:solidFill>
@@ -12537,31 +12913,40 @@
         </p:nvSpPr>
         <p:spPr>
           <a:xfrm>
-            <a:off x="1132729" y="5322964"/>
-            <a:ext cx="6448415" cy="461665"/>
+            <a:off x="1234440" y="4892040"/>
+            <a:ext cx="5760720" cy="548640"/>
           </a:xfrm>
           <a:prstGeom prst="rect">
             <a:avLst/>
           </a:prstGeom>
         </p:spPr>
         <p:txBody>
-          <a:bodyPr lIns="0" tIns="0" rIns="0" bIns="0" rtlCol="0" anchor="t">
-            <a:spAutoFit/>
+          <a:bodyPr lIns="27432" tIns="18288" rIns="27432" bIns="18288" rtlCol="0" anchor="ctr" wrap="square">
+            <a:noAutofit/>
           </a:bodyPr>
           <a:lstStyle/>
           <a:p>
             <a:pPr algn="l">
               <a:lnSpc>
-                <a:spcPts val="3600"/>
+                <a:spcPct val="112000"/>
               </a:lnSpc>
-              <a:defRPr>
+              <a:spcBef>
+                <a:spcPts val="0"/>
+              </a:spcBef>
+              <a:spcAft>
+                <a:spcPts val="0"/>
+              </a:spcAft>
+              <a:defRPr sz="2800">
+                <a:solidFill>
+                  <a:srgbClr val="000000"/>
+                </a:solidFill>
                 <a:latin typeface="標楷體"/>
                 <a:ea typeface="標楷體"/>
                 <a:cs typeface="標楷體"/>
               </a:defRPr>
             </a:pPr>
             <a:r>
-              <a:rPr lang="en-US" sz="3000" dirty="0">
+              <a:rPr lang="en-US" sz="2800" dirty="0">
                 <a:solidFill>
                   <a:srgbClr val="000000"/>
                 </a:solidFill>
@@ -12583,31 +12968,40 @@
         </p:nvSpPr>
         <p:spPr>
           <a:xfrm>
-            <a:off x="1204651" y="6998330"/>
-            <a:ext cx="6875997" cy="461665"/>
+            <a:off x="1234440" y="6400800"/>
+            <a:ext cx="5760720" cy="548640"/>
           </a:xfrm>
           <a:prstGeom prst="rect">
             <a:avLst/>
           </a:prstGeom>
         </p:spPr>
         <p:txBody>
-          <a:bodyPr lIns="0" tIns="0" rIns="0" bIns="0" rtlCol="0" anchor="t">
-            <a:spAutoFit/>
+          <a:bodyPr lIns="27432" tIns="18288" rIns="27432" bIns="18288" rtlCol="0" anchor="ctr" wrap="square">
+            <a:noAutofit/>
           </a:bodyPr>
           <a:lstStyle/>
           <a:p>
             <a:pPr algn="l">
               <a:lnSpc>
-                <a:spcPts val="3600"/>
+                <a:spcPct val="112000"/>
               </a:lnSpc>
-              <a:defRPr>
+              <a:spcBef>
+                <a:spcPts val="0"/>
+              </a:spcBef>
+              <a:spcAft>
+                <a:spcPts val="0"/>
+              </a:spcAft>
+              <a:defRPr sz="2800">
+                <a:solidFill>
+                  <a:srgbClr val="000000"/>
+                </a:solidFill>
                 <a:latin typeface="標楷體"/>
                 <a:ea typeface="標楷體"/>
                 <a:cs typeface="標楷體"/>
               </a:defRPr>
             </a:pPr>
             <a:r>
-              <a:rPr lang="en-US" sz="3000" dirty="0">
+              <a:rPr lang="en-US" sz="2800" dirty="0">
                 <a:solidFill>
                   <a:srgbClr val="000000"/>
                 </a:solidFill>
@@ -12617,6 +13011,130 @@
                 <a:sym typeface="Noto Sans CJK TC"/>
               </a:rPr>
               <a:t>3.材料估算需人工處理</a:t>
+            </a:r>
+          </a:p>
+        </p:txBody>
+      </p:sp>
+      <p:sp>
+        <p:nvSpPr>
+          <p:cNvPr id="29" name="文字方塊 28">
+            <a:extLst>
+              <a:ext uri="{FF2B5EF4-FFF2-40B4-BE49-F238E27FC236}">
+                <a16:creationId xmlns:a16="http://schemas.microsoft.com/office/drawing/2014/main" id="{41FA51CC-4A0F-4332-92B5-EDA40C37660A}"/>
+              </a:ext>
+            </a:extLst>
+          </p:cNvPr>
+          <p:cNvSpPr txBox="1"/>
+          <p:nvPr/>
+        </p:nvSpPr>
+        <p:spPr>
+          <a:xfrm>
+            <a:off x="1051560" y="7635240"/>
+            <a:ext cx="15544800" cy="1417320"/>
+          </a:xfrm>
+          <a:prstGeom prst="rect">
+            <a:avLst/>
+          </a:prstGeom>
+          <a:noFill/>
+        </p:spPr>
+        <p:txBody>
+          <a:bodyPr wrap="square" lIns="27432" rIns="27432" tIns="18288" bIns="18288" anchor="ctr">
+            <a:noAutofit/>
+          </a:bodyPr>
+          <a:lstStyle/>
+          <a:p>
+            <a:pPr algn="l">
+              <a:lnSpc>
+                <a:spcPct val="112000"/>
+              </a:lnSpc>
+              <a:spcBef>
+                <a:spcPts val="0"/>
+              </a:spcBef>
+              <a:spcAft>
+                <a:spcPts val="0"/>
+              </a:spcAft>
+              <a:defRPr sz="2600">
+                <a:solidFill>
+                  <a:srgbClr val="000000"/>
+                </a:solidFill>
+                <a:latin typeface="標楷體"/>
+                <a:ea typeface="標楷體"/>
+                <a:cs typeface="標楷體"/>
+              </a:defRPr>
+            </a:pPr>
+            <a:r>
+              <a:rPr lang="zh-TW" altLang="en-US" sz="2600" b="1" dirty="0">
+                <a:solidFill>
+                  <a:srgbClr val="000000"/>
+                </a:solidFill>
+                <a:latin typeface="標楷體"/>
+                <a:ea typeface="標楷體"/>
+                <a:cs typeface="標楷體"/>
+              </a:rPr>
+              <a:t>戰爭初期，空軍基地跑道常成為攻擊目標</a:t>
+            </a:r>
+            <a:endParaRPr lang="en-US" altLang="zh-TW" sz="3600" b="1" dirty="0">
+              <a:solidFill>
+                <a:schemeClr val="tx2"/>
+              </a:solidFill>
+            </a:endParaRPr>
+          </a:p>
+          <a:p>
+            <a:pPr algn="l">
+              <a:lnSpc>
+                <a:spcPct val="112000"/>
+              </a:lnSpc>
+              <a:spcBef>
+                <a:spcPts val="0"/>
+              </a:spcBef>
+              <a:spcAft>
+                <a:spcPts val="0"/>
+              </a:spcAft>
+              <a:defRPr sz="2600">
+                <a:solidFill>
+                  <a:srgbClr val="000000"/>
+                </a:solidFill>
+                <a:latin typeface="標楷體"/>
+                <a:ea typeface="標楷體"/>
+                <a:cs typeface="標楷體"/>
+              </a:defRPr>
+            </a:pPr>
+            <a:endParaRPr lang="en-US" altLang="zh-TW" sz="3600" b="1" dirty="0">
+              <a:solidFill>
+                <a:schemeClr val="tx2"/>
+              </a:solidFill>
+            </a:endParaRPr>
+          </a:p>
+          <a:p>
+            <a:pPr algn="l">
+              <a:lnSpc>
+                <a:spcPct val="112000"/>
+              </a:lnSpc>
+              <a:spcBef>
+                <a:spcPts val="0"/>
+              </a:spcBef>
+              <a:spcAft>
+                <a:spcPts val="0"/>
+              </a:spcAft>
+              <a:defRPr sz="2600">
+                <a:solidFill>
+                  <a:srgbClr val="000000"/>
+                </a:solidFill>
+                <a:latin typeface="標楷體"/>
+                <a:ea typeface="標楷體"/>
+                <a:cs typeface="標楷體"/>
+              </a:defRPr>
+            </a:pPr>
+            <a:r>
+              <a:rPr lang="zh-TW" altLang="en-US" sz="2600" b="1" dirty="0">
+                <a:solidFill>
+                  <a:srgbClr val="000000"/>
+                </a:solidFill>
+                <a:latin typeface="標楷體"/>
+                <a:ea typeface="標楷體"/>
+                <a:cs typeface="標楷體"/>
+              </a:rPr>
+              <a:t>快速應變與修復跑道，是恢復起降能力及反擊的重要關鍵。</a:t>
             </a:r>
           </a:p>
         </p:txBody>
@@ -12735,31 +13253,40 @@
         </p:nvSpPr>
         <p:spPr>
           <a:xfrm>
-            <a:off x="937260" y="1066038"/>
-            <a:ext cx="16322040" cy="692497"/>
+            <a:off x="777240" y="640080"/>
+            <a:ext cx="16733520" cy="822960"/>
           </a:xfrm>
           <a:prstGeom prst="rect">
             <a:avLst/>
           </a:prstGeom>
         </p:spPr>
         <p:txBody>
-          <a:bodyPr lIns="0" tIns="0" rIns="0" bIns="0" rtlCol="0" anchor="t">
-            <a:spAutoFit/>
+          <a:bodyPr lIns="27432" tIns="18288" rIns="27432" bIns="18288" rtlCol="0" anchor="ctr" wrap="square">
+            <a:noAutofit/>
           </a:bodyPr>
           <a:lstStyle/>
           <a:p>
             <a:pPr algn="l">
               <a:lnSpc>
-                <a:spcPts val="5400"/>
+                <a:spcPct val="112000"/>
               </a:lnSpc>
-              <a:defRPr>
+              <a:spcBef>
+                <a:spcPts val="0"/>
+              </a:spcBef>
+              <a:spcAft>
+                <a:spcPts val="0"/>
+              </a:spcAft>
+              <a:defRPr sz="4400">
+                <a:solidFill>
+                  <a:srgbClr val="163048"/>
+                </a:solidFill>
                 <a:latin typeface="標楷體"/>
                 <a:ea typeface="標楷體"/>
                 <a:cs typeface="標楷體"/>
               </a:defRPr>
             </a:pPr>
             <a:r>
-              <a:rPr lang="en-US" sz="4500" b="1" dirty="0" err="1">
+              <a:rPr lang="en-US" sz="4400" b="1" dirty="0" err="1">
                 <a:solidFill>
                   <a:srgbClr val="163048"/>
                 </a:solidFill>
@@ -12771,7 +13298,7 @@
               <a:t>貳、設計構想暨</a:t>
             </a:r>
             <a:r>
-              <a:rPr lang="en-US" sz="4500" b="1" dirty="0">
+              <a:rPr lang="en-US" sz="4400" b="1" dirty="0">
                 <a:solidFill>
                   <a:srgbClr val="163048"/>
                 </a:solidFill>
@@ -12783,7 +13310,7 @@
               <a:t> AI </a:t>
             </a:r>
             <a:r>
-              <a:rPr lang="en-US" sz="4500" b="1" dirty="0" err="1">
+              <a:rPr lang="en-US" sz="4400" b="1" dirty="0" err="1">
                 <a:solidFill>
                   <a:srgbClr val="163048"/>
                 </a:solidFill>
@@ -12887,31 +13414,40 @@
         </p:nvSpPr>
         <p:spPr>
           <a:xfrm>
-            <a:off x="16710660" y="9646158"/>
-            <a:ext cx="480060" cy="320802"/>
+            <a:off x="16779240" y="9646920"/>
+            <a:ext cx="502920" cy="320040"/>
           </a:xfrm>
           <a:prstGeom prst="rect">
             <a:avLst/>
           </a:prstGeom>
         </p:spPr>
         <p:txBody>
-          <a:bodyPr lIns="0" tIns="0" rIns="0" bIns="0" rtlCol="0" anchor="t">
-            <a:spAutoFit/>
+          <a:bodyPr lIns="27432" tIns="18288" rIns="27432" bIns="18288" rtlCol="0" anchor="ctr" wrap="square">
+            <a:noAutofit/>
           </a:bodyPr>
           <a:lstStyle/>
           <a:p>
-            <a:pPr algn="l">
+            <a:pPr algn="r">
               <a:lnSpc>
-                <a:spcPts val="1980"/>
+                <a:spcPct val="112000"/>
               </a:lnSpc>
-              <a:defRPr>
+              <a:spcBef>
+                <a:spcPts val="0"/>
+              </a:spcBef>
+              <a:spcAft>
+                <a:spcPts val="0"/>
+              </a:spcAft>
+              <a:defRPr sz="1600">
+                <a:solidFill>
+                  <a:srgbClr val="506780"/>
+                </a:solidFill>
                 <a:latin typeface="標楷體"/>
                 <a:ea typeface="標楷體"/>
                 <a:cs typeface="標楷體"/>
               </a:defRPr>
             </a:pPr>
             <a:r>
-              <a:rPr lang="en-US" sz="1650" spc="2">
+              <a:rPr lang="en-US" sz="1600" spc="2">
                 <a:solidFill>
                   <a:srgbClr val="506780"/>
                 </a:solidFill>
@@ -12933,8 +13469,8 @@
         </p:nvGrpSpPr>
         <p:grpSpPr>
           <a:xfrm>
-            <a:off x="755713" y="3388266"/>
-            <a:ext cx="4005072" cy="5829300"/>
+            <a:off x="777240" y="2743200"/>
+            <a:ext cx="3840480" cy="6080760"/>
             <a:chOff x="0" y="0"/>
             <a:chExt cx="5340096" cy="7772400"/>
           </a:xfrm>
@@ -13026,33 +13562,42 @@
         </p:nvSpPr>
         <p:spPr>
           <a:xfrm>
-            <a:off x="1239012" y="3620643"/>
-            <a:ext cx="822960" cy="352469"/>
+            <a:off x="960120" y="3017520"/>
+            <a:ext cx="502920" cy="457200"/>
           </a:xfrm>
           <a:prstGeom prst="rect">
             <a:avLst/>
           </a:prstGeom>
         </p:spPr>
         <p:txBody>
-          <a:bodyPr lIns="0" tIns="0" rIns="0" bIns="0" rtlCol="0" anchor="t">
-            <a:spAutoFit/>
+          <a:bodyPr lIns="27432" tIns="18288" rIns="27432" bIns="18288" rtlCol="0" anchor="ctr" wrap="square">
+            <a:noAutofit/>
           </a:bodyPr>
           <a:lstStyle/>
           <a:p>
             <a:pPr algn="l">
               <a:lnSpc>
-                <a:spcPts val="2879"/>
+                <a:spcPct val="112000"/>
               </a:lnSpc>
-              <a:defRPr>
+              <a:spcBef>
+                <a:spcPts val="0"/>
+              </a:spcBef>
+              <a:spcAft>
+                <a:spcPts val="0"/>
+              </a:spcAft>
+              <a:defRPr sz="2200">
+                <a:solidFill>
+                  <a:srgbClr val="2563EB"/>
+                </a:solidFill>
                 <a:latin typeface="標楷體"/>
                 <a:ea typeface="標楷體"/>
                 <a:cs typeface="標楷體"/>
               </a:defRPr>
             </a:pPr>
             <a:r>
-              <a:rPr lang="en-US" sz="2400" b="1" spc="3" dirty="0">
-                <a:solidFill>
-                  <a:schemeClr val="accent1"/>
+              <a:rPr lang="en-US" sz="2200" b="1" spc="3" dirty="0">
+                <a:solidFill>
+                  <a:srgbClr val="2563EB"/>
                 </a:solidFill>
                 <a:latin typeface="標楷體" panose="03000509000000000000" pitchFamily="65" charset="-120"/>
                 <a:ea typeface="標楷體" panose="03000509000000000000" pitchFamily="65" charset="-120"/>
@@ -13072,33 +13617,42 @@
         </p:nvSpPr>
         <p:spPr>
           <a:xfrm>
-            <a:off x="1650492" y="3541745"/>
-            <a:ext cx="3456432" cy="462050"/>
+            <a:off x="1554480" y="2971800"/>
+            <a:ext cx="2834640" cy="548640"/>
           </a:xfrm>
           <a:prstGeom prst="rect">
             <a:avLst/>
           </a:prstGeom>
         </p:spPr>
         <p:txBody>
-          <a:bodyPr lIns="0" tIns="0" rIns="0" bIns="0" rtlCol="0" anchor="t">
-            <a:spAutoFit/>
+          <a:bodyPr lIns="27432" tIns="18288" rIns="27432" bIns="18288" rtlCol="0" anchor="ctr" wrap="square">
+            <a:noAutofit/>
           </a:bodyPr>
           <a:lstStyle/>
           <a:p>
             <a:pPr algn="l">
               <a:lnSpc>
-                <a:spcPts val="3779"/>
+                <a:spcPct val="112000"/>
               </a:lnSpc>
-              <a:defRPr>
+              <a:spcBef>
+                <a:spcPts val="0"/>
+              </a:spcBef>
+              <a:spcAft>
+                <a:spcPts val="0"/>
+              </a:spcAft>
+              <a:defRPr sz="3000">
+                <a:solidFill>
+                  <a:srgbClr val="2563EB"/>
+                </a:solidFill>
                 <a:latin typeface="標楷體"/>
                 <a:ea typeface="標楷體"/>
                 <a:cs typeface="標楷體"/>
               </a:defRPr>
             </a:pPr>
             <a:r>
-              <a:rPr lang="en-US" sz="3150" b="1" dirty="0" err="1">
-                <a:solidFill>
-                  <a:schemeClr val="accent1"/>
+              <a:rPr lang="en-US" sz="3000" b="1" dirty="0" err="1">
+                <a:solidFill>
+                  <a:srgbClr val="2563EB"/>
                 </a:solidFill>
                 <a:latin typeface="標楷體" panose="03000509000000000000" pitchFamily="65" charset="-120"/>
                 <a:ea typeface="標楷體" panose="03000509000000000000" pitchFamily="65" charset="-120"/>
@@ -13127,8 +13681,8 @@
         </p:nvGrpSpPr>
         <p:grpSpPr>
           <a:xfrm>
-            <a:off x="5321808" y="3429000"/>
-            <a:ext cx="4005072" cy="5797972"/>
+            <a:off x="5166360" y="2743200"/>
+            <a:ext cx="3840480" cy="6080760"/>
             <a:chOff x="0" y="0"/>
             <a:chExt cx="5340096" cy="7730630"/>
           </a:xfrm>
@@ -13220,31 +13774,40 @@
         </p:nvSpPr>
         <p:spPr>
           <a:xfrm>
-            <a:off x="5600700" y="3620643"/>
-            <a:ext cx="822960" cy="352469"/>
+            <a:off x="5349240" y="3017520"/>
+            <a:ext cx="502920" cy="457200"/>
           </a:xfrm>
           <a:prstGeom prst="rect">
             <a:avLst/>
           </a:prstGeom>
         </p:spPr>
         <p:txBody>
-          <a:bodyPr lIns="0" tIns="0" rIns="0" bIns="0" rtlCol="0" anchor="t">
-            <a:spAutoFit/>
+          <a:bodyPr lIns="27432" tIns="18288" rIns="27432" bIns="18288" rtlCol="0" anchor="ctr" wrap="square">
+            <a:noAutofit/>
           </a:bodyPr>
           <a:lstStyle/>
           <a:p>
             <a:pPr algn="l">
               <a:lnSpc>
-                <a:spcPts val="2879"/>
+                <a:spcPct val="112000"/>
               </a:lnSpc>
-              <a:defRPr>
+              <a:spcBef>
+                <a:spcPts val="0"/>
+              </a:spcBef>
+              <a:spcAft>
+                <a:spcPts val="0"/>
+              </a:spcAft>
+              <a:defRPr sz="2200">
+                <a:solidFill>
+                  <a:srgbClr val="2563EB"/>
+                </a:solidFill>
                 <a:latin typeface="標楷體"/>
                 <a:ea typeface="標楷體"/>
                 <a:cs typeface="標楷體"/>
               </a:defRPr>
             </a:pPr>
             <a:r>
-              <a:rPr lang="en-US" sz="2400" b="1" spc="3" dirty="0">
+              <a:rPr lang="en-US" sz="2200" b="1" spc="3" dirty="0">
                 <a:solidFill>
                   <a:srgbClr val="2563EB"/>
                 </a:solidFill>
@@ -13266,33 +13829,42 @@
         </p:nvSpPr>
         <p:spPr>
           <a:xfrm>
-            <a:off x="6048756" y="3565852"/>
-            <a:ext cx="3456432" cy="462050"/>
+            <a:off x="5943600" y="2971800"/>
+            <a:ext cx="2834640" cy="548640"/>
           </a:xfrm>
           <a:prstGeom prst="rect">
             <a:avLst/>
           </a:prstGeom>
         </p:spPr>
         <p:txBody>
-          <a:bodyPr lIns="0" tIns="0" rIns="0" bIns="0" rtlCol="0" anchor="t">
-            <a:spAutoFit/>
+          <a:bodyPr lIns="27432" tIns="18288" rIns="27432" bIns="18288" rtlCol="0" anchor="ctr" wrap="square">
+            <a:noAutofit/>
           </a:bodyPr>
           <a:lstStyle/>
           <a:p>
             <a:pPr algn="l">
               <a:lnSpc>
-                <a:spcPts val="3779"/>
+                <a:spcPct val="112000"/>
               </a:lnSpc>
-              <a:defRPr>
+              <a:spcBef>
+                <a:spcPts val="0"/>
+              </a:spcBef>
+              <a:spcAft>
+                <a:spcPts val="0"/>
+              </a:spcAft>
+              <a:defRPr sz="3000">
+                <a:solidFill>
+                  <a:srgbClr val="2563EB"/>
+                </a:solidFill>
                 <a:latin typeface="標楷體"/>
                 <a:ea typeface="標楷體"/>
                 <a:cs typeface="標楷體"/>
               </a:defRPr>
             </a:pPr>
             <a:r>
-              <a:rPr lang="en-US" sz="3150" b="1" dirty="0" err="1">
-                <a:solidFill>
-                  <a:schemeClr val="accent1"/>
+              <a:rPr lang="en-US" sz="3000" b="1" dirty="0" err="1">
+                <a:solidFill>
+                  <a:srgbClr val="2563EB"/>
                 </a:solidFill>
                 <a:latin typeface="標楷體" panose="03000509000000000000" pitchFamily="65" charset="-120"/>
                 <a:ea typeface="標楷體" panose="03000509000000000000" pitchFamily="65" charset="-120"/>
@@ -13321,8 +13893,8 @@
         </p:nvGrpSpPr>
         <p:grpSpPr>
           <a:xfrm>
-            <a:off x="9683496" y="3429000"/>
-            <a:ext cx="4005072" cy="5829300"/>
+            <a:off x="9555480" y="2743200"/>
+            <a:ext cx="3840480" cy="6080760"/>
             <a:chOff x="0" y="0"/>
             <a:chExt cx="5340096" cy="7772400"/>
           </a:xfrm>
@@ -13414,31 +13986,40 @@
         </p:nvSpPr>
         <p:spPr>
           <a:xfrm>
-            <a:off x="9962388" y="3620643"/>
-            <a:ext cx="822960" cy="352469"/>
+            <a:off x="9738359" y="3017520"/>
+            <a:ext cx="502920" cy="457200"/>
           </a:xfrm>
           <a:prstGeom prst="rect">
             <a:avLst/>
           </a:prstGeom>
         </p:spPr>
         <p:txBody>
-          <a:bodyPr lIns="0" tIns="0" rIns="0" bIns="0" rtlCol="0" anchor="t">
-            <a:spAutoFit/>
+          <a:bodyPr lIns="27432" tIns="18288" rIns="27432" bIns="18288" rtlCol="0" anchor="ctr" wrap="square">
+            <a:noAutofit/>
           </a:bodyPr>
           <a:lstStyle/>
           <a:p>
             <a:pPr algn="l">
               <a:lnSpc>
-                <a:spcPts val="2879"/>
+                <a:spcPct val="112000"/>
               </a:lnSpc>
-              <a:defRPr>
+              <a:spcBef>
+                <a:spcPts val="0"/>
+              </a:spcBef>
+              <a:spcAft>
+                <a:spcPts val="0"/>
+              </a:spcAft>
+              <a:defRPr sz="2200">
+                <a:solidFill>
+                  <a:srgbClr val="2563EB"/>
+                </a:solidFill>
                 <a:latin typeface="標楷體"/>
                 <a:ea typeface="標楷體"/>
                 <a:cs typeface="標楷體"/>
               </a:defRPr>
             </a:pPr>
             <a:r>
-              <a:rPr lang="en-US" sz="2400" b="1" spc="3" dirty="0">
+              <a:rPr lang="en-US" sz="2200" b="1" spc="3" dirty="0">
                 <a:solidFill>
                   <a:srgbClr val="2563EB"/>
                 </a:solidFill>
@@ -13460,33 +14041,42 @@
         </p:nvSpPr>
         <p:spPr>
           <a:xfrm>
-            <a:off x="10433635" y="3620643"/>
-            <a:ext cx="3456432" cy="462050"/>
+            <a:off x="10332719" y="2971800"/>
+            <a:ext cx="2834640" cy="548640"/>
           </a:xfrm>
           <a:prstGeom prst="rect">
             <a:avLst/>
           </a:prstGeom>
         </p:spPr>
         <p:txBody>
-          <a:bodyPr lIns="0" tIns="0" rIns="0" bIns="0" rtlCol="0" anchor="t">
-            <a:spAutoFit/>
+          <a:bodyPr lIns="27432" tIns="18288" rIns="27432" bIns="18288" rtlCol="0" anchor="ctr" wrap="square">
+            <a:noAutofit/>
           </a:bodyPr>
           <a:lstStyle/>
           <a:p>
             <a:pPr algn="l">
               <a:lnSpc>
-                <a:spcPts val="3779"/>
+                <a:spcPct val="112000"/>
               </a:lnSpc>
-              <a:defRPr>
+              <a:spcBef>
+                <a:spcPts val="0"/>
+              </a:spcBef>
+              <a:spcAft>
+                <a:spcPts val="0"/>
+              </a:spcAft>
+              <a:defRPr sz="3000">
+                <a:solidFill>
+                  <a:srgbClr val="2563EB"/>
+                </a:solidFill>
                 <a:latin typeface="標楷體"/>
                 <a:ea typeface="標楷體"/>
                 <a:cs typeface="標楷體"/>
               </a:defRPr>
             </a:pPr>
             <a:r>
-              <a:rPr lang="en-US" sz="3150" b="1" dirty="0" err="1">
-                <a:solidFill>
-                  <a:schemeClr val="accent1"/>
+              <a:rPr lang="en-US" sz="3000" b="1" dirty="0" err="1">
+                <a:solidFill>
+                  <a:srgbClr val="2563EB"/>
                 </a:solidFill>
                 <a:latin typeface="標楷體" panose="03000509000000000000" pitchFamily="65" charset="-120"/>
                 <a:ea typeface="標楷體" panose="03000509000000000000" pitchFamily="65" charset="-120"/>
@@ -13515,8 +14105,8 @@
         </p:nvGrpSpPr>
         <p:grpSpPr>
           <a:xfrm>
-            <a:off x="14045184" y="3429000"/>
-            <a:ext cx="4005072" cy="5942838"/>
+            <a:off x="13944600" y="2743200"/>
+            <a:ext cx="3840480" cy="6080760"/>
             <a:chOff x="0" y="0"/>
             <a:chExt cx="5340096" cy="7923784"/>
           </a:xfrm>
@@ -13608,31 +14198,40 @@
         </p:nvSpPr>
         <p:spPr>
           <a:xfrm>
-            <a:off x="14324076" y="3620643"/>
-            <a:ext cx="822960" cy="352469"/>
+            <a:off x="14127480" y="3017520"/>
+            <a:ext cx="502920" cy="457200"/>
           </a:xfrm>
           <a:prstGeom prst="rect">
             <a:avLst/>
           </a:prstGeom>
         </p:spPr>
         <p:txBody>
-          <a:bodyPr lIns="0" tIns="0" rIns="0" bIns="0" rtlCol="0" anchor="t">
-            <a:spAutoFit/>
+          <a:bodyPr lIns="27432" tIns="18288" rIns="27432" bIns="18288" rtlCol="0" anchor="ctr" wrap="square">
+            <a:noAutofit/>
           </a:bodyPr>
           <a:lstStyle/>
           <a:p>
             <a:pPr algn="l">
               <a:lnSpc>
-                <a:spcPts val="2879"/>
+                <a:spcPct val="112000"/>
               </a:lnSpc>
-              <a:defRPr>
+              <a:spcBef>
+                <a:spcPts val="0"/>
+              </a:spcBef>
+              <a:spcAft>
+                <a:spcPts val="0"/>
+              </a:spcAft>
+              <a:defRPr sz="2200">
+                <a:solidFill>
+                  <a:srgbClr val="2563EB"/>
+                </a:solidFill>
                 <a:latin typeface="標楷體"/>
                 <a:ea typeface="標楷體"/>
                 <a:cs typeface="標楷體"/>
               </a:defRPr>
             </a:pPr>
             <a:r>
-              <a:rPr lang="en-US" sz="2400" b="1" spc="3" dirty="0">
+              <a:rPr lang="en-US" sz="2200" b="1" spc="3" dirty="0">
                 <a:solidFill>
                   <a:srgbClr val="2563EB"/>
                 </a:solidFill>
@@ -13654,33 +14253,42 @@
         </p:nvSpPr>
         <p:spPr>
           <a:xfrm>
-            <a:off x="14748941" y="3585222"/>
-            <a:ext cx="3456432" cy="469937"/>
+            <a:off x="14721840" y="2971800"/>
+            <a:ext cx="2834640" cy="548640"/>
           </a:xfrm>
           <a:prstGeom prst="rect">
             <a:avLst/>
           </a:prstGeom>
         </p:spPr>
         <p:txBody>
-          <a:bodyPr lIns="0" tIns="0" rIns="0" bIns="0" rtlCol="0" anchor="t">
-            <a:spAutoFit/>
+          <a:bodyPr lIns="27432" tIns="18288" rIns="27432" bIns="18288" rtlCol="0" anchor="ctr" wrap="square">
+            <a:noAutofit/>
           </a:bodyPr>
           <a:lstStyle/>
           <a:p>
             <a:pPr algn="l">
               <a:lnSpc>
-                <a:spcPts val="3779"/>
+                <a:spcPct val="112000"/>
               </a:lnSpc>
-              <a:defRPr>
+              <a:spcBef>
+                <a:spcPts val="0"/>
+              </a:spcBef>
+              <a:spcAft>
+                <a:spcPts val="0"/>
+              </a:spcAft>
+              <a:defRPr sz="3000">
+                <a:solidFill>
+                  <a:srgbClr val="2563EB"/>
+                </a:solidFill>
                 <a:latin typeface="標楷體"/>
                 <a:ea typeface="標楷體"/>
                 <a:cs typeface="標楷體"/>
               </a:defRPr>
             </a:pPr>
             <a:r>
-              <a:rPr lang="en-US" sz="3150" b="1" dirty="0" err="1">
-                <a:solidFill>
-                  <a:schemeClr val="accent1"/>
+              <a:rPr lang="en-US" sz="3000" b="1" dirty="0" err="1">
+                <a:solidFill>
+                  <a:srgbClr val="2563EB"/>
                 </a:solidFill>
                 <a:latin typeface="標楷體"/>
                 <a:ea typeface="標楷體"/>
@@ -13709,34 +14317,43 @@
         </p:nvSpPr>
         <p:spPr>
           <a:xfrm>
-            <a:off x="947737" y="5446469"/>
-            <a:ext cx="3243455" cy="439031"/>
+            <a:off x="1005840" y="5029200"/>
+            <a:ext cx="3383280" cy="1554480"/>
           </a:xfrm>
           <a:prstGeom prst="rect">
             <a:avLst/>
           </a:prstGeom>
         </p:spPr>
         <p:txBody>
-          <a:bodyPr lIns="0" tIns="0" rIns="0" bIns="0" rtlCol="0" anchor="t">
-            <a:spAutoFit/>
+          <a:bodyPr lIns="27432" tIns="18288" rIns="27432" bIns="18288" rtlCol="0" anchor="ctr" wrap="square">
+            <a:noAutofit/>
           </a:bodyPr>
           <a:lstStyle/>
           <a:p>
             <a:pPr algn="l">
               <a:lnSpc>
-                <a:spcPts val="3779"/>
+                <a:spcPct val="112000"/>
               </a:lnSpc>
               <a:spcBef>
-                <a:spcPct val="0"/>
+                <a:spcPts val="0"/>
               </a:spcBef>
-              <a:defRPr>
+              <a:spcAft>
+                <a:spcPts val="0"/>
+              </a:spcAft>
+              <a:defRPr sz="2600">
+                <a:solidFill>
+                  <a:srgbClr val="000000"/>
+                </a:solidFill>
                 <a:latin typeface="標楷體"/>
                 <a:ea typeface="標楷體"/>
                 <a:cs typeface="標楷體"/>
               </a:defRPr>
             </a:pPr>
             <a:r>
-              <a:rPr lang="zh-TW" altLang="en-US" sz="2400" dirty="0">
+              <a:rPr lang="zh-TW" altLang="en-US" sz="2600" dirty="0">
+                <a:solidFill>
+                  <a:srgbClr val="000000"/>
+                </a:solidFill>
                 <a:latin typeface="標楷體" panose="03000509000000000000" pitchFamily="65" charset="-120"/>
                 <a:ea typeface="標楷體" panose="03000509000000000000" pitchFamily="65" charset="-120"/>
                 <a:cs typeface="標楷體"/>
@@ -13745,7 +14362,10 @@
               <a:t>取得彈坑</a:t>
             </a:r>
             <a:r>
-              <a:rPr lang="en-US" altLang="zh-TW" sz="2400" dirty="0">
+              <a:rPr lang="en-US" altLang="zh-TW" sz="2600" dirty="0">
+                <a:solidFill>
+                  <a:srgbClr val="000000"/>
+                </a:solidFill>
                 <a:latin typeface="標楷體" panose="03000509000000000000" pitchFamily="65" charset="-120"/>
                 <a:ea typeface="標楷體" panose="03000509000000000000" pitchFamily="65" charset="-120"/>
                 <a:cs typeface="標楷體"/>
@@ -13754,7 +14374,10 @@
               <a:t>RGB</a:t>
             </a:r>
             <a:r>
-              <a:rPr lang="zh-TW" altLang="en-US" sz="2400" dirty="0">
+              <a:rPr lang="zh-TW" altLang="en-US" sz="2600" dirty="0">
+                <a:solidFill>
+                  <a:srgbClr val="000000"/>
+                </a:solidFill>
                 <a:latin typeface="標楷體" panose="03000509000000000000" pitchFamily="65" charset="-120"/>
                 <a:ea typeface="標楷體" panose="03000509000000000000" pitchFamily="65" charset="-120"/>
                 <a:cs typeface="標楷體"/>
@@ -13785,8 +14408,8 @@
         </p:nvSpPr>
         <p:spPr>
           <a:xfrm>
-            <a:off x="947737" y="4411930"/>
-            <a:ext cx="1982724" cy="523220"/>
+            <a:off x="1005840" y="4023360"/>
+            <a:ext cx="3383280" cy="685800"/>
           </a:xfrm>
           <a:prstGeom prst="rect">
             <a:avLst/>
@@ -13794,13 +14417,35 @@
           <a:noFill/>
         </p:spPr>
         <p:txBody>
-          <a:bodyPr wrap="square" rtlCol="0">
-            <a:spAutoFit/>
+          <a:bodyPr wrap="square" rtlCol="0" lIns="27432" rIns="27432" tIns="18288" bIns="18288" anchor="ctr">
+            <a:noAutofit/>
           </a:bodyPr>
           <a:lstStyle/>
           <a:p>
+            <a:pPr algn="l">
+              <a:lnSpc>
+                <a:spcPct val="112000"/>
+              </a:lnSpc>
+              <a:spcBef>
+                <a:spcPts val="0"/>
+              </a:spcBef>
+              <a:spcAft>
+                <a:spcPts val="0"/>
+              </a:spcAft>
+              <a:defRPr sz="2800">
+                <a:solidFill>
+                  <a:srgbClr val="000000"/>
+                </a:solidFill>
+                <a:latin typeface="標楷體"/>
+                <a:ea typeface="標楷體"/>
+                <a:cs typeface="標楷體"/>
+              </a:defRPr>
+            </a:pPr>
             <a:r>
               <a:rPr lang="zh-TW" altLang="en-US" sz="2800" b="1" dirty="0">
+                <a:solidFill>
+                  <a:srgbClr val="000000"/>
+                </a:solidFill>
                 <a:latin typeface="標楷體"/>
                 <a:ea typeface="標楷體"/>
                 <a:cs typeface="標楷體"/>
@@ -13824,8 +14469,8 @@
         </p:nvSpPr>
         <p:spPr>
           <a:xfrm>
-            <a:off x="5794248" y="4417152"/>
-            <a:ext cx="1982724" cy="523220"/>
+            <a:off x="5394960" y="4023360"/>
+            <a:ext cx="3383280" cy="685800"/>
           </a:xfrm>
           <a:prstGeom prst="rect">
             <a:avLst/>
@@ -13833,13 +14478,35 @@
           <a:noFill/>
         </p:spPr>
         <p:txBody>
-          <a:bodyPr wrap="square" rtlCol="0">
-            <a:spAutoFit/>
+          <a:bodyPr wrap="square" rtlCol="0" lIns="27432" rIns="27432" tIns="18288" bIns="18288" anchor="ctr">
+            <a:noAutofit/>
           </a:bodyPr>
           <a:lstStyle/>
           <a:p>
+            <a:pPr algn="l">
+              <a:lnSpc>
+                <a:spcPct val="112000"/>
+              </a:lnSpc>
+              <a:spcBef>
+                <a:spcPts val="0"/>
+              </a:spcBef>
+              <a:spcAft>
+                <a:spcPts val="0"/>
+              </a:spcAft>
+              <a:defRPr sz="2800">
+                <a:solidFill>
+                  <a:srgbClr val="000000"/>
+                </a:solidFill>
+                <a:latin typeface="標楷體"/>
+                <a:ea typeface="標楷體"/>
+                <a:cs typeface="標楷體"/>
+              </a:defRPr>
+            </a:pPr>
             <a:r>
               <a:rPr lang="en-US" altLang="zh-TW" sz="2800" b="1" dirty="0">
+                <a:solidFill>
+                  <a:srgbClr val="000000"/>
+                </a:solidFill>
                 <a:latin typeface="標楷體"/>
                 <a:ea typeface="標楷體"/>
                 <a:cs typeface="標楷體"/>
@@ -13848,6 +14515,9 @@
             </a:r>
             <a:r>
               <a:rPr lang="zh-TW" altLang="en-US" sz="2800" b="1" dirty="0">
+                <a:solidFill>
+                  <a:srgbClr val="000000"/>
+                </a:solidFill>
                 <a:latin typeface="標楷體"/>
                 <a:ea typeface="標楷體"/>
                 <a:cs typeface="標楷體"/>
@@ -13871,8 +14541,8 @@
         </p:nvSpPr>
         <p:spPr>
           <a:xfrm>
-            <a:off x="9993630" y="4409794"/>
-            <a:ext cx="2045970" cy="523220"/>
+            <a:off x="9784080" y="4023360"/>
+            <a:ext cx="3383280" cy="685800"/>
           </a:xfrm>
           <a:prstGeom prst="rect">
             <a:avLst/>
@@ -13880,13 +14550,35 @@
           <a:noFill/>
         </p:spPr>
         <p:txBody>
-          <a:bodyPr wrap="square" rtlCol="0">
-            <a:spAutoFit/>
+          <a:bodyPr wrap="square" rtlCol="0" lIns="27432" rIns="27432" tIns="18288" bIns="18288" anchor="ctr">
+            <a:noAutofit/>
           </a:bodyPr>
           <a:lstStyle/>
           <a:p>
+            <a:pPr algn="l">
+              <a:lnSpc>
+                <a:spcPct val="112000"/>
+              </a:lnSpc>
+              <a:spcBef>
+                <a:spcPts val="0"/>
+              </a:spcBef>
+              <a:spcAft>
+                <a:spcPts val="0"/>
+              </a:spcAft>
+              <a:defRPr sz="2800">
+                <a:solidFill>
+                  <a:srgbClr val="000000"/>
+                </a:solidFill>
+                <a:latin typeface="標楷體"/>
+                <a:ea typeface="標楷體"/>
+                <a:cs typeface="標楷體"/>
+              </a:defRPr>
+            </a:pPr>
             <a:r>
               <a:rPr lang="en-US" altLang="zh-TW" sz="2800" b="1">
+                <a:solidFill>
+                  <a:srgbClr val="000000"/>
+                </a:solidFill>
                 <a:latin typeface="標楷體"/>
                 <a:ea typeface="標楷體"/>
                 <a:cs typeface="標楷體"/>
@@ -13895,6 +14587,9 @@
             </a:r>
             <a:r>
               <a:rPr lang="zh-TW" altLang="en-US" sz="2800" b="1" dirty="0">
+                <a:solidFill>
+                  <a:srgbClr val="000000"/>
+                </a:solidFill>
                 <a:latin typeface="標楷體"/>
                 <a:ea typeface="標楷體"/>
                 <a:cs typeface="標楷體"/>
@@ -13918,8 +14613,8 @@
         </p:nvSpPr>
         <p:spPr>
           <a:xfrm>
-            <a:off x="14324076" y="4443997"/>
-            <a:ext cx="1982724" cy="523220"/>
+            <a:off x="14173200" y="4023360"/>
+            <a:ext cx="3383280" cy="685800"/>
           </a:xfrm>
           <a:prstGeom prst="rect">
             <a:avLst/>
@@ -13927,13 +14622,35 @@
           <a:noFill/>
         </p:spPr>
         <p:txBody>
-          <a:bodyPr wrap="square" rtlCol="0">
-            <a:spAutoFit/>
+          <a:bodyPr wrap="square" rtlCol="0" lIns="27432" rIns="27432" tIns="18288" bIns="18288" anchor="ctr">
+            <a:noAutofit/>
           </a:bodyPr>
           <a:lstStyle/>
           <a:p>
+            <a:pPr algn="l">
+              <a:lnSpc>
+                <a:spcPct val="112000"/>
+              </a:lnSpc>
+              <a:spcBef>
+                <a:spcPts val="0"/>
+              </a:spcBef>
+              <a:spcAft>
+                <a:spcPts val="0"/>
+              </a:spcAft>
+              <a:defRPr sz="2800">
+                <a:solidFill>
+                  <a:srgbClr val="000000"/>
+                </a:solidFill>
+                <a:latin typeface="標楷體"/>
+                <a:ea typeface="標楷體"/>
+                <a:cs typeface="標楷體"/>
+              </a:defRPr>
+            </a:pPr>
             <a:r>
               <a:rPr lang="zh-TW" altLang="en-US" sz="2800" b="1" dirty="0">
+                <a:solidFill>
+                  <a:srgbClr val="000000"/>
+                </a:solidFill>
                 <a:latin typeface="標楷體"/>
                 <a:ea typeface="標楷體"/>
                 <a:cs typeface="標楷體"/>
@@ -13957,34 +14674,40 @@
         </p:nvSpPr>
         <p:spPr>
           <a:xfrm>
-            <a:off x="5854825" y="5478851"/>
-            <a:ext cx="3243455" cy="439031"/>
+            <a:off x="5394960" y="5029200"/>
+            <a:ext cx="3383280" cy="1554480"/>
           </a:xfrm>
           <a:prstGeom prst="rect">
             <a:avLst/>
           </a:prstGeom>
         </p:spPr>
         <p:txBody>
-          <a:bodyPr lIns="0" tIns="0" rIns="0" bIns="0" rtlCol="0" anchor="t">
-            <a:spAutoFit/>
+          <a:bodyPr lIns="27432" tIns="18288" rIns="27432" bIns="18288" rtlCol="0" anchor="ctr" wrap="square">
+            <a:noAutofit/>
           </a:bodyPr>
           <a:lstStyle/>
           <a:p>
             <a:pPr algn="l">
               <a:lnSpc>
-                <a:spcPts val="3779"/>
+                <a:spcPct val="112000"/>
               </a:lnSpc>
               <a:spcBef>
-                <a:spcPct val="0"/>
+                <a:spcPts val="0"/>
               </a:spcBef>
-              <a:defRPr>
+              <a:spcAft>
+                <a:spcPts val="0"/>
+              </a:spcAft>
+              <a:defRPr sz="2600">
+                <a:solidFill>
+                  <a:srgbClr val="000000"/>
+                </a:solidFill>
                 <a:latin typeface="標楷體"/>
                 <a:ea typeface="標楷體"/>
                 <a:cs typeface="標楷體"/>
               </a:defRPr>
             </a:pPr>
             <a:r>
-              <a:rPr lang="zh-TW" altLang="en-US" sz="2400" dirty="0">
+              <a:rPr lang="zh-TW" altLang="en-US" sz="2600" dirty="0">
                 <a:solidFill>
                   <a:srgbClr val="000000"/>
                 </a:solidFill>
@@ -14021,34 +14744,40 @@
         </p:nvSpPr>
         <p:spPr>
           <a:xfrm>
-            <a:off x="10064304" y="5630989"/>
-            <a:ext cx="3243455" cy="926344"/>
+            <a:off x="9784080" y="5029200"/>
+            <a:ext cx="3383280" cy="1554480"/>
           </a:xfrm>
           <a:prstGeom prst="rect">
             <a:avLst/>
           </a:prstGeom>
         </p:spPr>
         <p:txBody>
-          <a:bodyPr lIns="0" tIns="0" rIns="0" bIns="0" rtlCol="0" anchor="t">
-            <a:spAutoFit/>
+          <a:bodyPr lIns="27432" tIns="18288" rIns="27432" bIns="18288" rtlCol="0" anchor="ctr" wrap="square">
+            <a:noAutofit/>
           </a:bodyPr>
           <a:lstStyle/>
           <a:p>
             <a:pPr algn="l">
               <a:lnSpc>
-                <a:spcPts val="3779"/>
+                <a:spcPct val="112000"/>
               </a:lnSpc>
               <a:spcBef>
-                <a:spcPct val="0"/>
+                <a:spcPts val="0"/>
               </a:spcBef>
-              <a:defRPr>
+              <a:spcAft>
+                <a:spcPts val="0"/>
+              </a:spcAft>
+              <a:defRPr sz="2600">
+                <a:solidFill>
+                  <a:srgbClr val="000000"/>
+                </a:solidFill>
                 <a:latin typeface="標楷體"/>
                 <a:ea typeface="標楷體"/>
                 <a:cs typeface="標楷體"/>
               </a:defRPr>
             </a:pPr>
             <a:r>
-              <a:rPr lang="zh-TW" altLang="en-US" sz="2400" dirty="0">
+              <a:rPr lang="zh-TW" altLang="en-US" sz="2600" dirty="0">
                 <a:solidFill>
                   <a:srgbClr val="000000"/>
                 </a:solidFill>
@@ -14085,34 +14814,40 @@
         </p:nvSpPr>
         <p:spPr>
           <a:xfrm>
-            <a:off x="14425992" y="5641878"/>
-            <a:ext cx="3243455" cy="926344"/>
+            <a:off x="14173200" y="5029200"/>
+            <a:ext cx="3383280" cy="1554480"/>
           </a:xfrm>
           <a:prstGeom prst="rect">
             <a:avLst/>
           </a:prstGeom>
         </p:spPr>
         <p:txBody>
-          <a:bodyPr lIns="0" tIns="0" rIns="0" bIns="0" rtlCol="0" anchor="t">
-            <a:spAutoFit/>
+          <a:bodyPr lIns="27432" tIns="18288" rIns="27432" bIns="18288" rtlCol="0" anchor="ctr" wrap="square">
+            <a:noAutofit/>
           </a:bodyPr>
           <a:lstStyle/>
           <a:p>
             <a:pPr algn="l">
               <a:lnSpc>
-                <a:spcPts val="3779"/>
+                <a:spcPct val="112000"/>
               </a:lnSpc>
               <a:spcBef>
-                <a:spcPct val="0"/>
+                <a:spcPts val="0"/>
               </a:spcBef>
-              <a:defRPr>
+              <a:spcAft>
+                <a:spcPts val="0"/>
+              </a:spcAft>
+              <a:defRPr sz="2600">
+                <a:solidFill>
+                  <a:srgbClr val="000000"/>
+                </a:solidFill>
                 <a:latin typeface="標楷體"/>
                 <a:ea typeface="標楷體"/>
                 <a:cs typeface="標楷體"/>
               </a:defRPr>
             </a:pPr>
             <a:r>
-              <a:rPr lang="zh-TW" altLang="en-US" sz="2400" dirty="0">
+              <a:rPr lang="zh-TW" altLang="en-US" sz="2600" dirty="0">
                 <a:solidFill>
                   <a:srgbClr val="000000"/>
                 </a:solidFill>
@@ -14450,31 +15185,40 @@
         </p:nvSpPr>
         <p:spPr>
           <a:xfrm>
-            <a:off x="16710660" y="9646158"/>
-            <a:ext cx="480060" cy="320802"/>
+            <a:off x="16779240" y="9646920"/>
+            <a:ext cx="502920" cy="320040"/>
           </a:xfrm>
           <a:prstGeom prst="rect">
             <a:avLst/>
           </a:prstGeom>
         </p:spPr>
         <p:txBody>
-          <a:bodyPr lIns="0" tIns="0" rIns="0" bIns="0" rtlCol="0" anchor="t">
-            <a:spAutoFit/>
+          <a:bodyPr lIns="27432" tIns="18288" rIns="27432" bIns="18288" rtlCol="0" anchor="ctr" wrap="square">
+            <a:noAutofit/>
           </a:bodyPr>
           <a:lstStyle/>
           <a:p>
-            <a:pPr algn="l">
+            <a:pPr algn="r">
               <a:lnSpc>
-                <a:spcPts val="1980"/>
+                <a:spcPct val="112000"/>
               </a:lnSpc>
-              <a:defRPr>
+              <a:spcBef>
+                <a:spcPts val="0"/>
+              </a:spcBef>
+              <a:spcAft>
+                <a:spcPts val="0"/>
+              </a:spcAft>
+              <a:defRPr sz="1600">
+                <a:solidFill>
+                  <a:srgbClr val="506780"/>
+                </a:solidFill>
                 <a:latin typeface="標楷體"/>
                 <a:ea typeface="標楷體"/>
                 <a:cs typeface="標楷體"/>
               </a:defRPr>
             </a:pPr>
             <a:r>
-              <a:rPr lang="en-US" sz="1650" spc="2">
+              <a:rPr lang="en-US" sz="1600" spc="2">
                 <a:solidFill>
                   <a:srgbClr val="506780"/>
                 </a:solidFill>
@@ -14496,31 +15240,40 @@
         </p:nvSpPr>
         <p:spPr>
           <a:xfrm>
-            <a:off x="628650" y="933450"/>
-            <a:ext cx="16322040" cy="692497"/>
+            <a:off x="777240" y="640080"/>
+            <a:ext cx="16733520" cy="822960"/>
           </a:xfrm>
           <a:prstGeom prst="rect">
             <a:avLst/>
           </a:prstGeom>
         </p:spPr>
         <p:txBody>
-          <a:bodyPr lIns="0" tIns="0" rIns="0" bIns="0" rtlCol="0" anchor="t">
-            <a:spAutoFit/>
+          <a:bodyPr lIns="27432" tIns="18288" rIns="27432" bIns="18288" rtlCol="0" anchor="ctr" wrap="square">
+            <a:noAutofit/>
           </a:bodyPr>
           <a:lstStyle/>
           <a:p>
             <a:pPr algn="l">
               <a:lnSpc>
-                <a:spcPts val="5400"/>
+                <a:spcPct val="112000"/>
               </a:lnSpc>
-              <a:defRPr>
+              <a:spcBef>
+                <a:spcPts val="0"/>
+              </a:spcBef>
+              <a:spcAft>
+                <a:spcPts val="0"/>
+              </a:spcAft>
+              <a:defRPr sz="4400">
+                <a:solidFill>
+                  <a:srgbClr val="163048"/>
+                </a:solidFill>
                 <a:latin typeface="標楷體"/>
                 <a:ea typeface="標楷體"/>
                 <a:cs typeface="標楷體"/>
               </a:defRPr>
             </a:pPr>
             <a:r>
-              <a:rPr lang="en-US" sz="4500" b="1">
+              <a:rPr lang="en-US" sz="4400" b="1">
                 <a:solidFill>
                   <a:srgbClr val="163048"/>
                 </a:solidFill>
@@ -14542,36 +15295,42 @@
         </p:nvSpPr>
         <p:spPr>
           <a:xfrm>
-            <a:off x="841236" y="2494079"/>
-            <a:ext cx="1562100" cy="469167"/>
+            <a:off x="868680" y="2423160"/>
+            <a:ext cx="6949440" cy="548640"/>
           </a:xfrm>
           <a:prstGeom prst="rect">
             <a:avLst/>
           </a:prstGeom>
         </p:spPr>
         <p:txBody>
-          <a:bodyPr wrap="square" lIns="0" tIns="0" rIns="0" bIns="0" rtlCol="0" anchor="t">
-            <a:spAutoFit/>
+          <a:bodyPr wrap="square" lIns="27432" tIns="18288" rIns="27432" bIns="18288" rtlCol="0" anchor="ctr">
+            <a:noAutofit/>
           </a:bodyPr>
           <a:lstStyle/>
           <a:p>
-            <a:pPr algn="ctr">
+            <a:pPr algn="l">
               <a:lnSpc>
-                <a:spcPts val="3779"/>
+                <a:spcPct val="112000"/>
               </a:lnSpc>
               <a:spcBef>
-                <a:spcPct val="0"/>
+                <a:spcPts val="0"/>
               </a:spcBef>
-              <a:defRPr>
+              <a:spcAft>
+                <a:spcPts val="0"/>
+              </a:spcAft>
+              <a:defRPr sz="3000">
+                <a:solidFill>
+                  <a:srgbClr val="2563EB"/>
+                </a:solidFill>
                 <a:latin typeface="標楷體"/>
                 <a:ea typeface="標楷體"/>
                 <a:cs typeface="標楷體"/>
               </a:defRPr>
             </a:pPr>
             <a:r>
-              <a:rPr lang="en-US" sz="3150" b="1" dirty="0" err="1">
-                <a:solidFill>
-                  <a:schemeClr val="accent1"/>
+              <a:rPr lang="en-US" sz="3000" b="1" dirty="0" err="1">
+                <a:solidFill>
+                  <a:srgbClr val="2563EB"/>
                 </a:solidFill>
                 <a:latin typeface="標楷體" panose="03000509000000000000" pitchFamily="65" charset="-120"/>
                 <a:ea typeface="標楷體" panose="03000509000000000000" pitchFamily="65" charset="-120"/>
@@ -14581,9 +15340,9 @@
               <a:t>衛星圖</a:t>
             </a:r>
             <a:r>
-              <a:rPr lang="en-US" sz="3150" b="1" dirty="0">
-                <a:solidFill>
-                  <a:schemeClr val="accent1"/>
+              <a:rPr lang="en-US" sz="3000" b="1" dirty="0">
+                <a:solidFill>
+                  <a:srgbClr val="2563EB"/>
                 </a:solidFill>
                 <a:latin typeface="標楷體"/>
                 <a:ea typeface="標楷體"/>
@@ -14603,34 +15362,40 @@
         </p:nvSpPr>
         <p:spPr>
           <a:xfrm>
-            <a:off x="427581" y="3843338"/>
-            <a:ext cx="6139667" cy="389017"/>
+            <a:off x="868680" y="3337560"/>
+            <a:ext cx="6400800" cy="1097280"/>
           </a:xfrm>
           <a:prstGeom prst="rect">
             <a:avLst/>
           </a:prstGeom>
         </p:spPr>
         <p:txBody>
-          <a:bodyPr lIns="0" tIns="0" rIns="0" bIns="0" rtlCol="0" anchor="t">
-            <a:spAutoFit/>
+          <a:bodyPr lIns="27432" tIns="18288" rIns="27432" bIns="18288" rtlCol="0" anchor="ctr" wrap="square">
+            <a:noAutofit/>
           </a:bodyPr>
           <a:lstStyle/>
           <a:p>
-            <a:pPr algn="ctr">
+            <a:pPr algn="l">
               <a:lnSpc>
-                <a:spcPts val="3180"/>
+                <a:spcPct val="112000"/>
               </a:lnSpc>
               <a:spcBef>
-                <a:spcPct val="0"/>
+                <a:spcPts val="0"/>
               </a:spcBef>
-              <a:defRPr>
+              <a:spcAft>
+                <a:spcPts val="0"/>
+              </a:spcAft>
+              <a:defRPr sz="2600">
+                <a:solidFill>
+                  <a:srgbClr val="000000"/>
+                </a:solidFill>
                 <a:latin typeface="標楷體"/>
                 <a:ea typeface="標楷體"/>
                 <a:cs typeface="標楷體"/>
               </a:defRPr>
             </a:pPr>
             <a:r>
-              <a:rPr lang="en-US" sz="2650" b="1" dirty="0" err="1">
+              <a:rPr lang="en-US" sz="2600" b="1" dirty="0" err="1">
                 <a:solidFill>
                   <a:srgbClr val="000000"/>
                 </a:solidFill>
@@ -14661,36 +15426,42 @@
         </p:nvSpPr>
         <p:spPr>
           <a:xfrm>
-            <a:off x="10058400" y="2492791"/>
-            <a:ext cx="2355547" cy="469167"/>
+            <a:off x="10149840" y="2423160"/>
+            <a:ext cx="6949440" cy="548640"/>
           </a:xfrm>
           <a:prstGeom prst="rect">
             <a:avLst/>
           </a:prstGeom>
         </p:spPr>
         <p:txBody>
-          <a:bodyPr wrap="square" lIns="0" tIns="0" rIns="0" bIns="0" rtlCol="0" anchor="t">
-            <a:spAutoFit/>
+          <a:bodyPr wrap="square" lIns="27432" tIns="18288" rIns="27432" bIns="18288" rtlCol="0" anchor="ctr">
+            <a:noAutofit/>
           </a:bodyPr>
           <a:lstStyle/>
           <a:p>
-            <a:pPr algn="ctr">
+            <a:pPr algn="l">
               <a:lnSpc>
-                <a:spcPts val="3779"/>
+                <a:spcPct val="112000"/>
               </a:lnSpc>
               <a:spcBef>
-                <a:spcPct val="0"/>
+                <a:spcPts val="0"/>
               </a:spcBef>
-              <a:defRPr>
+              <a:spcAft>
+                <a:spcPts val="0"/>
+              </a:spcAft>
+              <a:defRPr sz="3000">
+                <a:solidFill>
+                  <a:srgbClr val="2563EB"/>
+                </a:solidFill>
                 <a:latin typeface="標楷體"/>
                 <a:ea typeface="標楷體"/>
                 <a:cs typeface="標楷體"/>
               </a:defRPr>
             </a:pPr>
             <a:r>
-              <a:rPr lang="en-US" sz="3150" b="1" dirty="0" err="1">
-                <a:solidFill>
-                  <a:schemeClr val="accent1"/>
+              <a:rPr lang="en-US" sz="3000" b="1" dirty="0" err="1">
+                <a:solidFill>
+                  <a:srgbClr val="2563EB"/>
                 </a:solidFill>
                 <a:latin typeface="標楷體"/>
                 <a:ea typeface="標楷體"/>
@@ -14700,9 +15471,9 @@
               <a:t>無人機拍攝</a:t>
             </a:r>
             <a:r>
-              <a:rPr lang="en-US" sz="3150" b="1" dirty="0">
-                <a:solidFill>
-                  <a:schemeClr val="accent1"/>
+              <a:rPr lang="en-US" sz="3000" b="1" dirty="0">
+                <a:solidFill>
+                  <a:srgbClr val="2563EB"/>
                 </a:solidFill>
                 <a:latin typeface="標楷體"/>
                 <a:ea typeface="標楷體"/>
@@ -14722,34 +15493,40 @@
         </p:nvSpPr>
         <p:spPr>
           <a:xfrm>
-            <a:off x="10313739" y="3668764"/>
-            <a:ext cx="6139667" cy="805349"/>
+            <a:off x="10149840" y="3337560"/>
+            <a:ext cx="6858000" cy="1097280"/>
           </a:xfrm>
           <a:prstGeom prst="rect">
             <a:avLst/>
           </a:prstGeom>
         </p:spPr>
         <p:txBody>
-          <a:bodyPr lIns="0" tIns="0" rIns="0" bIns="0" rtlCol="0" anchor="t">
-            <a:spAutoFit/>
+          <a:bodyPr lIns="27432" tIns="18288" rIns="27432" bIns="18288" rtlCol="0" anchor="ctr" wrap="square">
+            <a:noAutofit/>
           </a:bodyPr>
           <a:lstStyle/>
           <a:p>
             <a:pPr algn="l">
               <a:lnSpc>
-                <a:spcPts val="3180"/>
+                <a:spcPct val="112000"/>
               </a:lnSpc>
               <a:spcBef>
-                <a:spcPct val="0"/>
+                <a:spcPts val="0"/>
               </a:spcBef>
-              <a:defRPr>
+              <a:spcAft>
+                <a:spcPts val="0"/>
+              </a:spcAft>
+              <a:defRPr sz="2600">
+                <a:solidFill>
+                  <a:srgbClr val="000000"/>
+                </a:solidFill>
                 <a:latin typeface="標楷體"/>
                 <a:ea typeface="標楷體"/>
                 <a:cs typeface="標楷體"/>
               </a:defRPr>
             </a:pPr>
             <a:r>
-              <a:rPr lang="en-US" sz="2650" b="1" dirty="0" err="1">
+              <a:rPr lang="en-US" sz="2600" b="1" dirty="0" err="1">
                 <a:solidFill>
                   <a:srgbClr val="000000"/>
                 </a:solidFill>
@@ -14761,7 +15538,7 @@
               <a:t>可經由近距離的拍攝多張照片或錄影</a:t>
             </a:r>
             <a:r>
-              <a:rPr lang="en-US" sz="2650" b="1" dirty="0" err="1">
+              <a:rPr lang="en-US" sz="2600" b="1" dirty="0" err="1">
                 <a:solidFill>
                   <a:srgbClr val="000000"/>
                 </a:solidFill>
@@ -15007,8 +15784,8 @@
         </p:nvSpPr>
         <p:spPr>
           <a:xfrm>
-            <a:off x="731520" y="640080"/>
-            <a:ext cx="16459200" cy="707886"/>
+            <a:off x="777240" y="640080"/>
+            <a:ext cx="16733520" cy="822960"/>
           </a:xfrm>
           <a:prstGeom prst="rect">
             <a:avLst/>
@@ -15016,16 +15793,22 @@
           <a:noFill/>
         </p:spPr>
         <p:txBody>
-          <a:bodyPr wrap="square" lIns="54864" rIns="54864">
-            <a:spAutoFit/>
+          <a:bodyPr wrap="square" lIns="27432" rIns="27432" tIns="18288" bIns="18288" anchor="ctr">
+            <a:noAutofit/>
           </a:bodyPr>
           <a:lstStyle/>
           <a:p>
-            <a:pPr>
+            <a:pPr algn="l">
+              <a:lnSpc>
+                <a:spcPct val="112000"/>
+              </a:lnSpc>
+              <a:spcBef>
+                <a:spcPts val="0"/>
+              </a:spcBef>
               <a:spcAft>
-                <a:spcPts val="800"/>
+                <a:spcPts val="0"/>
               </a:spcAft>
-              <a:defRPr sz="4000" b="1">
+              <a:defRPr sz="4400" b="1">
                 <a:solidFill>
                   <a:srgbClr val="163048"/>
                 </a:solidFill>
@@ -15035,7 +15818,10 @@
               </a:defRPr>
             </a:pPr>
             <a:r>
-              <a:rPr dirty="0">
+              <a:rPr dirty="0" sz="4400">
+                <a:solidFill>
+                  <a:srgbClr val="163048"/>
+                </a:solidFill>
                 <a:latin typeface="標楷體"/>
                 <a:ea typeface="標楷體"/>
                 <a:cs typeface="標楷體"/>
@@ -15043,7 +15829,10 @@
               <a:t>02 </a:t>
             </a:r>
             <a:r>
-              <a:rPr dirty="0" err="1">
+              <a:rPr dirty="0" err="1" sz="4400">
+                <a:solidFill>
+                  <a:srgbClr val="163048"/>
+                </a:solidFill>
                 <a:latin typeface="標楷體" panose="03000509000000000000" pitchFamily="65" charset="-120"/>
                 <a:ea typeface="標楷體" panose="03000509000000000000" pitchFamily="65" charset="-120"/>
                 <a:cs typeface="標楷體"/>
@@ -15051,7 +15840,10 @@
               <a:t>坑洞辨識</a:t>
             </a:r>
             <a:r>
-              <a:rPr dirty="0" err="1">
+              <a:rPr dirty="0" err="1" sz="4400">
+                <a:solidFill>
+                  <a:srgbClr val="163048"/>
+                </a:solidFill>
                 <a:latin typeface="標楷體"/>
                 <a:ea typeface="標楷體"/>
                 <a:cs typeface="標楷體"/>
@@ -15059,7 +15851,10 @@
               <a:t>｜讓</a:t>
             </a:r>
             <a:r>
-              <a:rPr dirty="0">
+              <a:rPr dirty="0" sz="4400">
+                <a:solidFill>
+                  <a:srgbClr val="163048"/>
+                </a:solidFill>
                 <a:latin typeface="標楷體"/>
                 <a:ea typeface="標楷體"/>
                 <a:cs typeface="標楷體"/>
@@ -15067,7 +15862,10 @@
               <a:t> YOLO </a:t>
             </a:r>
             <a:r>
-              <a:rPr dirty="0" err="1">
+              <a:rPr dirty="0" err="1" sz="4400">
+                <a:solidFill>
+                  <a:srgbClr val="163048"/>
+                </a:solidFill>
                 <a:latin typeface="標楷體"/>
                 <a:ea typeface="標楷體"/>
                 <a:cs typeface="標楷體"/>
@@ -15090,8 +15888,8 @@
         </p:nvSpPr>
         <p:spPr>
           <a:xfrm>
-            <a:off x="16733520" y="9509760"/>
-            <a:ext cx="914400" cy="457200"/>
+            <a:off x="16779240" y="9646920"/>
+            <a:ext cx="502920" cy="320040"/>
           </a:xfrm>
           <a:prstGeom prst="rect">
             <a:avLst/>
@@ -15099,18 +15897,24 @@
           <a:noFill/>
         </p:spPr>
         <p:txBody>
-          <a:bodyPr wrap="square" lIns="54864" rIns="54864">
-            <a:spAutoFit/>
+          <a:bodyPr wrap="square" lIns="27432" rIns="27432" tIns="18288" bIns="18288" anchor="ctr">
+            <a:noAutofit/>
           </a:bodyPr>
           <a:lstStyle/>
           <a:p>
-            <a:pPr>
+            <a:pPr algn="r">
+              <a:lnSpc>
+                <a:spcPct val="112000"/>
+              </a:lnSpc>
+              <a:spcBef>
+                <a:spcPts val="0"/>
+              </a:spcBef>
               <a:spcAft>
-                <a:spcPts val="800"/>
+                <a:spcPts val="0"/>
               </a:spcAft>
-              <a:defRPr sz="1800" b="0">
-                <a:solidFill>
-                  <a:srgbClr val="2563EB"/>
+              <a:defRPr sz="1600" b="0">
+                <a:solidFill>
+                  <a:srgbClr val="506780"/>
                 </a:solidFill>
                 <a:latin typeface="標楷體"/>
                 <a:ea typeface="標楷體"/>
@@ -15118,7 +15922,10 @@
               </a:defRPr>
             </a:pPr>
             <a:r>
-              <a:rPr>
+              <a:rPr sz="1600">
+                <a:solidFill>
+                  <a:srgbClr val="506780"/>
+                </a:solidFill>
                 <a:latin typeface="標楷體"/>
                 <a:ea typeface="標楷體"/>
                 <a:cs typeface="標楷體"/>
@@ -15136,8 +15943,8 @@
         </p:nvSpPr>
         <p:spPr>
           <a:xfrm>
-            <a:off x="822960" y="1920240"/>
-            <a:ext cx="10424160" cy="523220"/>
+            <a:off x="822960" y="1828800"/>
+            <a:ext cx="10515600" cy="640080"/>
           </a:xfrm>
           <a:prstGeom prst="rect">
             <a:avLst/>
@@ -15145,16 +15952,22 @@
           <a:noFill/>
         </p:spPr>
         <p:txBody>
-          <a:bodyPr wrap="square" lIns="54864" rIns="54864">
-            <a:spAutoFit/>
+          <a:bodyPr wrap="square" lIns="27432" rIns="27432" tIns="18288" bIns="18288" anchor="ctr">
+            <a:noAutofit/>
           </a:bodyPr>
           <a:lstStyle/>
           <a:p>
-            <a:pPr>
+            <a:pPr algn="l">
+              <a:lnSpc>
+                <a:spcPct val="112000"/>
+              </a:lnSpc>
+              <a:spcBef>
+                <a:spcPts val="0"/>
+              </a:spcBef>
               <a:spcAft>
-                <a:spcPts val="800"/>
+                <a:spcPts val="0"/>
               </a:spcAft>
-              <a:defRPr sz="2800" b="1">
+              <a:defRPr sz="3000" b="1">
                 <a:solidFill>
                   <a:srgbClr val="2563EB"/>
                 </a:solidFill>
@@ -15164,7 +15977,10 @@
               </a:defRPr>
             </a:pPr>
             <a:r>
-              <a:rPr dirty="0" err="1">
+              <a:rPr dirty="0" err="1" sz="3000">
+                <a:solidFill>
+                  <a:srgbClr val="2563EB"/>
+                </a:solidFill>
                 <a:latin typeface="標楷體" panose="03000509000000000000" pitchFamily="65" charset="-120"/>
                 <a:ea typeface="標楷體" panose="03000509000000000000" pitchFamily="65" charset="-120"/>
                 <a:cs typeface="標楷體"/>
@@ -15194,8 +16010,8 @@
           </p:nvPr>
         </p:nvGraphicFramePr>
         <p:xfrm>
-          <a:off x="762000" y="3730752"/>
-          <a:ext cx="10485120" cy="3694176"/>
+          <a:off x="777240" y="2971800"/>
+          <a:ext cx="10515600" cy="4078224"/>
         </p:xfrm>
         <a:graphic>
           <a:graphicData uri="http://schemas.openxmlformats.org/drawingml/2006/table">
@@ -15204,14 +16020,14 @@
                 <a:tableStyleId>{5C22544A-7EE6-4342-B048-85BDC9FD1C3A}</a:tableStyleId>
               </a:tblPr>
               <a:tblGrid>
-                <a:gridCol w="2346960">
+                <a:gridCol w="2286000">
                   <a:extLst>
                     <a:ext uri="{9D8B030D-6E8A-4147-A177-3AD203B41FA5}">
                       <a16:colId xmlns:a16="http://schemas.microsoft.com/office/drawing/2014/main" val="20000"/>
                     </a:ext>
                   </a:extLst>
                 </a:gridCol>
-                <a:gridCol w="4937760">
+                <a:gridCol w="5029200">
                   <a:extLst>
                     <a:ext uri="{9D8B030D-6E8A-4147-A177-3AD203B41FA5}">
                       <a16:colId xmlns:a16="http://schemas.microsoft.com/office/drawing/2014/main" val="20001"/>
@@ -15229,11 +16045,22 @@
               <a:tr h="731520">
                 <a:tc>
                   <a:txBody>
-                    <a:bodyPr/>
+                    <a:bodyPr wrap="square" lIns="27432" rIns="27432" tIns="18288" bIns="18288" anchor="ctr">
+                      <a:noAutofit/>
+                    </a:bodyPr>
                     <a:lstStyle/>
                     <a:p>
                       <a:pPr>
-                        <a:defRPr sz="2400" b="1">
+                        <a:lnSpc>
+                          <a:spcPct val="112000"/>
+                        </a:lnSpc>
+                        <a:spcBef>
+                          <a:spcPts val="0"/>
+                        </a:spcBef>
+                        <a:spcAft>
+                          <a:spcPts val="0"/>
+                        </a:spcAft>
+                        <a:defRPr sz="2500" b="1">
                           <a:solidFill>
                             <a:srgbClr val="FFFFFF"/>
                           </a:solidFill>
@@ -15243,7 +16070,10 @@
                         </a:defRPr>
                       </a:pPr>
                       <a:r>
-                        <a:rPr dirty="0" err="1">
+                        <a:rPr dirty="0" err="1" sz="2500" b="1">
+                          <a:solidFill>
+                            <a:srgbClr val="FFFFFF"/>
+                          </a:solidFill>
                           <a:latin typeface="標楷體" panose="03000509000000000000" pitchFamily="65" charset="-120"/>
                           <a:ea typeface="標楷體" panose="03000509000000000000" pitchFamily="65" charset="-120"/>
                           <a:cs typeface="標楷體"/>
@@ -15257,7 +16087,7 @@
                       </a:endParaRPr>
                     </a:p>
                   </a:txBody>
-                  <a:tcPr marL="164592" marR="164592" anchor="ctr">
+                  <a:tcPr marL="137160" marR="137160" anchor="ctr" marT="73152" marB="73152">
                     <a:solidFill>
                       <a:srgbClr val="2563EB"/>
                     </a:solidFill>
@@ -15265,11 +16095,22 @@
                 </a:tc>
                 <a:tc>
                   <a:txBody>
-                    <a:bodyPr/>
+                    <a:bodyPr wrap="square" lIns="27432" rIns="27432" tIns="18288" bIns="18288" anchor="ctr">
+                      <a:noAutofit/>
+                    </a:bodyPr>
                     <a:lstStyle/>
                     <a:p>
                       <a:pPr>
-                        <a:defRPr sz="2400" b="1">
+                        <a:lnSpc>
+                          <a:spcPct val="112000"/>
+                        </a:lnSpc>
+                        <a:spcBef>
+                          <a:spcPts val="0"/>
+                        </a:spcBef>
+                        <a:spcAft>
+                          <a:spcPts val="0"/>
+                        </a:spcAft>
+                        <a:defRPr sz="2500" b="1">
                           <a:solidFill>
                             <a:srgbClr val="FFFFFF"/>
                           </a:solidFill>
@@ -15279,7 +16120,10 @@
                         </a:defRPr>
                       </a:pPr>
                       <a:r>
-                        <a:rPr dirty="0" err="1">
+                        <a:rPr dirty="0" err="1" sz="2500" b="1">
+                          <a:solidFill>
+                            <a:srgbClr val="FFFFFF"/>
+                          </a:solidFill>
                           <a:latin typeface="標楷體" panose="03000509000000000000" pitchFamily="65" charset="-120"/>
                           <a:ea typeface="標楷體" panose="03000509000000000000" pitchFamily="65" charset="-120"/>
                           <a:cs typeface="標楷體"/>
@@ -15293,7 +16137,7 @@
                       </a:endParaRPr>
                     </a:p>
                   </a:txBody>
-                  <a:tcPr marL="164592" marR="164592" anchor="ctr">
+                  <a:tcPr marL="137160" marR="137160" anchor="ctr" marT="73152" marB="73152">
                     <a:solidFill>
                       <a:srgbClr val="2563EB"/>
                     </a:solidFill>
@@ -15301,11 +16145,22 @@
                 </a:tc>
                 <a:tc>
                   <a:txBody>
-                    <a:bodyPr/>
+                    <a:bodyPr wrap="square" lIns="27432" rIns="27432" tIns="18288" bIns="18288" anchor="ctr">
+                      <a:noAutofit/>
+                    </a:bodyPr>
                     <a:lstStyle/>
                     <a:p>
                       <a:pPr>
-                        <a:defRPr sz="2400" b="1">
+                        <a:lnSpc>
+                          <a:spcPct val="112000"/>
+                        </a:lnSpc>
+                        <a:spcBef>
+                          <a:spcPts val="0"/>
+                        </a:spcBef>
+                        <a:spcAft>
+                          <a:spcPts val="0"/>
+                        </a:spcAft>
+                        <a:defRPr sz="2500" b="1">
                           <a:solidFill>
                             <a:srgbClr val="FFFFFF"/>
                           </a:solidFill>
@@ -15315,7 +16170,10 @@
                         </a:defRPr>
                       </a:pPr>
                       <a:r>
-                        <a:rPr dirty="0" err="1">
+                        <a:rPr dirty="0" err="1" sz="2500" b="1">
+                          <a:solidFill>
+                            <a:srgbClr val="FFFFFF"/>
+                          </a:solidFill>
                           <a:latin typeface="標楷體" panose="03000509000000000000" pitchFamily="65" charset="-120"/>
                           <a:ea typeface="標楷體" panose="03000509000000000000" pitchFamily="65" charset="-120"/>
                           <a:cs typeface="標楷體"/>
@@ -15329,7 +16187,7 @@
                       </a:endParaRPr>
                     </a:p>
                   </a:txBody>
-                  <a:tcPr marL="164592" marR="164592" anchor="ctr">
+                  <a:tcPr marL="137160" marR="137160" anchor="ctr" marT="73152" marB="73152">
                     <a:solidFill>
                       <a:srgbClr val="2563EB"/>
                     </a:solidFill>
@@ -15341,16 +16199,27 @@
                   </a:ext>
                 </a:extLst>
               </a:tr>
-              <a:tr h="987552">
+              <a:tr h="1115568">
                 <a:tc>
                   <a:txBody>
-                    <a:bodyPr/>
+                    <a:bodyPr wrap="square" lIns="27432" rIns="27432" tIns="18288" bIns="18288" anchor="ctr">
+                      <a:noAutofit/>
+                    </a:bodyPr>
                     <a:lstStyle/>
                     <a:p>
                       <a:pPr>
-                        <a:defRPr sz="2400" b="0">
+                        <a:lnSpc>
+                          <a:spcPct val="112000"/>
+                        </a:lnSpc>
+                        <a:spcBef>
+                          <a:spcPts val="0"/>
+                        </a:spcBef>
+                        <a:spcAft>
+                          <a:spcPts val="0"/>
+                        </a:spcAft>
+                        <a:defRPr sz="2500" b="0">
                           <a:solidFill>
-                            <a:srgbClr val="163048"/>
+                            <a:srgbClr val="000000"/>
                           </a:solidFill>
                           <a:latin typeface="標楷體"/>
                           <a:ea typeface="標楷體"/>
@@ -15358,9 +16227,9 @@
                         </a:defRPr>
                       </a:pPr>
                       <a:r>
-                        <a:rPr dirty="0" err="1">
+                        <a:rPr dirty="0" err="1" sz="2500" b="0">
                           <a:solidFill>
-                            <a:schemeClr val="tx1"/>
+                            <a:srgbClr val="000000"/>
                           </a:solidFill>
                           <a:latin typeface="標楷體" panose="03000509000000000000" pitchFamily="65" charset="-120"/>
                           <a:ea typeface="標楷體" panose="03000509000000000000" pitchFamily="65" charset="-120"/>
@@ -15378,7 +16247,7 @@
                       </a:endParaRPr>
                     </a:p>
                   </a:txBody>
-                  <a:tcPr marL="164592" marR="164592" anchor="ctr">
+                  <a:tcPr marL="137160" marR="137160" anchor="ctr" marT="73152" marB="73152">
                     <a:solidFill>
                       <a:srgbClr val="FFFFFF"/>
                     </a:solidFill>
@@ -15386,13 +16255,24 @@
                 </a:tc>
                 <a:tc>
                   <a:txBody>
-                    <a:bodyPr/>
+                    <a:bodyPr wrap="square" lIns="27432" rIns="27432" tIns="18288" bIns="18288" anchor="ctr">
+                      <a:noAutofit/>
+                    </a:bodyPr>
                     <a:lstStyle/>
                     <a:p>
                       <a:pPr>
-                        <a:defRPr sz="2400" b="0">
+                        <a:lnSpc>
+                          <a:spcPct val="112000"/>
+                        </a:lnSpc>
+                        <a:spcBef>
+                          <a:spcPts val="0"/>
+                        </a:spcBef>
+                        <a:spcAft>
+                          <a:spcPts val="0"/>
+                        </a:spcAft>
+                        <a:defRPr sz="2500" b="0">
                           <a:solidFill>
-                            <a:srgbClr val="163048"/>
+                            <a:srgbClr val="000000"/>
                           </a:solidFill>
                           <a:latin typeface="標楷體"/>
                           <a:ea typeface="標楷體"/>
@@ -15400,9 +16280,9 @@
                         </a:defRPr>
                       </a:pPr>
                       <a:r>
-                        <a:rPr dirty="0" err="1">
+                        <a:rPr dirty="0" err="1" sz="2500" b="0">
                           <a:solidFill>
-                            <a:schemeClr val="tx1"/>
+                            <a:srgbClr val="000000"/>
                           </a:solidFill>
                           <a:latin typeface="標楷體" panose="03000509000000000000" pitchFamily="65" charset="-120"/>
                           <a:ea typeface="標楷體" panose="03000509000000000000" pitchFamily="65" charset="-120"/>
@@ -15420,7 +16300,7 @@
                       </a:endParaRPr>
                     </a:p>
                   </a:txBody>
-                  <a:tcPr marL="164592" marR="164592" anchor="ctr">
+                  <a:tcPr marL="137160" marR="137160" anchor="ctr" marT="73152" marB="73152">
                     <a:solidFill>
                       <a:srgbClr val="FFFFFF"/>
                     </a:solidFill>
@@ -15428,13 +16308,24 @@
                 </a:tc>
                 <a:tc>
                   <a:txBody>
-                    <a:bodyPr/>
+                    <a:bodyPr wrap="square" lIns="27432" rIns="27432" tIns="18288" bIns="18288" anchor="ctr">
+                      <a:noAutofit/>
+                    </a:bodyPr>
                     <a:lstStyle/>
                     <a:p>
                       <a:pPr>
-                        <a:defRPr sz="2400" b="0">
+                        <a:lnSpc>
+                          <a:spcPct val="112000"/>
+                        </a:lnSpc>
+                        <a:spcBef>
+                          <a:spcPts val="0"/>
+                        </a:spcBef>
+                        <a:spcAft>
+                          <a:spcPts val="0"/>
+                        </a:spcAft>
+                        <a:defRPr sz="2500" b="0">
                           <a:solidFill>
-                            <a:srgbClr val="163048"/>
+                            <a:srgbClr val="000000"/>
                           </a:solidFill>
                           <a:latin typeface="標楷體"/>
                           <a:ea typeface="標楷體"/>
@@ -15442,9 +16333,9 @@
                         </a:defRPr>
                       </a:pPr>
                       <a:r>
-                        <a:rPr dirty="0" err="1">
+                        <a:rPr dirty="0" err="1" sz="2500" b="0">
                           <a:solidFill>
-                            <a:schemeClr val="tx1"/>
+                            <a:srgbClr val="000000"/>
                           </a:solidFill>
                           <a:latin typeface="標楷體" panose="03000509000000000000" pitchFamily="65" charset="-120"/>
                           <a:ea typeface="標楷體" panose="03000509000000000000" pitchFamily="65" charset="-120"/>
@@ -15462,7 +16353,7 @@
                       </a:endParaRPr>
                     </a:p>
                   </a:txBody>
-                  <a:tcPr marL="164592" marR="164592" anchor="ctr">
+                  <a:tcPr marL="137160" marR="137160" anchor="ctr" marT="73152" marB="73152">
                     <a:solidFill>
                       <a:srgbClr val="FFFFFF"/>
                     </a:solidFill>
@@ -15474,16 +16365,27 @@
                   </a:ext>
                 </a:extLst>
               </a:tr>
-              <a:tr h="987552">
+              <a:tr h="1115568">
                 <a:tc>
                   <a:txBody>
-                    <a:bodyPr/>
+                    <a:bodyPr wrap="square" lIns="27432" rIns="27432" tIns="18288" bIns="18288" anchor="ctr">
+                      <a:noAutofit/>
+                    </a:bodyPr>
                     <a:lstStyle/>
                     <a:p>
                       <a:pPr>
-                        <a:defRPr sz="2400" b="0">
+                        <a:lnSpc>
+                          <a:spcPct val="112000"/>
+                        </a:lnSpc>
+                        <a:spcBef>
+                          <a:spcPts val="0"/>
+                        </a:spcBef>
+                        <a:spcAft>
+                          <a:spcPts val="0"/>
+                        </a:spcAft>
+                        <a:defRPr sz="2500" b="0">
                           <a:solidFill>
-                            <a:srgbClr val="163048"/>
+                            <a:srgbClr val="000000"/>
                           </a:solidFill>
                           <a:latin typeface="標楷體"/>
                           <a:ea typeface="標楷體"/>
@@ -15491,9 +16393,9 @@
                         </a:defRPr>
                       </a:pPr>
                       <a:r>
-                        <a:rPr dirty="0" err="1">
+                        <a:rPr dirty="0" err="1" sz="2500" b="0">
                           <a:solidFill>
-                            <a:schemeClr val="tx1"/>
+                            <a:srgbClr val="000000"/>
                           </a:solidFill>
                           <a:latin typeface="標楷體" panose="03000509000000000000" pitchFamily="65" charset="-120"/>
                           <a:ea typeface="標楷體" panose="03000509000000000000" pitchFamily="65" charset="-120"/>
@@ -15511,7 +16413,7 @@
                       </a:endParaRPr>
                     </a:p>
                   </a:txBody>
-                  <a:tcPr marL="164592" marR="164592" anchor="ctr">
+                  <a:tcPr marL="137160" marR="137160" anchor="ctr" marT="73152" marB="73152">
                     <a:solidFill>
                       <a:srgbClr val="EAF1FD"/>
                     </a:solidFill>
@@ -15519,13 +16421,24 @@
                 </a:tc>
                 <a:tc>
                   <a:txBody>
-                    <a:bodyPr/>
+                    <a:bodyPr wrap="square" lIns="27432" rIns="27432" tIns="18288" bIns="18288" anchor="ctr">
+                      <a:noAutofit/>
+                    </a:bodyPr>
                     <a:lstStyle/>
                     <a:p>
                       <a:pPr marL="0" algn="l" defTabSz="1371600" rtl="0" eaLnBrk="1" latinLnBrk="0" hangingPunct="1">
-                        <a:defRPr sz="2400" b="0">
+                        <a:lnSpc>
+                          <a:spcPct val="112000"/>
+                        </a:lnSpc>
+                        <a:spcBef>
+                          <a:spcPts val="0"/>
+                        </a:spcBef>
+                        <a:spcAft>
+                          <a:spcPts val="0"/>
+                        </a:spcAft>
+                        <a:defRPr sz="2500" b="0">
                           <a:solidFill>
-                            <a:srgbClr val="163048"/>
+                            <a:srgbClr val="000000"/>
                           </a:solidFill>
                           <a:latin typeface="標楷體"/>
                           <a:ea typeface="標楷體"/>
@@ -15533,9 +16446,9 @@
                         </a:defRPr>
                       </a:pPr>
                       <a:r>
-                        <a:rPr sz="2400" b="0" kern="1200" dirty="0" err="1">
+                        <a:rPr sz="2500" b="0" kern="1200" dirty="0" err="1">
                           <a:solidFill>
-                            <a:schemeClr val="tx1"/>
+                            <a:srgbClr val="000000"/>
                           </a:solidFill>
                           <a:latin typeface="標楷體" panose="03000509000000000000" pitchFamily="65" charset="-120"/>
                           <a:ea typeface="標楷體" panose="03000509000000000000" pitchFamily="65" charset="-120"/>
@@ -15553,7 +16466,7 @@
                       </a:endParaRPr>
                     </a:p>
                   </a:txBody>
-                  <a:tcPr marL="164592" marR="164592" anchor="ctr">
+                  <a:tcPr marL="137160" marR="137160" anchor="ctr" marT="73152" marB="73152">
                     <a:solidFill>
                       <a:srgbClr val="EAF1FD"/>
                     </a:solidFill>
@@ -15561,13 +16474,24 @@
                 </a:tc>
                 <a:tc>
                   <a:txBody>
-                    <a:bodyPr/>
+                    <a:bodyPr wrap="square" lIns="27432" rIns="27432" tIns="18288" bIns="18288" anchor="ctr">
+                      <a:noAutofit/>
+                    </a:bodyPr>
                     <a:lstStyle/>
                     <a:p>
                       <a:pPr>
-                        <a:defRPr sz="2400" b="0">
+                        <a:lnSpc>
+                          <a:spcPct val="112000"/>
+                        </a:lnSpc>
+                        <a:spcBef>
+                          <a:spcPts val="0"/>
+                        </a:spcBef>
+                        <a:spcAft>
+                          <a:spcPts val="0"/>
+                        </a:spcAft>
+                        <a:defRPr sz="2500" b="0">
                           <a:solidFill>
-                            <a:srgbClr val="163048"/>
+                            <a:srgbClr val="000000"/>
                           </a:solidFill>
                           <a:latin typeface="標楷體"/>
                           <a:ea typeface="標楷體"/>
@@ -15575,9 +16499,9 @@
                         </a:defRPr>
                       </a:pPr>
                       <a:r>
-                        <a:rPr dirty="0" err="1">
+                        <a:rPr dirty="0" err="1" sz="2500" b="0">
                           <a:solidFill>
-                            <a:schemeClr val="tx1"/>
+                            <a:srgbClr val="000000"/>
                           </a:solidFill>
                           <a:latin typeface="標楷體" panose="03000509000000000000" pitchFamily="65" charset="-120"/>
                           <a:ea typeface="標楷體" panose="03000509000000000000" pitchFamily="65" charset="-120"/>
@@ -15595,7 +16519,7 @@
                       </a:endParaRPr>
                     </a:p>
                   </a:txBody>
-                  <a:tcPr marL="164592" marR="164592" anchor="ctr">
+                  <a:tcPr marL="137160" marR="137160" anchor="ctr" marT="73152" marB="73152">
                     <a:solidFill>
                       <a:srgbClr val="EAF1FD"/>
                     </a:solidFill>
@@ -15607,16 +16531,27 @@
                   </a:ext>
                 </a:extLst>
               </a:tr>
-              <a:tr h="987552">
+              <a:tr h="1115568">
                 <a:tc>
                   <a:txBody>
-                    <a:bodyPr/>
+                    <a:bodyPr wrap="square" lIns="27432" rIns="27432" tIns="18288" bIns="18288" anchor="ctr">
+                      <a:noAutofit/>
+                    </a:bodyPr>
                     <a:lstStyle/>
                     <a:p>
                       <a:pPr>
-                        <a:defRPr sz="2400" b="0">
+                        <a:lnSpc>
+                          <a:spcPct val="112000"/>
+                        </a:lnSpc>
+                        <a:spcBef>
+                          <a:spcPts val="0"/>
+                        </a:spcBef>
+                        <a:spcAft>
+                          <a:spcPts val="0"/>
+                        </a:spcAft>
+                        <a:defRPr sz="2500" b="0">
                           <a:solidFill>
-                            <a:srgbClr val="163048"/>
+                            <a:srgbClr val="000000"/>
                           </a:solidFill>
                           <a:latin typeface="標楷體"/>
                           <a:ea typeface="標楷體"/>
@@ -15624,9 +16559,9 @@
                         </a:defRPr>
                       </a:pPr>
                       <a:r>
-                        <a:rPr dirty="0" err="1">
+                        <a:rPr dirty="0" err="1" sz="2500" b="0">
                           <a:solidFill>
-                            <a:schemeClr val="tx1"/>
+                            <a:srgbClr val="000000"/>
                           </a:solidFill>
                           <a:latin typeface="標楷體" panose="03000509000000000000" pitchFamily="65" charset="-120"/>
                           <a:ea typeface="標楷體" panose="03000509000000000000" pitchFamily="65" charset="-120"/>
@@ -15644,7 +16579,7 @@
                       </a:endParaRPr>
                     </a:p>
                   </a:txBody>
-                  <a:tcPr marL="164592" marR="164592" anchor="ctr">
+                  <a:tcPr marL="137160" marR="137160" anchor="ctr" marT="73152" marB="73152">
                     <a:solidFill>
                       <a:srgbClr val="FFFFFF"/>
                     </a:solidFill>
@@ -15652,13 +16587,24 @@
                 </a:tc>
                 <a:tc>
                   <a:txBody>
-                    <a:bodyPr/>
+                    <a:bodyPr wrap="square" lIns="27432" rIns="27432" tIns="18288" bIns="18288" anchor="ctr">
+                      <a:noAutofit/>
+                    </a:bodyPr>
                     <a:lstStyle/>
                     <a:p>
                       <a:pPr>
-                        <a:defRPr sz="2400" b="0">
+                        <a:lnSpc>
+                          <a:spcPct val="112000"/>
+                        </a:lnSpc>
+                        <a:spcBef>
+                          <a:spcPts val="0"/>
+                        </a:spcBef>
+                        <a:spcAft>
+                          <a:spcPts val="0"/>
+                        </a:spcAft>
+                        <a:defRPr sz="2500" b="0">
                           <a:solidFill>
-                            <a:srgbClr val="163048"/>
+                            <a:srgbClr val="000000"/>
                           </a:solidFill>
                           <a:latin typeface="標楷體"/>
                           <a:ea typeface="標楷體"/>
@@ -15666,9 +16612,9 @@
                         </a:defRPr>
                       </a:pPr>
                       <a:r>
-                        <a:rPr dirty="0" err="1">
+                        <a:rPr dirty="0" err="1" sz="2500" b="0">
                           <a:solidFill>
-                            <a:schemeClr val="tx1"/>
+                            <a:srgbClr val="000000"/>
                           </a:solidFill>
                           <a:latin typeface="標楷體" panose="03000509000000000000" pitchFamily="65" charset="-120"/>
                           <a:ea typeface="標楷體" panose="03000509000000000000" pitchFamily="65" charset="-120"/>
@@ -15686,7 +16632,7 @@
                       </a:endParaRPr>
                     </a:p>
                   </a:txBody>
-                  <a:tcPr marL="164592" marR="164592" anchor="ctr">
+                  <a:tcPr marL="137160" marR="137160" anchor="ctr" marT="73152" marB="73152">
                     <a:solidFill>
                       <a:srgbClr val="FFFFFF"/>
                     </a:solidFill>
@@ -15694,13 +16640,24 @@
                 </a:tc>
                 <a:tc>
                   <a:txBody>
-                    <a:bodyPr/>
+                    <a:bodyPr wrap="square" lIns="27432" rIns="27432" tIns="18288" bIns="18288" anchor="ctr">
+                      <a:noAutofit/>
+                    </a:bodyPr>
                     <a:lstStyle/>
                     <a:p>
                       <a:pPr>
-                        <a:defRPr sz="2400" b="0">
+                        <a:lnSpc>
+                          <a:spcPct val="112000"/>
+                        </a:lnSpc>
+                        <a:spcBef>
+                          <a:spcPts val="0"/>
+                        </a:spcBef>
+                        <a:spcAft>
+                          <a:spcPts val="0"/>
+                        </a:spcAft>
+                        <a:defRPr sz="2500" b="0">
                           <a:solidFill>
-                            <a:srgbClr val="163048"/>
+                            <a:srgbClr val="000000"/>
                           </a:solidFill>
                           <a:latin typeface="標楷體"/>
                           <a:ea typeface="標楷體"/>
@@ -15708,9 +16665,9 @@
                         </a:defRPr>
                       </a:pPr>
                       <a:r>
-                        <a:rPr dirty="0" err="1">
+                        <a:rPr dirty="0" err="1" sz="2500" b="0">
                           <a:solidFill>
-                            <a:schemeClr val="tx1"/>
+                            <a:srgbClr val="000000"/>
                           </a:solidFill>
                           <a:latin typeface="標楷體" panose="03000509000000000000" pitchFamily="65" charset="-120"/>
                           <a:ea typeface="標楷體" panose="03000509000000000000" pitchFamily="65" charset="-120"/>
@@ -15728,7 +16685,7 @@
                       </a:endParaRPr>
                     </a:p>
                   </a:txBody>
-                  <a:tcPr marL="164592" marR="164592" anchor="ctr">
+                  <a:tcPr marL="137160" marR="137160" anchor="ctr" marT="73152" marB="73152">
                     <a:solidFill>
                       <a:srgbClr val="FFFFFF"/>
                     </a:solidFill>
@@ -15752,8 +16709,8 @@
         </p:nvSpPr>
         <p:spPr>
           <a:xfrm>
-            <a:off x="11978640" y="4800600"/>
-            <a:ext cx="5303520" cy="430887"/>
+            <a:off x="11978640" y="4773168"/>
+            <a:ext cx="5303520" cy="502920"/>
           </a:xfrm>
           <a:prstGeom prst="rect">
             <a:avLst/>
@@ -15761,18 +16718,24 @@
           <a:noFill/>
         </p:spPr>
         <p:txBody>
-          <a:bodyPr wrap="square" lIns="54864" rIns="54864">
-            <a:spAutoFit/>
+          <a:bodyPr wrap="square" lIns="27432" rIns="27432" tIns="18288" bIns="18288" anchor="ctr">
+            <a:noAutofit/>
           </a:bodyPr>
           <a:lstStyle/>
           <a:p>
-            <a:pPr>
+            <a:pPr algn="l">
+              <a:lnSpc>
+                <a:spcPct val="112000"/>
+              </a:lnSpc>
+              <a:spcBef>
+                <a:spcPts val="0"/>
+              </a:spcBef>
               <a:spcAft>
-                <a:spcPts val="800"/>
+                <a:spcPts val="0"/>
               </a:spcAft>
-              <a:defRPr sz="2200" b="1">
-                <a:solidFill>
-                  <a:srgbClr val="2563EB"/>
+              <a:defRPr sz="2400" b="1">
+                <a:solidFill>
+                  <a:srgbClr val="000000"/>
                 </a:solidFill>
                 <a:latin typeface="標楷體"/>
                 <a:ea typeface="標楷體"/>
@@ -15780,7 +16743,10 @@
               </a:defRPr>
             </a:pPr>
             <a:r>
-              <a:rPr dirty="0" err="1">
+              <a:rPr dirty="0" err="1" sz="2400">
+                <a:solidFill>
+                  <a:srgbClr val="000000"/>
+                </a:solidFill>
                 <a:latin typeface="標楷體" panose="03000509000000000000" pitchFamily="65" charset="-120"/>
                 <a:ea typeface="標楷體" panose="03000509000000000000" pitchFamily="65" charset="-120"/>
                 <a:cs typeface="標楷體"/>
@@ -15803,8 +16769,8 @@
         </p:nvSpPr>
         <p:spPr>
           <a:xfrm>
-            <a:off x="11978640" y="8366760"/>
-            <a:ext cx="5303520" cy="430887"/>
+            <a:off x="11978640" y="8348472"/>
+            <a:ext cx="5303520" cy="502920"/>
           </a:xfrm>
           <a:prstGeom prst="rect">
             <a:avLst/>
@@ -15812,18 +16778,24 @@
           <a:noFill/>
         </p:spPr>
         <p:txBody>
-          <a:bodyPr wrap="square" lIns="54864" rIns="54864">
-            <a:spAutoFit/>
+          <a:bodyPr wrap="square" lIns="27432" rIns="27432" tIns="18288" bIns="18288" anchor="ctr">
+            <a:noAutofit/>
           </a:bodyPr>
           <a:lstStyle/>
           <a:p>
-            <a:pPr>
+            <a:pPr algn="l">
+              <a:lnSpc>
+                <a:spcPct val="112000"/>
+              </a:lnSpc>
+              <a:spcBef>
+                <a:spcPts val="0"/>
+              </a:spcBef>
               <a:spcAft>
-                <a:spcPts val="800"/>
+                <a:spcPts val="0"/>
               </a:spcAft>
-              <a:defRPr sz="2200" b="1">
-                <a:solidFill>
-                  <a:srgbClr val="2563EB"/>
+              <a:defRPr sz="2400" b="1">
+                <a:solidFill>
+                  <a:srgbClr val="000000"/>
                 </a:solidFill>
                 <a:latin typeface="標楷體"/>
                 <a:ea typeface="標楷體"/>
@@ -15831,7 +16803,10 @@
               </a:defRPr>
             </a:pPr>
             <a:r>
-              <a:rPr dirty="0" err="1">
+              <a:rPr dirty="0" err="1" sz="2400">
+                <a:solidFill>
+                  <a:srgbClr val="000000"/>
+                </a:solidFill>
                 <a:latin typeface="標楷體" panose="03000509000000000000" pitchFamily="65" charset="-120"/>
                 <a:ea typeface="標楷體" panose="03000509000000000000" pitchFamily="65" charset="-120"/>
                 <a:cs typeface="標楷體"/>
@@ -15843,6 +16818,126 @@
               <a:ea typeface="標楷體" panose="03000509000000000000" pitchFamily="65" charset="-120"/>
               <a:cs typeface="標楷體"/>
             </a:endParaRPr>
+          </a:p>
+        </p:txBody>
+      </p:sp>
+      <p:sp>
+        <p:nvSpPr>
+          <p:cNvPr id="14" name="文字方塊 13">
+            <a:extLst>
+              <a:ext uri="{FF2B5EF4-FFF2-40B4-BE49-F238E27FC236}">
+                <a16:creationId xmlns:a16="http://schemas.microsoft.com/office/drawing/2014/main" id="{EA20F807-B0A6-480A-9DA7-EA98F94A446B}"/>
+              </a:ext>
+            </a:extLst>
+          </p:cNvPr>
+          <p:cNvSpPr txBox="1"/>
+          <p:nvPr/>
+        </p:nvSpPr>
+        <p:spPr>
+          <a:xfrm>
+            <a:off x="777240" y="7452360"/>
+            <a:ext cx="10515600" cy="1234440"/>
+          </a:xfrm>
+          <a:prstGeom prst="rect">
+            <a:avLst/>
+          </a:prstGeom>
+          <a:noFill/>
+        </p:spPr>
+        <p:txBody>
+          <a:bodyPr wrap="square" lIns="27432" rIns="27432" tIns="18288" bIns="18288" anchor="ctr">
+            <a:noAutofit/>
+          </a:bodyPr>
+          <a:lstStyle/>
+          <a:p>
+            <a:pPr algn="l">
+              <a:lnSpc>
+                <a:spcPct val="112000"/>
+              </a:lnSpc>
+              <a:spcBef>
+                <a:spcPts val="0"/>
+              </a:spcBef>
+              <a:spcAft>
+                <a:spcPts val="0"/>
+              </a:spcAft>
+              <a:defRPr sz="2800">
+                <a:solidFill>
+                  <a:srgbClr val="000000"/>
+                </a:solidFill>
+                <a:latin typeface="標楷體"/>
+                <a:ea typeface="標楷體"/>
+                <a:cs typeface="標楷體"/>
+              </a:defRPr>
+            </a:pPr>
+            <a:r>
+              <a:rPr lang="zh-TW" altLang="en-US" sz="2800" b="1" dirty="0">
+                <a:solidFill>
+                  <a:srgbClr val="000000"/>
+                </a:solidFill>
+                <a:latin typeface="標楷體"/>
+                <a:ea typeface="標楷體"/>
+                <a:cs typeface="標楷體"/>
+              </a:rPr>
+              <a:t>建立</a:t>
+            </a:r>
+            <a:r>
+              <a:rPr lang="en-US" altLang="zh-TW" sz="2800" b="1" dirty="0">
+                <a:solidFill>
+                  <a:srgbClr val="000000"/>
+                </a:solidFill>
+                <a:latin typeface="標楷體"/>
+                <a:ea typeface="標楷體"/>
+                <a:cs typeface="標楷體"/>
+              </a:rPr>
+              <a:t>YOLO</a:t>
+            </a:r>
+            <a:r>
+              <a:rPr lang="zh-TW" altLang="en-US" sz="2800" b="1" dirty="0">
+                <a:solidFill>
+                  <a:srgbClr val="000000"/>
+                </a:solidFill>
+                <a:latin typeface="標楷體"/>
+                <a:ea typeface="標楷體"/>
+                <a:cs typeface="標楷體"/>
+              </a:rPr>
+              <a:t>資料集、無人機影像輔助</a:t>
+            </a:r>
+            <a:endParaRPr lang="en-US" altLang="zh-TW" sz="3600" b="1" dirty="0">
+              <a:solidFill>
+                <a:schemeClr val="tx2"/>
+              </a:solidFill>
+            </a:endParaRPr>
+          </a:p>
+          <a:p>
+            <a:pPr algn="l">
+              <a:lnSpc>
+                <a:spcPct val="112000"/>
+              </a:lnSpc>
+              <a:spcBef>
+                <a:spcPts val="0"/>
+              </a:spcBef>
+              <a:spcAft>
+                <a:spcPts val="0"/>
+              </a:spcAft>
+              <a:defRPr sz="2800">
+                <a:solidFill>
+                  <a:srgbClr val="000000"/>
+                </a:solidFill>
+                <a:latin typeface="標楷體"/>
+                <a:ea typeface="標楷體"/>
+                <a:cs typeface="標楷體"/>
+              </a:defRPr>
+            </a:pPr>
+            <a:r>
+              <a:rPr lang="zh-TW" altLang="en-US" sz="2800" b="1" dirty="0">
+                <a:solidFill>
+                  <a:srgbClr val="000000"/>
+                </a:solidFill>
+                <a:latin typeface="標楷體"/>
+                <a:ea typeface="標楷體"/>
+                <a:cs typeface="標楷體"/>
+              </a:rPr>
+              <a:t>專門訓練分辨彈坑</a:t>
+            </a:r>
           </a:p>
         </p:txBody>
       </p:sp>
@@ -16005,8 +17100,8 @@
         </p:nvSpPr>
         <p:spPr>
           <a:xfrm>
-            <a:off x="731520" y="640080"/>
-            <a:ext cx="16459200" cy="707886"/>
+            <a:off x="777240" y="640080"/>
+            <a:ext cx="16733520" cy="822960"/>
           </a:xfrm>
           <a:prstGeom prst="rect">
             <a:avLst/>
@@ -16014,16 +17109,22 @@
           <a:noFill/>
         </p:spPr>
         <p:txBody>
-          <a:bodyPr wrap="square" lIns="54864" rIns="54864">
-            <a:spAutoFit/>
+          <a:bodyPr wrap="square" lIns="27432" rIns="27432" tIns="18288" bIns="18288" anchor="ctr">
+            <a:noAutofit/>
           </a:bodyPr>
           <a:lstStyle/>
           <a:p>
-            <a:pPr>
+            <a:pPr algn="l">
+              <a:lnSpc>
+                <a:spcPct val="112000"/>
+              </a:lnSpc>
+              <a:spcBef>
+                <a:spcPts val="0"/>
+              </a:spcBef>
               <a:spcAft>
-                <a:spcPts val="800"/>
+                <a:spcPts val="0"/>
               </a:spcAft>
-              <a:defRPr sz="4000" b="1">
+              <a:defRPr sz="4400" b="1">
                 <a:solidFill>
                   <a:srgbClr val="163048"/>
                 </a:solidFill>
@@ -16033,7 +17134,10 @@
               </a:defRPr>
             </a:pPr>
             <a:r>
-              <a:rPr>
+              <a:rPr sz="4400">
+                <a:solidFill>
+                  <a:srgbClr val="163048"/>
+                </a:solidFill>
                 <a:latin typeface="標楷體" panose="03000509000000000000" pitchFamily="65" charset="-120"/>
                 <a:ea typeface="標楷體" panose="03000509000000000000" pitchFamily="65" charset="-120"/>
                 <a:cs typeface="標楷體"/>
@@ -16051,8 +17155,8 @@
         </p:nvSpPr>
         <p:spPr>
           <a:xfrm>
-            <a:off x="16733520" y="9509760"/>
-            <a:ext cx="914400" cy="457200"/>
+            <a:off x="16779240" y="9646920"/>
+            <a:ext cx="502920" cy="320040"/>
           </a:xfrm>
           <a:prstGeom prst="rect">
             <a:avLst/>
@@ -16060,18 +17164,24 @@
           <a:noFill/>
         </p:spPr>
         <p:txBody>
-          <a:bodyPr wrap="square" lIns="54864" rIns="54864">
-            <a:spAutoFit/>
+          <a:bodyPr wrap="square" lIns="27432" rIns="27432" tIns="18288" bIns="18288" anchor="ctr">
+            <a:noAutofit/>
           </a:bodyPr>
           <a:lstStyle/>
           <a:p>
-            <a:pPr>
+            <a:pPr algn="r">
+              <a:lnSpc>
+                <a:spcPct val="112000"/>
+              </a:lnSpc>
+              <a:spcBef>
+                <a:spcPts val="0"/>
+              </a:spcBef>
               <a:spcAft>
-                <a:spcPts val="800"/>
+                <a:spcPts val="0"/>
               </a:spcAft>
-              <a:defRPr sz="1800" b="0">
-                <a:solidFill>
-                  <a:srgbClr val="2563EB"/>
+              <a:defRPr sz="1600" b="0">
+                <a:solidFill>
+                  <a:srgbClr val="506780"/>
                 </a:solidFill>
                 <a:latin typeface="標楷體"/>
                 <a:ea typeface="標楷體"/>
@@ -16079,7 +17189,10 @@
               </a:defRPr>
             </a:pPr>
             <a:r>
-              <a:rPr>
+              <a:rPr sz="1600">
+                <a:solidFill>
+                  <a:srgbClr val="506780"/>
+                </a:solidFill>
                 <a:latin typeface="標楷體"/>
                 <a:ea typeface="標楷體"/>
                 <a:cs typeface="標楷體"/>
@@ -16097,8 +17210,8 @@
         </p:nvSpPr>
         <p:spPr>
           <a:xfrm>
-            <a:off x="822960" y="1874519"/>
-            <a:ext cx="16459200" cy="523220"/>
+            <a:off x="822960" y="1828800"/>
+            <a:ext cx="16459200" cy="640080"/>
           </a:xfrm>
           <a:prstGeom prst="rect">
             <a:avLst/>
@@ -16106,16 +17219,22 @@
           <a:noFill/>
         </p:spPr>
         <p:txBody>
-          <a:bodyPr wrap="square" lIns="54864" rIns="54864">
-            <a:spAutoFit/>
+          <a:bodyPr wrap="square" lIns="27432" rIns="27432" tIns="18288" bIns="18288" anchor="ctr">
+            <a:noAutofit/>
           </a:bodyPr>
           <a:lstStyle/>
           <a:p>
-            <a:pPr>
+            <a:pPr algn="l">
+              <a:lnSpc>
+                <a:spcPct val="112000"/>
+              </a:lnSpc>
+              <a:spcBef>
+                <a:spcPts val="0"/>
+              </a:spcBef>
               <a:spcAft>
-                <a:spcPts val="800"/>
+                <a:spcPts val="0"/>
               </a:spcAft>
-              <a:defRPr sz="2800" b="1">
+              <a:defRPr sz="3000" b="1">
                 <a:solidFill>
                   <a:srgbClr val="2563EB"/>
                 </a:solidFill>
@@ -16125,7 +17244,10 @@
               </a:defRPr>
             </a:pPr>
             <a:r>
-              <a:rPr>
+              <a:rPr sz="3000">
+                <a:solidFill>
+                  <a:srgbClr val="2563EB"/>
+                </a:solidFill>
                 <a:latin typeface="標楷體" panose="03000509000000000000" pitchFamily="65" charset="-120"/>
                 <a:ea typeface="標楷體" panose="03000509000000000000" pitchFamily="65" charset="-120"/>
                 <a:cs typeface="標楷體"/>
@@ -16150,8 +17272,8 @@
           </p:nvPr>
         </p:nvGraphicFramePr>
         <p:xfrm>
-          <a:off x="731520" y="3515869"/>
-          <a:ext cx="7863840" cy="2706624"/>
+          <a:off x="777240" y="3291840"/>
+          <a:ext cx="7863840" cy="2971800"/>
         </p:xfrm>
         <a:graphic>
           <a:graphicData uri="http://schemas.openxmlformats.org/drawingml/2006/table">
@@ -16175,14 +17297,25 @@
                   </a:extLst>
                 </a:gridCol>
               </a:tblGrid>
-              <a:tr h="731520">
+              <a:tr h="777240">
                 <a:tc>
                   <a:txBody>
-                    <a:bodyPr/>
+                    <a:bodyPr wrap="square" lIns="27432" rIns="27432" tIns="18288" bIns="18288" anchor="ctr">
+                      <a:noAutofit/>
+                    </a:bodyPr>
                     <a:lstStyle/>
                     <a:p>
                       <a:pPr>
-                        <a:defRPr sz="2400" b="1">
+                        <a:lnSpc>
+                          <a:spcPct val="112000"/>
+                        </a:lnSpc>
+                        <a:spcBef>
+                          <a:spcPts val="0"/>
+                        </a:spcBef>
+                        <a:spcAft>
+                          <a:spcPts val="0"/>
+                        </a:spcAft>
+                        <a:defRPr sz="2600" b="1">
                           <a:solidFill>
                             <a:srgbClr val="FFFFFF"/>
                           </a:solidFill>
@@ -16192,7 +17325,10 @@
                         </a:defRPr>
                       </a:pPr>
                       <a:r>
-                        <a:rPr dirty="0" err="1">
+                        <a:rPr dirty="0" err="1" sz="2600" b="1">
+                          <a:solidFill>
+                            <a:srgbClr val="FFFFFF"/>
+                          </a:solidFill>
                           <a:latin typeface="標楷體" panose="03000509000000000000" pitchFamily="65" charset="-120"/>
                           <a:ea typeface="標楷體" panose="03000509000000000000" pitchFamily="65" charset="-120"/>
                           <a:cs typeface="標楷體"/>
@@ -16214,11 +17350,22 @@
                 </a:tc>
                 <a:tc>
                   <a:txBody>
-                    <a:bodyPr/>
+                    <a:bodyPr wrap="square" lIns="27432" rIns="27432" tIns="18288" bIns="18288" anchor="ctr">
+                      <a:noAutofit/>
+                    </a:bodyPr>
                     <a:lstStyle/>
                     <a:p>
                       <a:pPr>
-                        <a:defRPr sz="2400" b="1">
+                        <a:lnSpc>
+                          <a:spcPct val="112000"/>
+                        </a:lnSpc>
+                        <a:spcBef>
+                          <a:spcPts val="0"/>
+                        </a:spcBef>
+                        <a:spcAft>
+                          <a:spcPts val="0"/>
+                        </a:spcAft>
+                        <a:defRPr sz="2600" b="1">
                           <a:solidFill>
                             <a:srgbClr val="FFFFFF"/>
                           </a:solidFill>
@@ -16228,7 +17375,10 @@
                         </a:defRPr>
                       </a:pPr>
                       <a:r>
-                        <a:rPr dirty="0" err="1">
+                        <a:rPr dirty="0" err="1" sz="2600" b="1">
+                          <a:solidFill>
+                            <a:srgbClr val="FFFFFF"/>
+                          </a:solidFill>
                           <a:latin typeface="標楷體" panose="03000509000000000000" pitchFamily="65" charset="-120"/>
                           <a:ea typeface="標楷體" panose="03000509000000000000" pitchFamily="65" charset="-120"/>
                           <a:cs typeface="標楷體"/>
@@ -16254,16 +17404,27 @@
                   </a:ext>
                 </a:extLst>
               </a:tr>
-              <a:tr h="987552">
+              <a:tr h="1097280">
                 <a:tc>
                   <a:txBody>
-                    <a:bodyPr/>
+                    <a:bodyPr wrap="square" lIns="27432" rIns="27432" tIns="18288" bIns="18288" anchor="ctr">
+                      <a:noAutofit/>
+                    </a:bodyPr>
                     <a:lstStyle/>
                     <a:p>
                       <a:pPr>
-                        <a:defRPr sz="2400" b="0">
+                        <a:lnSpc>
+                          <a:spcPct val="112000"/>
+                        </a:lnSpc>
+                        <a:spcBef>
+                          <a:spcPts val="0"/>
+                        </a:spcBef>
+                        <a:spcAft>
+                          <a:spcPts val="0"/>
+                        </a:spcAft>
+                        <a:defRPr sz="2600" b="0">
                           <a:solidFill>
-                            <a:srgbClr val="163048"/>
+                            <a:srgbClr val="000000"/>
                           </a:solidFill>
                           <a:latin typeface="標楷體"/>
                           <a:ea typeface="標楷體"/>
@@ -16271,9 +17432,9 @@
                         </a:defRPr>
                       </a:pPr>
                       <a:r>
-                        <a:rPr dirty="0" err="1">
+                        <a:rPr dirty="0" err="1" sz="2600" b="0">
                           <a:solidFill>
-                            <a:schemeClr val="tx1"/>
+                            <a:srgbClr val="000000"/>
                           </a:solidFill>
                           <a:latin typeface="標楷體" panose="03000509000000000000" pitchFamily="65" charset="-120"/>
                           <a:ea typeface="標楷體" panose="03000509000000000000" pitchFamily="65" charset="-120"/>
@@ -16282,9 +17443,9 @@
                         <a:t>傳統</a:t>
                       </a:r>
                       <a:r>
-                        <a:rPr dirty="0">
+                        <a:rPr dirty="0" sz="2600" b="0">
                           <a:solidFill>
-                            <a:schemeClr val="tx1"/>
+                            <a:srgbClr val="000000"/>
                           </a:solidFill>
                           <a:latin typeface="標楷體" panose="03000509000000000000" pitchFamily="65" charset="-120"/>
                           <a:ea typeface="標楷體" panose="03000509000000000000" pitchFamily="65" charset="-120"/>
@@ -16293,9 +17454,9 @@
                         <a:t> 3D </a:t>
                       </a:r>
                       <a:r>
-                        <a:rPr dirty="0" err="1">
+                        <a:rPr dirty="0" err="1" sz="2600" b="0">
                           <a:solidFill>
-                            <a:schemeClr val="tx1"/>
+                            <a:srgbClr val="000000"/>
                           </a:solidFill>
                           <a:latin typeface="標楷體" panose="03000509000000000000" pitchFamily="65" charset="-120"/>
                           <a:ea typeface="標楷體" panose="03000509000000000000" pitchFamily="65" charset="-120"/>
@@ -16321,13 +17482,24 @@
                 </a:tc>
                 <a:tc>
                   <a:txBody>
-                    <a:bodyPr/>
+                    <a:bodyPr wrap="square" lIns="27432" rIns="27432" tIns="18288" bIns="18288" anchor="ctr">
+                      <a:noAutofit/>
+                    </a:bodyPr>
                     <a:lstStyle/>
                     <a:p>
                       <a:pPr>
-                        <a:defRPr sz="2400" b="0">
+                        <a:lnSpc>
+                          <a:spcPct val="112000"/>
+                        </a:lnSpc>
+                        <a:spcBef>
+                          <a:spcPts val="0"/>
+                        </a:spcBef>
+                        <a:spcAft>
+                          <a:spcPts val="0"/>
+                        </a:spcAft>
+                        <a:defRPr sz="2600" b="0">
                           <a:solidFill>
-                            <a:srgbClr val="163048"/>
+                            <a:srgbClr val="000000"/>
                           </a:solidFill>
                           <a:latin typeface="標楷體"/>
                           <a:ea typeface="標楷體"/>
@@ -16335,9 +17507,9 @@
                         </a:defRPr>
                       </a:pPr>
                       <a:r>
-                        <a:rPr dirty="0" err="1">
+                        <a:rPr dirty="0" err="1" sz="2600" b="0">
                           <a:solidFill>
-                            <a:schemeClr val="tx1"/>
+                            <a:srgbClr val="000000"/>
                           </a:solidFill>
                           <a:latin typeface="標楷體" panose="03000509000000000000" pitchFamily="65" charset="-120"/>
                           <a:ea typeface="標楷體" panose="03000509000000000000" pitchFamily="65" charset="-120"/>
@@ -16367,16 +17539,27 @@
                   </a:ext>
                 </a:extLst>
               </a:tr>
-              <a:tr h="987552">
+              <a:tr h="1097280">
                 <a:tc>
                   <a:txBody>
-                    <a:bodyPr/>
+                    <a:bodyPr wrap="square" lIns="27432" rIns="27432" tIns="18288" bIns="18288" anchor="ctr">
+                      <a:noAutofit/>
+                    </a:bodyPr>
                     <a:lstStyle/>
                     <a:p>
                       <a:pPr>
-                        <a:defRPr sz="2400" b="0">
+                        <a:lnSpc>
+                          <a:spcPct val="112000"/>
+                        </a:lnSpc>
+                        <a:spcBef>
+                          <a:spcPts val="0"/>
+                        </a:spcBef>
+                        <a:spcAft>
+                          <a:spcPts val="0"/>
+                        </a:spcAft>
+                        <a:defRPr sz="2600" b="0">
                           <a:solidFill>
-                            <a:srgbClr val="163048"/>
+                            <a:srgbClr val="000000"/>
                           </a:solidFill>
                           <a:latin typeface="標楷體"/>
                           <a:ea typeface="標楷體"/>
@@ -16384,9 +17567,9 @@
                         </a:defRPr>
                       </a:pPr>
                       <a:r>
-                        <a:rPr dirty="0">
+                        <a:rPr dirty="0" sz="2600" b="0">
                           <a:solidFill>
-                            <a:schemeClr val="tx1"/>
+                            <a:srgbClr val="000000"/>
                           </a:solidFill>
                           <a:latin typeface="標楷體" panose="03000509000000000000" pitchFamily="65" charset="-120"/>
                           <a:ea typeface="標楷體" panose="03000509000000000000" pitchFamily="65" charset="-120"/>
@@ -16395,9 +17578,9 @@
                         <a:t>3DGS </a:t>
                       </a:r>
                       <a:r>
-                        <a:rPr dirty="0" err="1">
+                        <a:rPr dirty="0" err="1" sz="2600" b="0">
                           <a:solidFill>
-                            <a:schemeClr val="tx1"/>
+                            <a:srgbClr val="000000"/>
                           </a:solidFill>
                           <a:latin typeface="標楷體" panose="03000509000000000000" pitchFamily="65" charset="-120"/>
                           <a:ea typeface="標楷體" panose="03000509000000000000" pitchFamily="65" charset="-120"/>
@@ -16423,13 +17606,24 @@
                 </a:tc>
                 <a:tc>
                   <a:txBody>
-                    <a:bodyPr/>
+                    <a:bodyPr wrap="square" lIns="27432" rIns="27432" tIns="18288" bIns="18288" anchor="ctr">
+                      <a:noAutofit/>
+                    </a:bodyPr>
                     <a:lstStyle/>
                     <a:p>
                       <a:pPr>
-                        <a:defRPr sz="2400" b="0">
+                        <a:lnSpc>
+                          <a:spcPct val="112000"/>
+                        </a:lnSpc>
+                        <a:spcBef>
+                          <a:spcPts val="0"/>
+                        </a:spcBef>
+                        <a:spcAft>
+                          <a:spcPts val="0"/>
+                        </a:spcAft>
+                        <a:defRPr sz="2600" b="0">
                           <a:solidFill>
-                            <a:srgbClr val="163048"/>
+                            <a:srgbClr val="000000"/>
                           </a:solidFill>
                           <a:latin typeface="標楷體"/>
                           <a:ea typeface="標楷體"/>
@@ -16437,9 +17631,9 @@
                         </a:defRPr>
                       </a:pPr>
                       <a:r>
-                        <a:rPr dirty="0" err="1">
+                        <a:rPr dirty="0" err="1" sz="2600" b="0">
                           <a:solidFill>
-                            <a:schemeClr val="tx1"/>
+                            <a:srgbClr val="000000"/>
                           </a:solidFill>
                           <a:latin typeface="標楷體" panose="03000509000000000000" pitchFamily="65" charset="-120"/>
                           <a:ea typeface="標楷體" panose="03000509000000000000" pitchFamily="65" charset="-120"/>
@@ -16482,7 +17676,7 @@
         <p:spPr>
           <a:xfrm>
             <a:off x="9418320" y="6903720"/>
-            <a:ext cx="8046720" cy="430887"/>
+            <a:ext cx="8046720" cy="548640"/>
           </a:xfrm>
           <a:prstGeom prst="rect">
             <a:avLst/>
@@ -16490,18 +17684,24 @@
           <a:noFill/>
         </p:spPr>
         <p:txBody>
-          <a:bodyPr wrap="square" lIns="54864" rIns="54864">
-            <a:spAutoFit/>
+          <a:bodyPr wrap="square" lIns="27432" rIns="27432" tIns="18288" bIns="18288" anchor="ctr">
+            <a:noAutofit/>
           </a:bodyPr>
           <a:lstStyle/>
           <a:p>
-            <a:pPr>
+            <a:pPr algn="l">
+              <a:lnSpc>
+                <a:spcPct val="112000"/>
+              </a:lnSpc>
+              <a:spcBef>
+                <a:spcPts val="0"/>
+              </a:spcBef>
               <a:spcAft>
-                <a:spcPts val="800"/>
+                <a:spcPts val="0"/>
               </a:spcAft>
-              <a:defRPr sz="2200" b="1">
-                <a:solidFill>
-                  <a:srgbClr val="2563EB"/>
+              <a:defRPr sz="2400" b="1">
+                <a:solidFill>
+                  <a:srgbClr val="000000"/>
                 </a:solidFill>
                 <a:latin typeface="標楷體"/>
                 <a:ea typeface="標楷體"/>
@@ -16509,7 +17709,10 @@
               </a:defRPr>
             </a:pPr>
             <a:r>
-              <a:rPr dirty="0">
+              <a:rPr dirty="0" sz="2400">
+                <a:solidFill>
+                  <a:srgbClr val="000000"/>
+                </a:solidFill>
                 <a:latin typeface="標楷體" panose="03000509000000000000" pitchFamily="65" charset="-120"/>
                 <a:ea typeface="標楷體" panose="03000509000000000000" pitchFamily="65" charset="-120"/>
                 <a:cs typeface="標楷體"/>
@@ -16517,7 +17720,10 @@
               <a:t>3D </a:t>
             </a:r>
             <a:r>
-              <a:rPr dirty="0" err="1">
+              <a:rPr dirty="0" err="1" sz="2400">
+                <a:solidFill>
+                  <a:srgbClr val="000000"/>
+                </a:solidFill>
                 <a:latin typeface="標楷體" panose="03000509000000000000" pitchFamily="65" charset="-120"/>
                 <a:ea typeface="標楷體" panose="03000509000000000000" pitchFamily="65" charset="-120"/>
                 <a:cs typeface="標楷體"/>
@@ -16719,31 +17925,40 @@
         </p:nvSpPr>
         <p:spPr>
           <a:xfrm>
-            <a:off x="16710660" y="9646158"/>
-            <a:ext cx="480060" cy="320802"/>
+            <a:off x="16779240" y="9646920"/>
+            <a:ext cx="502920" cy="320040"/>
           </a:xfrm>
           <a:prstGeom prst="rect">
             <a:avLst/>
           </a:prstGeom>
         </p:spPr>
         <p:txBody>
-          <a:bodyPr lIns="0" tIns="0" rIns="0" bIns="0" rtlCol="0" anchor="t">
-            <a:spAutoFit/>
+          <a:bodyPr lIns="27432" tIns="18288" rIns="27432" bIns="18288" rtlCol="0" anchor="ctr" wrap="square">
+            <a:noAutofit/>
           </a:bodyPr>
           <a:lstStyle/>
           <a:p>
-            <a:pPr algn="l">
+            <a:pPr algn="r">
               <a:lnSpc>
-                <a:spcPts val="1980"/>
+                <a:spcPct val="112000"/>
               </a:lnSpc>
-              <a:defRPr>
+              <a:spcBef>
+                <a:spcPts val="0"/>
+              </a:spcBef>
+              <a:spcAft>
+                <a:spcPts val="0"/>
+              </a:spcAft>
+              <a:defRPr sz="1600">
+                <a:solidFill>
+                  <a:srgbClr val="506780"/>
+                </a:solidFill>
                 <a:latin typeface="標楷體"/>
                 <a:ea typeface="標楷體"/>
                 <a:cs typeface="標楷體"/>
               </a:defRPr>
             </a:pPr>
             <a:r>
-              <a:rPr lang="en-US" sz="1650" spc="2">
+              <a:rPr lang="en-US" sz="1600" spc="2">
                 <a:solidFill>
                   <a:srgbClr val="506780"/>
                 </a:solidFill>
@@ -16765,8 +17980,8 @@
         </p:nvGrpSpPr>
         <p:grpSpPr>
           <a:xfrm>
-            <a:off x="9144000" y="3051793"/>
-            <a:ext cx="3977640" cy="3660067"/>
+            <a:off x="9555480" y="2926080"/>
+            <a:ext cx="3840480" cy="3749039"/>
             <a:chOff x="0" y="0"/>
             <a:chExt cx="5303520" cy="4880089"/>
           </a:xfrm>
@@ -16858,31 +18073,40 @@
         </p:nvSpPr>
         <p:spPr>
           <a:xfrm>
-            <a:off x="9491092" y="3419498"/>
-            <a:ext cx="822960" cy="352469"/>
+            <a:off x="9738359" y="3200400"/>
+            <a:ext cx="502920" cy="457200"/>
           </a:xfrm>
           <a:prstGeom prst="rect">
             <a:avLst/>
           </a:prstGeom>
         </p:spPr>
         <p:txBody>
-          <a:bodyPr lIns="0" tIns="0" rIns="0" bIns="0" rtlCol="0" anchor="t">
-            <a:spAutoFit/>
+          <a:bodyPr lIns="27432" tIns="18288" rIns="27432" bIns="18288" rtlCol="0" anchor="ctr" wrap="square">
+            <a:noAutofit/>
           </a:bodyPr>
           <a:lstStyle/>
           <a:p>
             <a:pPr algn="l">
               <a:lnSpc>
-                <a:spcPts val="2879"/>
+                <a:spcPct val="112000"/>
               </a:lnSpc>
-              <a:defRPr>
+              <a:spcBef>
+                <a:spcPts val="0"/>
+              </a:spcBef>
+              <a:spcAft>
+                <a:spcPts val="0"/>
+              </a:spcAft>
+              <a:defRPr sz="2200">
+                <a:solidFill>
+                  <a:srgbClr val="2563EB"/>
+                </a:solidFill>
                 <a:latin typeface="標楷體"/>
                 <a:ea typeface="標楷體"/>
                 <a:cs typeface="標楷體"/>
               </a:defRPr>
             </a:pPr>
             <a:r>
-              <a:rPr lang="en-US" sz="2400" b="1" spc="3" dirty="0">
+              <a:rPr lang="en-US" sz="2200" b="1" spc="3" dirty="0">
                 <a:solidFill>
                   <a:srgbClr val="2563EB"/>
                 </a:solidFill>
@@ -16904,8 +18128,8 @@
         </p:nvGrpSpPr>
         <p:grpSpPr>
           <a:xfrm>
-            <a:off x="14031468" y="3127248"/>
-            <a:ext cx="3977640" cy="3584611"/>
+            <a:off x="13944600" y="2926080"/>
+            <a:ext cx="3840480" cy="3749039"/>
             <a:chOff x="0" y="0"/>
             <a:chExt cx="5303520" cy="4779482"/>
           </a:xfrm>
@@ -16997,31 +18221,40 @@
         </p:nvSpPr>
         <p:spPr>
           <a:xfrm>
-            <a:off x="14310360" y="3318891"/>
-            <a:ext cx="822960" cy="352469"/>
+            <a:off x="14127480" y="3200400"/>
+            <a:ext cx="502920" cy="457200"/>
           </a:xfrm>
           <a:prstGeom prst="rect">
             <a:avLst/>
           </a:prstGeom>
         </p:spPr>
         <p:txBody>
-          <a:bodyPr lIns="0" tIns="0" rIns="0" bIns="0" rtlCol="0" anchor="t">
-            <a:spAutoFit/>
+          <a:bodyPr lIns="27432" tIns="18288" rIns="27432" bIns="18288" rtlCol="0" anchor="ctr" wrap="square">
+            <a:noAutofit/>
           </a:bodyPr>
           <a:lstStyle/>
           <a:p>
             <a:pPr algn="l">
               <a:lnSpc>
-                <a:spcPts val="2879"/>
+                <a:spcPct val="112000"/>
               </a:lnSpc>
-              <a:defRPr>
+              <a:spcBef>
+                <a:spcPts val="0"/>
+              </a:spcBef>
+              <a:spcAft>
+                <a:spcPts val="0"/>
+              </a:spcAft>
+              <a:defRPr sz="2200">
+                <a:solidFill>
+                  <a:srgbClr val="2563EB"/>
+                </a:solidFill>
                 <a:latin typeface="標楷體"/>
                 <a:ea typeface="標楷體"/>
                 <a:cs typeface="標楷體"/>
               </a:defRPr>
             </a:pPr>
             <a:r>
-              <a:rPr lang="en-US" sz="2400" b="1" spc="3" dirty="0">
+              <a:rPr lang="en-US" sz="2200" b="1" spc="3" dirty="0">
                 <a:solidFill>
                   <a:srgbClr val="2563EB"/>
                 </a:solidFill>
@@ -17043,31 +18276,40 @@
         </p:nvSpPr>
         <p:spPr>
           <a:xfrm>
-            <a:off x="628650" y="933450"/>
-            <a:ext cx="16322040" cy="692497"/>
+            <a:off x="777240" y="640080"/>
+            <a:ext cx="16733520" cy="822960"/>
           </a:xfrm>
           <a:prstGeom prst="rect">
             <a:avLst/>
           </a:prstGeom>
         </p:spPr>
         <p:txBody>
-          <a:bodyPr lIns="0" tIns="0" rIns="0" bIns="0" rtlCol="0" anchor="t">
-            <a:spAutoFit/>
+          <a:bodyPr lIns="27432" tIns="18288" rIns="27432" bIns="18288" rtlCol="0" anchor="ctr" wrap="square">
+            <a:noAutofit/>
           </a:bodyPr>
           <a:lstStyle/>
           <a:p>
             <a:pPr algn="l">
               <a:lnSpc>
-                <a:spcPts val="5400"/>
+                <a:spcPct val="112000"/>
               </a:lnSpc>
-              <a:defRPr>
+              <a:spcBef>
+                <a:spcPts val="0"/>
+              </a:spcBef>
+              <a:spcAft>
+                <a:spcPts val="0"/>
+              </a:spcAft>
+              <a:defRPr sz="4400">
+                <a:solidFill>
+                  <a:srgbClr val="163048"/>
+                </a:solidFill>
                 <a:latin typeface="標楷體"/>
                 <a:ea typeface="標楷體"/>
                 <a:cs typeface="標楷體"/>
               </a:defRPr>
             </a:pPr>
             <a:r>
-              <a:rPr lang="en-US" sz="4500" b="1" dirty="0">
+              <a:rPr lang="en-US" sz="4400" b="1" dirty="0">
                 <a:solidFill>
                   <a:srgbClr val="163048"/>
                 </a:solidFill>
@@ -17089,8 +18331,8 @@
         </p:nvGrpSpPr>
         <p:grpSpPr>
           <a:xfrm>
-            <a:off x="575967" y="3051793"/>
-            <a:ext cx="3977640" cy="3660067"/>
+            <a:off x="777240" y="2926080"/>
+            <a:ext cx="3840480" cy="3749039"/>
             <a:chOff x="0" y="0"/>
             <a:chExt cx="5303520" cy="4880089"/>
           </a:xfrm>
@@ -17182,31 +18424,40 @@
         </p:nvSpPr>
         <p:spPr>
           <a:xfrm>
-            <a:off x="891540" y="3318891"/>
-            <a:ext cx="822960" cy="352469"/>
+            <a:off x="960120" y="3200400"/>
+            <a:ext cx="502920" cy="457200"/>
           </a:xfrm>
           <a:prstGeom prst="rect">
             <a:avLst/>
           </a:prstGeom>
         </p:spPr>
         <p:txBody>
-          <a:bodyPr lIns="0" tIns="0" rIns="0" bIns="0" rtlCol="0" anchor="t">
-            <a:spAutoFit/>
+          <a:bodyPr lIns="27432" tIns="18288" rIns="27432" bIns="18288" rtlCol="0" anchor="ctr" wrap="square">
+            <a:noAutofit/>
           </a:bodyPr>
           <a:lstStyle/>
           <a:p>
             <a:pPr algn="l">
               <a:lnSpc>
-                <a:spcPts val="2879"/>
+                <a:spcPct val="112000"/>
               </a:lnSpc>
-              <a:defRPr>
+              <a:spcBef>
+                <a:spcPts val="0"/>
+              </a:spcBef>
+              <a:spcAft>
+                <a:spcPts val="0"/>
+              </a:spcAft>
+              <a:defRPr sz="2200">
+                <a:solidFill>
+                  <a:srgbClr val="2563EB"/>
+                </a:solidFill>
                 <a:latin typeface="標楷體"/>
                 <a:ea typeface="標楷體"/>
                 <a:cs typeface="標楷體"/>
               </a:defRPr>
             </a:pPr>
             <a:r>
-              <a:rPr lang="en-US" sz="2400" b="1" spc="3" dirty="0">
+              <a:rPr lang="en-US" sz="2200" b="1" spc="3" dirty="0">
                 <a:solidFill>
                   <a:srgbClr val="2563EB"/>
                 </a:solidFill>
@@ -17228,34 +18479,40 @@
         </p:nvSpPr>
         <p:spPr>
           <a:xfrm>
-            <a:off x="772486" y="4285360"/>
-            <a:ext cx="3563469" cy="949362"/>
+            <a:off x="1005840" y="4297680"/>
+            <a:ext cx="3383280" cy="1508760"/>
           </a:xfrm>
           <a:prstGeom prst="rect">
             <a:avLst/>
           </a:prstGeom>
         </p:spPr>
         <p:txBody>
-          <a:bodyPr lIns="0" tIns="0" rIns="0" bIns="0" rtlCol="0" anchor="t">
-            <a:spAutoFit/>
+          <a:bodyPr lIns="27432" tIns="18288" rIns="27432" bIns="18288" rtlCol="0" anchor="ctr" wrap="square">
+            <a:noAutofit/>
           </a:bodyPr>
           <a:lstStyle/>
           <a:p>
             <a:pPr algn="l">
               <a:lnSpc>
-                <a:spcPts val="3779"/>
+                <a:spcPct val="112000"/>
               </a:lnSpc>
               <a:spcBef>
-                <a:spcPct val="0"/>
+                <a:spcPts val="0"/>
               </a:spcBef>
-              <a:defRPr>
+              <a:spcAft>
+                <a:spcPts val="0"/>
+              </a:spcAft>
+              <a:defRPr sz="2600">
+                <a:solidFill>
+                  <a:srgbClr val="000000"/>
+                </a:solidFill>
                 <a:latin typeface="標楷體"/>
                 <a:ea typeface="標楷體"/>
                 <a:cs typeface="標楷體"/>
               </a:defRPr>
             </a:pPr>
             <a:r>
-              <a:rPr lang="en-US" altLang="zh-TW" sz="2400" dirty="0">
+              <a:rPr lang="en-US" altLang="zh-TW" sz="2600" dirty="0">
                 <a:solidFill>
                   <a:srgbClr val="000000"/>
                 </a:solidFill>
@@ -17267,7 +18524,7 @@
               <a:t>AI</a:t>
             </a:r>
             <a:r>
-              <a:rPr lang="zh-TW" altLang="en-US" sz="2400" dirty="0">
+              <a:rPr lang="zh-TW" altLang="en-US" sz="2600" dirty="0">
                 <a:solidFill>
                   <a:srgbClr val="000000"/>
                 </a:solidFill>
@@ -17298,8 +18555,8 @@
         </p:nvGrpSpPr>
         <p:grpSpPr>
           <a:xfrm>
-            <a:off x="4751158" y="3051793"/>
-            <a:ext cx="3977640" cy="3660067"/>
+            <a:off x="5166360" y="2926080"/>
+            <a:ext cx="3840480" cy="3749039"/>
             <a:chOff x="0" y="0"/>
             <a:chExt cx="5303520" cy="4880089"/>
           </a:xfrm>
@@ -17391,31 +18648,40 @@
         </p:nvSpPr>
         <p:spPr>
           <a:xfrm>
-            <a:off x="5017770" y="3413379"/>
-            <a:ext cx="822960" cy="352469"/>
+            <a:off x="5349240" y="3200400"/>
+            <a:ext cx="502920" cy="457200"/>
           </a:xfrm>
           <a:prstGeom prst="rect">
             <a:avLst/>
           </a:prstGeom>
         </p:spPr>
         <p:txBody>
-          <a:bodyPr lIns="0" tIns="0" rIns="0" bIns="0" rtlCol="0" anchor="t">
-            <a:spAutoFit/>
+          <a:bodyPr lIns="27432" tIns="18288" rIns="27432" bIns="18288" rtlCol="0" anchor="ctr" wrap="square">
+            <a:noAutofit/>
           </a:bodyPr>
           <a:lstStyle/>
           <a:p>
             <a:pPr algn="l">
               <a:lnSpc>
-                <a:spcPts val="2879"/>
+                <a:spcPct val="112000"/>
               </a:lnSpc>
-              <a:defRPr>
+              <a:spcBef>
+                <a:spcPts val="0"/>
+              </a:spcBef>
+              <a:spcAft>
+                <a:spcPts val="0"/>
+              </a:spcAft>
+              <a:defRPr sz="2200">
+                <a:solidFill>
+                  <a:srgbClr val="2563EB"/>
+                </a:solidFill>
                 <a:latin typeface="標楷體"/>
                 <a:ea typeface="標楷體"/>
                 <a:cs typeface="標楷體"/>
               </a:defRPr>
             </a:pPr>
             <a:r>
-              <a:rPr lang="en-US" sz="2400" b="1" spc="3" dirty="0">
+              <a:rPr lang="en-US" sz="2200" b="1" spc="3" dirty="0">
                 <a:solidFill>
                   <a:srgbClr val="2563EB"/>
                 </a:solidFill>
@@ -17437,34 +18703,40 @@
         </p:nvSpPr>
         <p:spPr>
           <a:xfrm>
-            <a:off x="4958243" y="4285360"/>
-            <a:ext cx="3563469" cy="949362"/>
+            <a:off x="5394960" y="4297680"/>
+            <a:ext cx="3383280" cy="1508760"/>
           </a:xfrm>
           <a:prstGeom prst="rect">
             <a:avLst/>
           </a:prstGeom>
         </p:spPr>
         <p:txBody>
-          <a:bodyPr lIns="0" tIns="0" rIns="0" bIns="0" rtlCol="0" anchor="t">
-            <a:spAutoFit/>
+          <a:bodyPr lIns="27432" tIns="18288" rIns="27432" bIns="18288" rtlCol="0" anchor="ctr" wrap="square">
+            <a:noAutofit/>
           </a:bodyPr>
           <a:lstStyle/>
           <a:p>
             <a:pPr algn="l">
               <a:lnSpc>
-                <a:spcPts val="3779"/>
+                <a:spcPct val="112000"/>
               </a:lnSpc>
               <a:spcBef>
-                <a:spcPct val="0"/>
+                <a:spcPts val="0"/>
               </a:spcBef>
-              <a:defRPr>
+              <a:spcAft>
+                <a:spcPts val="0"/>
+              </a:spcAft>
+              <a:defRPr sz="2600">
+                <a:solidFill>
+                  <a:srgbClr val="000000"/>
+                </a:solidFill>
                 <a:latin typeface="標楷體"/>
                 <a:ea typeface="標楷體"/>
                 <a:cs typeface="標楷體"/>
               </a:defRPr>
             </a:pPr>
             <a:r>
-              <a:rPr lang="zh-TW" altLang="en-US" sz="2400" dirty="0">
+              <a:rPr lang="zh-TW" altLang="en-US" sz="2600" dirty="0">
                 <a:solidFill>
                   <a:srgbClr val="000000"/>
                 </a:solidFill>
@@ -17495,34 +18767,40 @@
         </p:nvSpPr>
         <p:spPr>
           <a:xfrm>
-            <a:off x="9351085" y="4097944"/>
-            <a:ext cx="3563469" cy="949362"/>
+            <a:off x="9784080" y="4297680"/>
+            <a:ext cx="3383280" cy="1508760"/>
           </a:xfrm>
           <a:prstGeom prst="rect">
             <a:avLst/>
           </a:prstGeom>
         </p:spPr>
         <p:txBody>
-          <a:bodyPr lIns="0" tIns="0" rIns="0" bIns="0" rtlCol="0" anchor="t">
-            <a:spAutoFit/>
+          <a:bodyPr lIns="27432" tIns="18288" rIns="27432" bIns="18288" rtlCol="0" anchor="ctr" wrap="square">
+            <a:noAutofit/>
           </a:bodyPr>
           <a:lstStyle/>
           <a:p>
             <a:pPr algn="l">
               <a:lnSpc>
-                <a:spcPts val="3779"/>
+                <a:spcPct val="112000"/>
               </a:lnSpc>
               <a:spcBef>
-                <a:spcPct val="0"/>
+                <a:spcPts val="0"/>
               </a:spcBef>
-              <a:defRPr>
+              <a:spcAft>
+                <a:spcPts val="0"/>
+              </a:spcAft>
+              <a:defRPr sz="2600">
+                <a:solidFill>
+                  <a:srgbClr val="000000"/>
+                </a:solidFill>
                 <a:latin typeface="標楷體"/>
                 <a:ea typeface="標楷體"/>
                 <a:cs typeface="標楷體"/>
               </a:defRPr>
             </a:pPr>
             <a:r>
-              <a:rPr lang="zh-TW" altLang="en-US" sz="2400" dirty="0">
+              <a:rPr lang="zh-TW" altLang="en-US" sz="2600" dirty="0">
                 <a:solidFill>
                   <a:srgbClr val="000000"/>
                 </a:solidFill>
@@ -17553,34 +18831,40 @@
         </p:nvSpPr>
         <p:spPr>
           <a:xfrm>
-            <a:off x="14287169" y="3980244"/>
-            <a:ext cx="3563469" cy="439031"/>
+            <a:off x="14173200" y="4297680"/>
+            <a:ext cx="3383280" cy="1508760"/>
           </a:xfrm>
           <a:prstGeom prst="rect">
             <a:avLst/>
           </a:prstGeom>
         </p:spPr>
         <p:txBody>
-          <a:bodyPr lIns="0" tIns="0" rIns="0" bIns="0" rtlCol="0" anchor="t">
-            <a:spAutoFit/>
+          <a:bodyPr lIns="27432" tIns="18288" rIns="27432" bIns="18288" rtlCol="0" anchor="ctr" wrap="square">
+            <a:noAutofit/>
           </a:bodyPr>
           <a:lstStyle/>
           <a:p>
             <a:pPr algn="l">
               <a:lnSpc>
-                <a:spcPts val="3779"/>
+                <a:spcPct val="112000"/>
               </a:lnSpc>
               <a:spcBef>
-                <a:spcPct val="0"/>
+                <a:spcPts val="0"/>
               </a:spcBef>
-              <a:defRPr>
+              <a:spcAft>
+                <a:spcPts val="0"/>
+              </a:spcAft>
+              <a:defRPr sz="2600">
+                <a:solidFill>
+                  <a:srgbClr val="000000"/>
+                </a:solidFill>
                 <a:latin typeface="標楷體"/>
                 <a:ea typeface="標楷體"/>
                 <a:cs typeface="標楷體"/>
               </a:defRPr>
             </a:pPr>
             <a:r>
-              <a:rPr lang="zh-TW" altLang="en-US" sz="2400" dirty="0">
+              <a:rPr lang="zh-TW" altLang="en-US" sz="2600" dirty="0">
                 <a:solidFill>
                   <a:srgbClr val="000000"/>
                 </a:solidFill>
@@ -17617,33 +18901,42 @@
         </p:nvSpPr>
         <p:spPr>
           <a:xfrm>
-            <a:off x="1424178" y="3264100"/>
-            <a:ext cx="3456432" cy="462050"/>
+            <a:off x="1554480" y="3127248"/>
+            <a:ext cx="2834640" cy="640080"/>
           </a:xfrm>
           <a:prstGeom prst="rect">
             <a:avLst/>
           </a:prstGeom>
         </p:spPr>
         <p:txBody>
-          <a:bodyPr lIns="0" tIns="0" rIns="0" bIns="0" rtlCol="0" anchor="t">
-            <a:spAutoFit/>
+          <a:bodyPr lIns="27432" tIns="18288" rIns="27432" bIns="18288" rtlCol="0" anchor="ctr" wrap="square">
+            <a:noAutofit/>
           </a:bodyPr>
           <a:lstStyle/>
           <a:p>
             <a:pPr algn="l">
               <a:lnSpc>
-                <a:spcPts val="3779"/>
+                <a:spcPct val="112000"/>
               </a:lnSpc>
-              <a:defRPr>
+              <a:spcBef>
+                <a:spcPts val="0"/>
+              </a:spcBef>
+              <a:spcAft>
+                <a:spcPts val="0"/>
+              </a:spcAft>
+              <a:defRPr sz="3000">
+                <a:solidFill>
+                  <a:srgbClr val="2563EB"/>
+                </a:solidFill>
                 <a:latin typeface="標楷體"/>
                 <a:ea typeface="標楷體"/>
                 <a:cs typeface="標楷體"/>
               </a:defRPr>
             </a:pPr>
             <a:r>
-              <a:rPr lang="zh-TW" altLang="en-US" sz="3150" b="1" dirty="0">
-                <a:solidFill>
-                  <a:schemeClr val="accent1"/>
+              <a:rPr lang="zh-TW" altLang="en-US" sz="3000" b="1" dirty="0">
+                <a:solidFill>
+                  <a:srgbClr val="2563EB"/>
                 </a:solidFill>
                 <a:latin typeface="標楷體" panose="03000509000000000000" pitchFamily="65" charset="-120"/>
                 <a:ea typeface="標楷體" panose="03000509000000000000" pitchFamily="65" charset="-120"/>
@@ -17678,33 +18971,42 @@
         </p:nvSpPr>
         <p:spPr>
           <a:xfrm>
-            <a:off x="5576912" y="3341412"/>
-            <a:ext cx="3456432" cy="462050"/>
+            <a:off x="5943600" y="3127248"/>
+            <a:ext cx="2834640" cy="640080"/>
           </a:xfrm>
           <a:prstGeom prst="rect">
             <a:avLst/>
           </a:prstGeom>
         </p:spPr>
         <p:txBody>
-          <a:bodyPr lIns="0" tIns="0" rIns="0" bIns="0" rtlCol="0" anchor="t">
-            <a:spAutoFit/>
+          <a:bodyPr lIns="27432" tIns="18288" rIns="27432" bIns="18288" rtlCol="0" anchor="ctr" wrap="square">
+            <a:noAutofit/>
           </a:bodyPr>
           <a:lstStyle/>
           <a:p>
             <a:pPr algn="l">
               <a:lnSpc>
-                <a:spcPts val="3779"/>
+                <a:spcPct val="112000"/>
               </a:lnSpc>
-              <a:defRPr>
+              <a:spcBef>
+                <a:spcPts val="0"/>
+              </a:spcBef>
+              <a:spcAft>
+                <a:spcPts val="0"/>
+              </a:spcAft>
+              <a:defRPr sz="3000">
+                <a:solidFill>
+                  <a:srgbClr val="2563EB"/>
+                </a:solidFill>
                 <a:latin typeface="標楷體"/>
                 <a:ea typeface="標楷體"/>
                 <a:cs typeface="標楷體"/>
               </a:defRPr>
             </a:pPr>
             <a:r>
-              <a:rPr lang="zh-TW" altLang="en-US" sz="3150" b="1" dirty="0">
-                <a:solidFill>
-                  <a:schemeClr val="accent1"/>
+              <a:rPr lang="zh-TW" altLang="en-US" sz="3000" b="1" dirty="0">
+                <a:solidFill>
+                  <a:srgbClr val="2563EB"/>
                 </a:solidFill>
                 <a:latin typeface="標楷體" panose="03000509000000000000" pitchFamily="65" charset="-120"/>
                 <a:ea typeface="標楷體" panose="03000509000000000000" pitchFamily="65" charset="-120"/>
@@ -17739,33 +19041,42 @@
         </p:nvSpPr>
         <p:spPr>
           <a:xfrm>
-            <a:off x="14982444" y="3306756"/>
-            <a:ext cx="3456432" cy="462050"/>
+            <a:off x="14721840" y="3127248"/>
+            <a:ext cx="2834640" cy="640080"/>
           </a:xfrm>
           <a:prstGeom prst="rect">
             <a:avLst/>
           </a:prstGeom>
         </p:spPr>
         <p:txBody>
-          <a:bodyPr lIns="0" tIns="0" rIns="0" bIns="0" rtlCol="0" anchor="t">
-            <a:spAutoFit/>
+          <a:bodyPr lIns="27432" tIns="18288" rIns="27432" bIns="18288" rtlCol="0" anchor="ctr" wrap="square">
+            <a:noAutofit/>
           </a:bodyPr>
           <a:lstStyle/>
           <a:p>
             <a:pPr algn="l">
               <a:lnSpc>
-                <a:spcPts val="3779"/>
+                <a:spcPct val="112000"/>
               </a:lnSpc>
-              <a:defRPr>
+              <a:spcBef>
+                <a:spcPts val="0"/>
+              </a:spcBef>
+              <a:spcAft>
+                <a:spcPts val="0"/>
+              </a:spcAft>
+              <a:defRPr sz="3000">
+                <a:solidFill>
+                  <a:srgbClr val="2563EB"/>
+                </a:solidFill>
                 <a:latin typeface="標楷體"/>
                 <a:ea typeface="標楷體"/>
                 <a:cs typeface="標楷體"/>
               </a:defRPr>
             </a:pPr>
             <a:r>
-              <a:rPr lang="zh-TW" altLang="en-US" sz="3150" b="1" dirty="0">
-                <a:solidFill>
-                  <a:schemeClr val="accent1"/>
+              <a:rPr lang="zh-TW" altLang="en-US" sz="3000" b="1" dirty="0">
+                <a:solidFill>
+                  <a:srgbClr val="2563EB"/>
                 </a:solidFill>
                 <a:latin typeface="標楷體" panose="03000509000000000000" pitchFamily="65" charset="-120"/>
                 <a:ea typeface="標楷體" panose="03000509000000000000" pitchFamily="65" charset="-120"/>
@@ -17800,33 +19111,42 @@
         </p:nvSpPr>
         <p:spPr>
           <a:xfrm>
-            <a:off x="9944100" y="3358588"/>
-            <a:ext cx="3456432" cy="462050"/>
+            <a:off x="10332719" y="3127248"/>
+            <a:ext cx="2834640" cy="640080"/>
           </a:xfrm>
           <a:prstGeom prst="rect">
             <a:avLst/>
           </a:prstGeom>
         </p:spPr>
         <p:txBody>
-          <a:bodyPr lIns="0" tIns="0" rIns="0" bIns="0" rtlCol="0" anchor="t">
-            <a:spAutoFit/>
+          <a:bodyPr lIns="27432" tIns="18288" rIns="27432" bIns="18288" rtlCol="0" anchor="ctr" wrap="square">
+            <a:noAutofit/>
           </a:bodyPr>
           <a:lstStyle/>
           <a:p>
             <a:pPr algn="l">
               <a:lnSpc>
-                <a:spcPts val="3779"/>
+                <a:spcPct val="112000"/>
               </a:lnSpc>
-              <a:defRPr>
+              <a:spcBef>
+                <a:spcPts val="0"/>
+              </a:spcBef>
+              <a:spcAft>
+                <a:spcPts val="0"/>
+              </a:spcAft>
+              <a:defRPr sz="3000">
+                <a:solidFill>
+                  <a:srgbClr val="2563EB"/>
+                </a:solidFill>
                 <a:latin typeface="標楷體"/>
                 <a:ea typeface="標楷體"/>
                 <a:cs typeface="標楷體"/>
               </a:defRPr>
             </a:pPr>
             <a:r>
-              <a:rPr lang="zh-TW" altLang="en-US" sz="3150" b="1" dirty="0">
-                <a:solidFill>
-                  <a:schemeClr val="accent1"/>
+              <a:rPr lang="zh-TW" altLang="en-US" sz="3000" b="1" dirty="0">
+                <a:solidFill>
+                  <a:srgbClr val="2563EB"/>
                 </a:solidFill>
                 <a:latin typeface="標楷體" panose="03000509000000000000" pitchFamily="65" charset="-120"/>
                 <a:ea typeface="標楷體" panose="03000509000000000000" pitchFamily="65" charset="-120"/>
@@ -17909,6 +19229,10 @@
             <a:noFill/>
           </a:ln>
         </p:spPr>
+        <p:txBody>
+          <a:bodyPr/>
+          <a:p/>
+        </p:txBody>
       </p:sp>
       <p:sp>
         <p:nvSpPr>
@@ -17989,8 +19313,8 @@
         </p:nvSpPr>
         <p:spPr>
           <a:xfrm>
-            <a:off x="809625" y="2333418"/>
-            <a:ext cx="16192500" cy="952500"/>
+            <a:off x="914400" y="2103120"/>
+            <a:ext cx="16459200" cy="914400"/>
           </a:xfrm>
           <a:prstGeom prst="rect">
             <a:avLst/>
@@ -18001,7 +19325,9 @@
           </a:ln>
         </p:spPr>
         <p:txBody>
-          <a:bodyPr/>
+          <a:bodyPr wrap="square" lIns="27432" rIns="27432" tIns="18288" bIns="18288" anchor="ctr">
+            <a:noAutofit/>
+          </a:bodyPr>
           <a:lstStyle>
             <a:defPPr>
               <a:defRPr sz="5250" b="0">
@@ -18015,10 +19341,19 @@
             </a:defPPr>
           </a:lstStyle>
           <a:p>
-            <a:pPr>
-              <a:defRPr sz="5250" b="0">
-                <a:solidFill>
-                  <a:srgbClr val="17324D"/>
+            <a:pPr algn="l">
+              <a:lnSpc>
+                <a:spcPct val="112000"/>
+              </a:lnSpc>
+              <a:spcBef>
+                <a:spcPts val="0"/>
+              </a:spcBef>
+              <a:spcAft>
+                <a:spcPts val="0"/>
+              </a:spcAft>
+              <a:defRPr sz="3800" b="0">
+                <a:solidFill>
+                  <a:srgbClr val="000000"/>
                 </a:solidFill>
                 <a:latin typeface="標楷體"/>
                 <a:ea typeface="標楷體"/>
@@ -18026,9 +19361,9 @@
               </a:defRPr>
             </a:pPr>
             <a:r>
-              <a:rPr lang="zh-TW" altLang="en-US" sz="5250" b="0" dirty="0">
-                <a:solidFill>
-                  <a:srgbClr val="17324D"/>
+              <a:rPr lang="zh-TW" altLang="en-US" sz="3800" b="0" dirty="0">
+                <a:solidFill>
+                  <a:srgbClr val="000000"/>
                 </a:solidFill>
                 <a:latin typeface="標楷體"/>
                 <a:ea typeface="標楷體"/>
@@ -18037,9 +19372,9 @@
               <a:t>飛機</a:t>
             </a:r>
             <a:r>
-              <a:rPr sz="5250" b="0" dirty="0" err="1">
-                <a:solidFill>
-                  <a:srgbClr val="17324D"/>
+              <a:rPr sz="3800" b="0" dirty="0" err="1">
+                <a:solidFill>
+                  <a:srgbClr val="000000"/>
                 </a:solidFill>
                 <a:latin typeface="標楷體"/>
                 <a:ea typeface="標楷體"/>
@@ -18074,8 +19409,8 @@
         </p:nvSpPr>
         <p:spPr>
           <a:xfrm>
-            <a:off x="933450" y="4000500"/>
-            <a:ext cx="4476750" cy="3095625"/>
+            <a:off x="960120" y="3657600"/>
+            <a:ext cx="4480560" cy="3383280"/>
           </a:xfrm>
           <a:prstGeom prst="roundRect">
             <a:avLst>
@@ -18089,6 +19424,10 @@
             <a:noFill/>
           </a:ln>
         </p:spPr>
+        <p:txBody>
+          <a:bodyPr/>
+          <a:p/>
+        </p:txBody>
       </p:sp>
       <p:sp>
         <p:nvSpPr>
@@ -18106,8 +19445,8 @@
         </p:nvSpPr>
         <p:spPr>
           <a:xfrm>
-            <a:off x="1200150" y="4171950"/>
-            <a:ext cx="952500" cy="457200"/>
+            <a:off x="1143000" y="3931920"/>
+            <a:ext cx="502920" cy="502920"/>
           </a:xfrm>
           <a:prstGeom prst="rect">
             <a:avLst/>
@@ -18118,7 +19457,9 @@
           </a:ln>
         </p:spPr>
         <p:txBody>
-          <a:bodyPr/>
+          <a:bodyPr wrap="square" lIns="27432" rIns="27432" tIns="18288" bIns="18288" anchor="ctr">
+            <a:noAutofit/>
+          </a:bodyPr>
           <a:lstStyle>
             <a:defPPr>
               <a:defRPr sz="2400" b="1">
@@ -18132,10 +19473,19 @@
             </a:defPPr>
           </a:lstStyle>
           <a:p>
-            <a:pPr>
-              <a:defRPr sz="2400" b="1">
-                <a:solidFill>
-                  <a:srgbClr val="2563EB"/>
+            <a:pPr algn="l">
+              <a:lnSpc>
+                <a:spcPct val="112000"/>
+              </a:lnSpc>
+              <a:spcBef>
+                <a:spcPts val="0"/>
+              </a:spcBef>
+              <a:spcAft>
+                <a:spcPts val="0"/>
+              </a:spcAft>
+              <a:defRPr sz="2200" b="1">
+                <a:solidFill>
+                  <a:srgbClr val="000000"/>
                 </a:solidFill>
                 <a:latin typeface="標楷體"/>
                 <a:ea typeface="標楷體"/>
@@ -18143,9 +19493,9 @@
               </a:defRPr>
             </a:pPr>
             <a:r>
-              <a:rPr sz="2400" b="1" dirty="0">
-                <a:solidFill>
-                  <a:schemeClr val="accent1"/>
+              <a:rPr sz="2200" b="1" dirty="0">
+                <a:solidFill>
+                  <a:srgbClr val="000000"/>
                 </a:solidFill>
                 <a:latin typeface="標楷體"/>
                 <a:ea typeface="標楷體"/>
@@ -18172,8 +19522,8 @@
         </p:nvSpPr>
         <p:spPr>
           <a:xfrm>
-            <a:off x="1757363" y="4143375"/>
-            <a:ext cx="4048125" cy="619125"/>
+            <a:off x="1691640" y="3840480"/>
+            <a:ext cx="3566160" cy="685800"/>
           </a:xfrm>
           <a:prstGeom prst="rect">
             <a:avLst/>
@@ -18184,7 +19534,9 @@
           </a:ln>
         </p:spPr>
         <p:txBody>
-          <a:bodyPr/>
+          <a:bodyPr wrap="square" lIns="27432" rIns="27432" tIns="18288" bIns="18288" anchor="ctr">
+            <a:noAutofit/>
+          </a:bodyPr>
           <a:lstStyle>
             <a:defPPr>
               <a:defRPr sz="3675" b="1">
@@ -18198,10 +19550,19 @@
             </a:defPPr>
           </a:lstStyle>
           <a:p>
-            <a:pPr>
-              <a:defRPr sz="3675" b="1">
-                <a:solidFill>
-                  <a:srgbClr val="17324D"/>
+            <a:pPr algn="l">
+              <a:lnSpc>
+                <a:spcPct val="112000"/>
+              </a:lnSpc>
+              <a:spcBef>
+                <a:spcPts val="0"/>
+              </a:spcBef>
+              <a:spcAft>
+                <a:spcPts val="0"/>
+              </a:spcAft>
+              <a:defRPr sz="3000" b="1">
+                <a:solidFill>
+                  <a:srgbClr val="000000"/>
                 </a:solidFill>
                 <a:latin typeface="標楷體"/>
                 <a:ea typeface="標楷體"/>
@@ -18209,9 +19570,9 @@
               </a:defRPr>
             </a:pPr>
             <a:r>
-              <a:rPr sz="3675" b="1" dirty="0" err="1">
-                <a:solidFill>
-                  <a:schemeClr val="accent1"/>
+              <a:rPr sz="3000" b="1" dirty="0" err="1">
+                <a:solidFill>
+                  <a:srgbClr val="000000"/>
                 </a:solidFill>
                 <a:latin typeface="標楷體"/>
                 <a:ea typeface="標楷體"/>
@@ -18246,8 +19607,8 @@
         </p:nvSpPr>
         <p:spPr>
           <a:xfrm>
-            <a:off x="1244980" y="5246412"/>
-            <a:ext cx="4048125" cy="1095375"/>
+            <a:off x="1188720" y="4800600"/>
+            <a:ext cx="4023360" cy="1691640"/>
           </a:xfrm>
           <a:prstGeom prst="rect">
             <a:avLst/>
@@ -18258,7 +19619,9 @@
           </a:ln>
         </p:spPr>
         <p:txBody>
-          <a:bodyPr/>
+          <a:bodyPr wrap="square" lIns="27432" rIns="27432" tIns="18288" bIns="18288" anchor="ctr">
+            <a:noAutofit/>
+          </a:bodyPr>
           <a:lstStyle>
             <a:defPPr>
               <a:defRPr sz="3000" b="0">
@@ -18272,10 +19635,19 @@
             </a:defPPr>
           </a:lstStyle>
           <a:p>
-            <a:pPr>
-              <a:defRPr sz="3000" b="0">
-                <a:solidFill>
-                  <a:srgbClr val="17324D"/>
+            <a:pPr algn="l">
+              <a:lnSpc>
+                <a:spcPct val="112000"/>
+              </a:lnSpc>
+              <a:spcBef>
+                <a:spcPts val="0"/>
+              </a:spcBef>
+              <a:spcAft>
+                <a:spcPts val="0"/>
+              </a:spcAft>
+              <a:defRPr sz="2800" b="0">
+                <a:solidFill>
+                  <a:srgbClr val="000000"/>
                 </a:solidFill>
                 <a:latin typeface="標楷體"/>
                 <a:ea typeface="標楷體"/>
@@ -18283,24 +19655,42 @@
               </a:defRPr>
             </a:pPr>
             <a:r>
-              <a:rPr sz="3000" b="0" dirty="0" err="1">
-                <a:latin typeface="標楷體"/>
-                <a:ea typeface="標楷體"/>
-                <a:cs typeface="標楷體"/>
-              </a:rPr>
-              <a:t>長度、寬度</a:t>
-            </a:r>
-            <a:endParaRPr sz="3000" b="0" dirty="0">
-              <a:latin typeface="標楷體"/>
-              <a:ea typeface="標楷體"/>
-              <a:cs typeface="標楷體"/>
-            </a:endParaRPr>
-          </a:p>
-          <a:p>
-            <a:pPr>
-              <a:defRPr sz="3000" b="0">
-                <a:solidFill>
-                  <a:srgbClr val="17324D"/>
+              <a:rPr lang="zh-TW" altLang="en-US" sz="2800" dirty="0">
+                <a:solidFill>
+                  <a:srgbClr val="000000"/>
+                </a:solidFill>
+                <a:latin typeface="標楷體"/>
+                <a:ea typeface="標楷體"/>
+                <a:cs typeface="標楷體"/>
+              </a:rPr>
+              <a:t>長</a:t>
+            </a:r>
+            <a:r>
+              <a:rPr lang="zh-TW" altLang="en-US" sz="2800" b="0" dirty="0">
+                <a:solidFill>
+                  <a:srgbClr val="000000"/>
+                </a:solidFill>
+                <a:latin typeface="標楷體"/>
+                <a:ea typeface="標楷體"/>
+                <a:cs typeface="標楷體"/>
+              </a:rPr>
+              <a:t>度、寬度</a:t>
+            </a:r>
+          </a:p>
+          <a:p>
+            <a:pPr algn="l">
+              <a:lnSpc>
+                <a:spcPct val="112000"/>
+              </a:lnSpc>
+              <a:spcBef>
+                <a:spcPts val="0"/>
+              </a:spcBef>
+              <a:spcAft>
+                <a:spcPts val="0"/>
+              </a:spcAft>
+              <a:defRPr sz="2800" b="0">
+                <a:solidFill>
+                  <a:srgbClr val="000000"/>
                 </a:solidFill>
                 <a:latin typeface="標楷體"/>
                 <a:ea typeface="標楷體"/>
@@ -18308,13 +19698,37 @@
               </a:defRPr>
             </a:pPr>
             <a:r>
-              <a:rPr sz="3000" b="0" dirty="0" err="1">
+              <a:rPr lang="zh-TW" altLang="en-US" sz="2800" b="0" dirty="0">
+                <a:solidFill>
+                  <a:srgbClr val="000000"/>
+                </a:solidFill>
                 <a:latin typeface="標楷體"/>
                 <a:ea typeface="標楷體"/>
                 <a:cs typeface="標楷體"/>
               </a:rPr>
               <a:t>連續性與障礙限制</a:t>
             </a:r>
+          </a:p>
+          <a:p>
+            <a:pPr algn="l">
+              <a:lnSpc>
+                <a:spcPct val="112000"/>
+              </a:lnSpc>
+              <a:spcBef>
+                <a:spcPts val="0"/>
+              </a:spcBef>
+              <a:spcAft>
+                <a:spcPts val="0"/>
+              </a:spcAft>
+              <a:defRPr sz="2800" b="0">
+                <a:solidFill>
+                  <a:srgbClr val="000000"/>
+                </a:solidFill>
+                <a:latin typeface="標楷體"/>
+                <a:ea typeface="標楷體"/>
+                <a:cs typeface="標楷體"/>
+              </a:defRPr>
+            </a:pPr>
             <a:endParaRPr sz="3000" b="0" dirty="0">
               <a:latin typeface="標楷體"/>
               <a:ea typeface="標楷體"/>
@@ -18339,8 +19753,8 @@
         </p:nvSpPr>
         <p:spPr>
           <a:xfrm>
-            <a:off x="5600700" y="5095875"/>
-            <a:ext cx="1000125" cy="762000"/>
+            <a:off x="5623560" y="4892040"/>
+            <a:ext cx="914400" cy="731520"/>
           </a:xfrm>
           <a:prstGeom prst="rect">
             <a:avLst/>
@@ -18351,7 +19765,9 @@
           </a:ln>
         </p:spPr>
         <p:txBody>
-          <a:bodyPr/>
+          <a:bodyPr wrap="square" lIns="27432" rIns="27432" tIns="18288" bIns="18288" anchor="ctr">
+            <a:noAutofit/>
+          </a:bodyPr>
           <a:lstStyle>
             <a:defPPr>
               <a:defRPr sz="4875" b="0">
@@ -18365,10 +19781,19 @@
             </a:defPPr>
           </a:lstStyle>
           <a:p>
-            <a:pPr>
-              <a:defRPr sz="4875" b="0">
-                <a:solidFill>
-                  <a:srgbClr val="2563EB"/>
+            <a:pPr algn="ctr">
+              <a:lnSpc>
+                <a:spcPct val="112000"/>
+              </a:lnSpc>
+              <a:spcBef>
+                <a:spcPts val="0"/>
+              </a:spcBef>
+              <a:spcAft>
+                <a:spcPts val="0"/>
+              </a:spcAft>
+              <a:defRPr sz="4000" b="0">
+                <a:solidFill>
+                  <a:srgbClr val="000000"/>
                 </a:solidFill>
                 <a:latin typeface="標楷體"/>
                 <a:ea typeface="標楷體"/>
@@ -18376,9 +19801,9 @@
               </a:defRPr>
             </a:pPr>
             <a:r>
-              <a:rPr sz="4875" b="0">
-                <a:solidFill>
-                  <a:srgbClr val="2563EB"/>
+              <a:rPr sz="4000" b="0">
+                <a:solidFill>
+                  <a:srgbClr val="000000"/>
                 </a:solidFill>
                 <a:latin typeface="標楷體"/>
                 <a:ea typeface="標楷體"/>
@@ -18405,8 +19830,8 @@
         </p:nvSpPr>
         <p:spPr>
           <a:xfrm>
-            <a:off x="6905625" y="4000500"/>
-            <a:ext cx="4476750" cy="3095625"/>
+            <a:off x="6903720" y="3657600"/>
+            <a:ext cx="4480560" cy="3383280"/>
           </a:xfrm>
           <a:prstGeom prst="roundRect">
             <a:avLst>
@@ -18420,6 +19845,10 @@
             <a:noFill/>
           </a:ln>
         </p:spPr>
+        <p:txBody>
+          <a:bodyPr/>
+          <a:p/>
+        </p:txBody>
       </p:sp>
       <p:sp>
         <p:nvSpPr>
@@ -18437,8 +19866,8 @@
         </p:nvSpPr>
         <p:spPr>
           <a:xfrm>
-            <a:off x="7172325" y="4171950"/>
-            <a:ext cx="952500" cy="457200"/>
+            <a:off x="7086600" y="3931920"/>
+            <a:ext cx="502920" cy="502920"/>
           </a:xfrm>
           <a:prstGeom prst="rect">
             <a:avLst/>
@@ -18449,7 +19878,9 @@
           </a:ln>
         </p:spPr>
         <p:txBody>
-          <a:bodyPr/>
+          <a:bodyPr wrap="square" lIns="27432" rIns="27432" tIns="18288" bIns="18288" anchor="ctr">
+            <a:noAutofit/>
+          </a:bodyPr>
           <a:lstStyle>
             <a:defPPr>
               <a:defRPr sz="2400" b="1">
@@ -18463,10 +19894,19 @@
             </a:defPPr>
           </a:lstStyle>
           <a:p>
-            <a:pPr>
-              <a:defRPr sz="2400" b="1">
-                <a:solidFill>
-                  <a:srgbClr val="2563EB"/>
+            <a:pPr algn="l">
+              <a:lnSpc>
+                <a:spcPct val="112000"/>
+              </a:lnSpc>
+              <a:spcBef>
+                <a:spcPts val="0"/>
+              </a:spcBef>
+              <a:spcAft>
+                <a:spcPts val="0"/>
+              </a:spcAft>
+              <a:defRPr sz="2200" b="1">
+                <a:solidFill>
+                  <a:srgbClr val="000000"/>
                 </a:solidFill>
                 <a:latin typeface="標楷體"/>
                 <a:ea typeface="標楷體"/>
@@ -18474,9 +19914,9 @@
               </a:defRPr>
             </a:pPr>
             <a:r>
-              <a:rPr sz="2400" b="1" dirty="0">
-                <a:solidFill>
-                  <a:schemeClr val="accent1"/>
+              <a:rPr sz="2200" b="1" dirty="0">
+                <a:solidFill>
+                  <a:srgbClr val="000000"/>
                 </a:solidFill>
                 <a:latin typeface="標楷體"/>
                 <a:ea typeface="標楷體"/>
@@ -18503,8 +19943,8 @@
         </p:nvSpPr>
         <p:spPr>
           <a:xfrm>
-            <a:off x="7729538" y="4143375"/>
-            <a:ext cx="4048125" cy="619125"/>
+            <a:off x="7635240" y="3840480"/>
+            <a:ext cx="3566160" cy="685800"/>
           </a:xfrm>
           <a:prstGeom prst="rect">
             <a:avLst/>
@@ -18515,7 +19955,9 @@
           </a:ln>
         </p:spPr>
         <p:txBody>
-          <a:bodyPr/>
+          <a:bodyPr wrap="square" lIns="27432" rIns="27432" tIns="18288" bIns="18288" anchor="ctr">
+            <a:noAutofit/>
+          </a:bodyPr>
           <a:lstStyle>
             <a:defPPr>
               <a:defRPr sz="3675" b="1">
@@ -18529,10 +19971,19 @@
             </a:defPPr>
           </a:lstStyle>
           <a:p>
-            <a:pPr>
-              <a:defRPr sz="3675" b="1">
-                <a:solidFill>
-                  <a:srgbClr val="17324D"/>
+            <a:pPr algn="l">
+              <a:lnSpc>
+                <a:spcPct val="112000"/>
+              </a:lnSpc>
+              <a:spcBef>
+                <a:spcPts val="0"/>
+              </a:spcBef>
+              <a:spcAft>
+                <a:spcPts val="0"/>
+              </a:spcAft>
+              <a:defRPr sz="3000" b="1">
+                <a:solidFill>
+                  <a:srgbClr val="000000"/>
                 </a:solidFill>
                 <a:latin typeface="標楷體"/>
                 <a:ea typeface="標楷體"/>
@@ -18540,9 +19991,9 @@
               </a:defRPr>
             </a:pPr>
             <a:r>
-              <a:rPr sz="3675" b="1" dirty="0" err="1">
-                <a:solidFill>
-                  <a:schemeClr val="accent1"/>
+              <a:rPr sz="3000" b="1" dirty="0" err="1">
+                <a:solidFill>
+                  <a:srgbClr val="000000"/>
                 </a:solidFill>
                 <a:latin typeface="標楷體"/>
                 <a:ea typeface="標楷體"/>
@@ -18577,8 +20028,8 @@
         </p:nvSpPr>
         <p:spPr>
           <a:xfrm>
-            <a:off x="7334250" y="5221563"/>
-            <a:ext cx="4048125" cy="1095375"/>
+            <a:off x="7132320" y="4800600"/>
+            <a:ext cx="4023360" cy="1691640"/>
           </a:xfrm>
           <a:prstGeom prst="rect">
             <a:avLst/>
@@ -18589,7 +20040,9 @@
           </a:ln>
         </p:spPr>
         <p:txBody>
-          <a:bodyPr/>
+          <a:bodyPr wrap="square" lIns="27432" rIns="27432" tIns="18288" bIns="18288" anchor="ctr">
+            <a:noAutofit/>
+          </a:bodyPr>
           <a:lstStyle>
             <a:defPPr>
               <a:defRPr sz="3000" b="0">
@@ -18603,10 +20056,19 @@
             </a:defPPr>
           </a:lstStyle>
           <a:p>
-            <a:pPr>
-              <a:defRPr sz="3000" b="0">
-                <a:solidFill>
-                  <a:srgbClr val="17324D"/>
+            <a:pPr algn="l">
+              <a:lnSpc>
+                <a:spcPct val="112000"/>
+              </a:lnSpc>
+              <a:spcBef>
+                <a:spcPts val="0"/>
+              </a:spcBef>
+              <a:spcAft>
+                <a:spcPts val="0"/>
+              </a:spcAft>
+              <a:defRPr sz="2800" b="0">
+                <a:solidFill>
+                  <a:srgbClr val="000000"/>
                 </a:solidFill>
                 <a:latin typeface="標楷體"/>
                 <a:ea typeface="標楷體"/>
@@ -18614,7 +20076,10 @@
               </a:defRPr>
             </a:pPr>
             <a:r>
-              <a:rPr sz="3000" b="0" dirty="0" err="1">
+              <a:rPr sz="2800" b="0" dirty="0" err="1">
+                <a:solidFill>
+                  <a:srgbClr val="000000"/>
+                </a:solidFill>
                 <a:latin typeface="標楷體"/>
                 <a:ea typeface="標楷體"/>
                 <a:cs typeface="標楷體"/>
@@ -18628,10 +20093,19 @@
             </a:endParaRPr>
           </a:p>
           <a:p>
-            <a:pPr>
-              <a:defRPr sz="3000" b="0">
-                <a:solidFill>
-                  <a:srgbClr val="17324D"/>
+            <a:pPr algn="l">
+              <a:lnSpc>
+                <a:spcPct val="112000"/>
+              </a:lnSpc>
+              <a:spcBef>
+                <a:spcPts val="0"/>
+              </a:spcBef>
+              <a:spcAft>
+                <a:spcPts val="0"/>
+              </a:spcAft>
+              <a:defRPr sz="2800" b="0">
+                <a:solidFill>
+                  <a:srgbClr val="000000"/>
                 </a:solidFill>
                 <a:latin typeface="標楷體"/>
                 <a:ea typeface="標楷體"/>
@@ -18639,7 +20113,10 @@
               </a:defRPr>
             </a:pPr>
             <a:r>
-              <a:rPr sz="3000" b="0" dirty="0" err="1">
+              <a:rPr sz="2800" b="0" dirty="0" err="1">
+                <a:solidFill>
+                  <a:srgbClr val="000000"/>
+                </a:solidFill>
                 <a:latin typeface="標楷體"/>
                 <a:ea typeface="標楷體"/>
                 <a:cs typeface="標楷體"/>
@@ -18670,8 +20147,8 @@
         </p:nvSpPr>
         <p:spPr>
           <a:xfrm>
-            <a:off x="11572875" y="5095875"/>
-            <a:ext cx="1000125" cy="762000"/>
+            <a:off x="11567160" y="4892040"/>
+            <a:ext cx="914400" cy="731520"/>
           </a:xfrm>
           <a:prstGeom prst="rect">
             <a:avLst/>
@@ -18682,7 +20159,9 @@
           </a:ln>
         </p:spPr>
         <p:txBody>
-          <a:bodyPr/>
+          <a:bodyPr wrap="square" lIns="27432" rIns="27432" tIns="18288" bIns="18288" anchor="ctr">
+            <a:noAutofit/>
+          </a:bodyPr>
           <a:lstStyle>
             <a:defPPr>
               <a:defRPr sz="4875" b="0">
@@ -18696,10 +20175,19 @@
             </a:defPPr>
           </a:lstStyle>
           <a:p>
-            <a:pPr>
-              <a:defRPr sz="4875" b="0">
-                <a:solidFill>
-                  <a:srgbClr val="2563EB"/>
+            <a:pPr algn="ctr">
+              <a:lnSpc>
+                <a:spcPct val="112000"/>
+              </a:lnSpc>
+              <a:spcBef>
+                <a:spcPts val="0"/>
+              </a:spcBef>
+              <a:spcAft>
+                <a:spcPts val="0"/>
+              </a:spcAft>
+              <a:defRPr sz="4000" b="0">
+                <a:solidFill>
+                  <a:srgbClr val="000000"/>
                 </a:solidFill>
                 <a:latin typeface="標楷體"/>
                 <a:ea typeface="標楷體"/>
@@ -18707,9 +20195,9 @@
               </a:defRPr>
             </a:pPr>
             <a:r>
-              <a:rPr sz="4875" b="0">
-                <a:solidFill>
-                  <a:srgbClr val="2563EB"/>
+              <a:rPr sz="4000" b="0">
+                <a:solidFill>
+                  <a:srgbClr val="000000"/>
                 </a:solidFill>
                 <a:latin typeface="標楷體"/>
                 <a:ea typeface="標楷體"/>
@@ -18736,8 +20224,8 @@
         </p:nvSpPr>
         <p:spPr>
           <a:xfrm>
-            <a:off x="12877800" y="4000500"/>
-            <a:ext cx="4476750" cy="3095625"/>
+            <a:off x="12847320" y="3657600"/>
+            <a:ext cx="4480560" cy="3383280"/>
           </a:xfrm>
           <a:prstGeom prst="roundRect">
             <a:avLst>
@@ -18751,6 +20239,10 @@
             <a:noFill/>
           </a:ln>
         </p:spPr>
+        <p:txBody>
+          <a:bodyPr/>
+          <a:p/>
+        </p:txBody>
       </p:sp>
       <p:sp>
         <p:nvSpPr>
@@ -18768,8 +20260,8 @@
         </p:nvSpPr>
         <p:spPr>
           <a:xfrm>
-            <a:off x="13144500" y="4171950"/>
-            <a:ext cx="952500" cy="457200"/>
+            <a:off x="13030200" y="3931920"/>
+            <a:ext cx="502920" cy="502920"/>
           </a:xfrm>
           <a:prstGeom prst="rect">
             <a:avLst/>
@@ -18780,7 +20272,9 @@
           </a:ln>
         </p:spPr>
         <p:txBody>
-          <a:bodyPr/>
+          <a:bodyPr wrap="square" lIns="27432" rIns="27432" tIns="18288" bIns="18288" anchor="ctr">
+            <a:noAutofit/>
+          </a:bodyPr>
           <a:lstStyle>
             <a:defPPr>
               <a:defRPr sz="2400" b="1">
@@ -18794,10 +20288,19 @@
             </a:defPPr>
           </a:lstStyle>
           <a:p>
-            <a:pPr>
-              <a:defRPr sz="2400" b="1">
-                <a:solidFill>
-                  <a:srgbClr val="2563EB"/>
+            <a:pPr algn="l">
+              <a:lnSpc>
+                <a:spcPct val="112000"/>
+              </a:lnSpc>
+              <a:spcBef>
+                <a:spcPts val="0"/>
+              </a:spcBef>
+              <a:spcAft>
+                <a:spcPts val="0"/>
+              </a:spcAft>
+              <a:defRPr sz="2200" b="1">
+                <a:solidFill>
+                  <a:srgbClr val="000000"/>
                 </a:solidFill>
                 <a:latin typeface="標楷體"/>
                 <a:ea typeface="標楷體"/>
@@ -18805,9 +20308,9 @@
               </a:defRPr>
             </a:pPr>
             <a:r>
-              <a:rPr sz="2400" b="1" dirty="0">
-                <a:solidFill>
-                  <a:schemeClr val="accent1"/>
+              <a:rPr sz="2200" b="1" dirty="0">
+                <a:solidFill>
+                  <a:srgbClr val="000000"/>
                 </a:solidFill>
                 <a:latin typeface="標楷體"/>
                 <a:ea typeface="標楷體"/>
@@ -18834,8 +20337,8 @@
         </p:nvSpPr>
         <p:spPr>
           <a:xfrm>
-            <a:off x="13701713" y="4147102"/>
-            <a:ext cx="4048125" cy="619125"/>
+            <a:off x="13578840" y="3840480"/>
+            <a:ext cx="3566160" cy="685800"/>
           </a:xfrm>
           <a:prstGeom prst="rect">
             <a:avLst/>
@@ -18846,7 +20349,9 @@
           </a:ln>
         </p:spPr>
         <p:txBody>
-          <a:bodyPr/>
+          <a:bodyPr wrap="square" lIns="27432" rIns="27432" tIns="18288" bIns="18288" anchor="ctr">
+            <a:noAutofit/>
+          </a:bodyPr>
           <a:lstStyle>
             <a:defPPr>
               <a:defRPr sz="3675" b="1">
@@ -18860,10 +20365,19 @@
             </a:defPPr>
           </a:lstStyle>
           <a:p>
-            <a:pPr>
-              <a:defRPr sz="3675" b="1">
-                <a:solidFill>
-                  <a:srgbClr val="17324D"/>
+            <a:pPr algn="l">
+              <a:lnSpc>
+                <a:spcPct val="112000"/>
+              </a:lnSpc>
+              <a:spcBef>
+                <a:spcPts val="0"/>
+              </a:spcBef>
+              <a:spcAft>
+                <a:spcPts val="0"/>
+              </a:spcAft>
+              <a:defRPr sz="3000" b="1">
+                <a:solidFill>
+                  <a:srgbClr val="000000"/>
                 </a:solidFill>
                 <a:latin typeface="標楷體"/>
                 <a:ea typeface="標楷體"/>
@@ -18871,9 +20385,9 @@
               </a:defRPr>
             </a:pPr>
             <a:r>
-              <a:rPr sz="3675" b="1" dirty="0" err="1">
-                <a:solidFill>
-                  <a:schemeClr val="accent1"/>
+              <a:rPr sz="3000" b="1" dirty="0" err="1">
+                <a:solidFill>
+                  <a:srgbClr val="000000"/>
                 </a:solidFill>
                 <a:latin typeface="標楷體"/>
                 <a:ea typeface="標楷體"/>
@@ -18908,8 +20422,8 @@
         </p:nvSpPr>
         <p:spPr>
           <a:xfrm>
-            <a:off x="13306425" y="5322404"/>
-            <a:ext cx="4048125" cy="1095375"/>
+            <a:off x="13075920" y="4800600"/>
+            <a:ext cx="4023360" cy="1691640"/>
           </a:xfrm>
           <a:prstGeom prst="rect">
             <a:avLst/>
@@ -18920,7 +20434,9 @@
           </a:ln>
         </p:spPr>
         <p:txBody>
-          <a:bodyPr/>
+          <a:bodyPr wrap="square" lIns="27432" rIns="27432" tIns="18288" bIns="18288" anchor="ctr">
+            <a:noAutofit/>
+          </a:bodyPr>
           <a:lstStyle>
             <a:defPPr>
               <a:defRPr sz="3000" b="0">
@@ -18934,10 +20450,19 @@
             </a:defPPr>
           </a:lstStyle>
           <a:p>
-            <a:pPr>
-              <a:defRPr sz="3000" b="0">
-                <a:solidFill>
-                  <a:srgbClr val="17324D"/>
+            <a:pPr algn="l">
+              <a:lnSpc>
+                <a:spcPct val="112000"/>
+              </a:lnSpc>
+              <a:spcBef>
+                <a:spcPts val="0"/>
+              </a:spcBef>
+              <a:spcAft>
+                <a:spcPts val="0"/>
+              </a:spcAft>
+              <a:defRPr sz="2800" b="0">
+                <a:solidFill>
+                  <a:srgbClr val="000000"/>
                 </a:solidFill>
                 <a:latin typeface="標楷體"/>
                 <a:ea typeface="標楷體"/>
@@ -18945,7 +20470,10 @@
               </a:defRPr>
             </a:pPr>
             <a:r>
-              <a:rPr sz="3000" b="0" dirty="0" err="1">
+              <a:rPr sz="2800" b="0" dirty="0" err="1">
+                <a:solidFill>
+                  <a:srgbClr val="000000"/>
+                </a:solidFill>
                 <a:latin typeface="標楷體"/>
                 <a:ea typeface="標楷體"/>
                 <a:cs typeface="標楷體"/>
@@ -18959,10 +20487,19 @@
             </a:endParaRPr>
           </a:p>
           <a:p>
-            <a:pPr>
-              <a:defRPr sz="3000" b="0">
-                <a:solidFill>
-                  <a:srgbClr val="17324D"/>
+            <a:pPr algn="l">
+              <a:lnSpc>
+                <a:spcPct val="112000"/>
+              </a:lnSpc>
+              <a:spcBef>
+                <a:spcPts val="0"/>
+              </a:spcBef>
+              <a:spcAft>
+                <a:spcPts val="0"/>
+              </a:spcAft>
+              <a:defRPr sz="2800" b="0">
+                <a:solidFill>
+                  <a:srgbClr val="000000"/>
                 </a:solidFill>
                 <a:latin typeface="標楷體"/>
                 <a:ea typeface="標楷體"/>
@@ -18970,7 +20507,10 @@
               </a:defRPr>
             </a:pPr>
             <a:r>
-              <a:rPr sz="3000" b="0" dirty="0" err="1">
+              <a:rPr sz="2800" b="0" dirty="0" err="1">
+                <a:solidFill>
+                  <a:srgbClr val="000000"/>
+                </a:solidFill>
                 <a:latin typeface="標楷體"/>
                 <a:ea typeface="標楷體"/>
                 <a:cs typeface="標楷體"/>
@@ -19001,8 +20541,8 @@
         </p:nvSpPr>
         <p:spPr>
           <a:xfrm>
-            <a:off x="933450" y="8096250"/>
-            <a:ext cx="16383000" cy="904875"/>
+            <a:off x="960120" y="7726679"/>
+            <a:ext cx="16367759" cy="914400"/>
           </a:xfrm>
           <a:prstGeom prst="rect">
             <a:avLst/>
@@ -19013,7 +20553,9 @@
           </a:ln>
         </p:spPr>
         <p:txBody>
-          <a:bodyPr/>
+          <a:bodyPr wrap="square" lIns="27432" rIns="27432" tIns="18288" bIns="18288" anchor="ctr">
+            <a:noAutofit/>
+          </a:bodyPr>
           <a:lstStyle>
             <a:defPPr>
               <a:defRPr sz="3675" b="1">
@@ -19027,10 +20569,19 @@
             </a:defPPr>
           </a:lstStyle>
           <a:p>
-            <a:pPr>
-              <a:defRPr sz="3675" b="1">
-                <a:solidFill>
-                  <a:srgbClr val="17324D"/>
+            <a:pPr algn="l">
+              <a:lnSpc>
+                <a:spcPct val="112000"/>
+              </a:lnSpc>
+              <a:spcBef>
+                <a:spcPts val="0"/>
+              </a:spcBef>
+              <a:spcAft>
+                <a:spcPts val="0"/>
+              </a:spcAft>
+              <a:defRPr sz="3200" b="1">
+                <a:solidFill>
+                  <a:srgbClr val="000000"/>
                 </a:solidFill>
                 <a:latin typeface="標楷體"/>
                 <a:ea typeface="標楷體"/>
@@ -19038,9 +20589,9 @@
               </a:defRPr>
             </a:pPr>
             <a:r>
-              <a:rPr sz="3675" b="1" dirty="0" err="1">
-                <a:solidFill>
-                  <a:srgbClr val="17324D"/>
+              <a:rPr sz="3200" b="1" dirty="0" err="1">
+                <a:solidFill>
+                  <a:srgbClr val="000000"/>
                 </a:solidFill>
                 <a:latin typeface="標楷體"/>
                 <a:ea typeface="標楷體"/>
@@ -19088,6 +20639,10 @@
             <a:noFill/>
           </a:ln>
         </p:spPr>
+        <p:txBody>
+          <a:bodyPr/>
+          <a:p/>
+        </p:txBody>
       </p:sp>
       <p:sp>
         <p:nvSpPr>
@@ -19105,8 +20660,8 @@
         </p:nvSpPr>
         <p:spPr>
           <a:xfrm>
-            <a:off x="16716375" y="9648825"/>
-            <a:ext cx="571500" cy="381000"/>
+            <a:off x="16779240" y="9646920"/>
+            <a:ext cx="502920" cy="320040"/>
           </a:xfrm>
           <a:prstGeom prst="rect">
             <a:avLst/>
@@ -19117,7 +20672,9 @@
           </a:ln>
         </p:spPr>
         <p:txBody>
-          <a:bodyPr/>
+          <a:bodyPr wrap="square" lIns="27432" rIns="27432" tIns="18288" bIns="18288" anchor="ctr">
+            <a:noAutofit/>
+          </a:bodyPr>
           <a:lstStyle>
             <a:defPPr>
               <a:defRPr sz="1650" b="0">
@@ -19131,8 +20688,17 @@
             </a:defPPr>
           </a:lstStyle>
           <a:p>
-            <a:pPr>
-              <a:defRPr sz="1650" b="0">
+            <a:pPr algn="r">
+              <a:lnSpc>
+                <a:spcPct val="112000"/>
+              </a:lnSpc>
+              <a:spcBef>
+                <a:spcPts val="0"/>
+              </a:spcBef>
+              <a:spcAft>
+                <a:spcPts val="0"/>
+              </a:spcAft>
+              <a:defRPr sz="1600" b="0">
                 <a:solidFill>
                   <a:srgbClr val="506780"/>
                 </a:solidFill>
@@ -19142,7 +20708,7 @@
               </a:defRPr>
             </a:pPr>
             <a:r>
-              <a:rPr sz="1650" b="0">
+              <a:rPr sz="1600" b="0">
                 <a:solidFill>
                   <a:srgbClr val="506780"/>
                 </a:solidFill>
@@ -19169,31 +20735,40 @@
         </p:nvSpPr>
         <p:spPr>
           <a:xfrm>
-            <a:off x="781050" y="943351"/>
-            <a:ext cx="16322040" cy="692497"/>
+            <a:off x="777240" y="640080"/>
+            <a:ext cx="16733520" cy="822960"/>
           </a:xfrm>
           <a:prstGeom prst="rect">
             <a:avLst/>
           </a:prstGeom>
         </p:spPr>
         <p:txBody>
-          <a:bodyPr lIns="0" tIns="0" rIns="0" bIns="0" rtlCol="0" anchor="t">
-            <a:spAutoFit/>
+          <a:bodyPr lIns="27432" tIns="18288" rIns="27432" bIns="18288" rtlCol="0" anchor="ctr" wrap="square">
+            <a:noAutofit/>
           </a:bodyPr>
           <a:lstStyle/>
           <a:p>
             <a:pPr algn="l">
               <a:lnSpc>
-                <a:spcPts val="5400"/>
+                <a:spcPct val="112000"/>
               </a:lnSpc>
-              <a:defRPr>
+              <a:spcBef>
+                <a:spcPts val="0"/>
+              </a:spcBef>
+              <a:spcAft>
+                <a:spcPts val="0"/>
+              </a:spcAft>
+              <a:defRPr sz="4400">
+                <a:solidFill>
+                  <a:srgbClr val="163048"/>
+                </a:solidFill>
                 <a:latin typeface="標楷體"/>
                 <a:ea typeface="標楷體"/>
                 <a:cs typeface="標楷體"/>
               </a:defRPr>
             </a:pPr>
             <a:r>
-              <a:rPr lang="en-US" sz="4500" b="1" dirty="0">
+              <a:rPr lang="en-US" sz="4400" b="1" dirty="0">
                 <a:solidFill>
                   <a:srgbClr val="163048"/>
                 </a:solidFill>
